--- a/PwC_01_Technical_Architecture.pptx
+++ b/PwC_01_Technical_Architecture.pptx
@@ -4,6 +4,9 @@
   <p:sldMasterIdLst>
     <p:sldMasterId id="2147483648" r:id="rId1"/>
   </p:sldMasterIdLst>
+  <p:notesMasterIdLst>
+    <p:notesMasterId r:id="rId20"/>
+  </p:notesMasterIdLst>
   <p:sldIdLst>
     <p:sldId id="256" r:id="rId2"/>
     <p:sldId id="257" r:id="rId3"/>
@@ -24,9 +27,6 @@
     <p:sldId id="272" r:id="rId18"/>
     <p:sldId id="273" r:id="rId19"/>
   </p:sldIdLst>
-  <p:notesMasterIdLst>
-    <p:notesMasterId r:id="rId20"/>
-  </p:notesMasterIdLst>
   <p:sldSz cx="12192000" cy="6858000"/>
   <p:notesSz cx="6858000" cy="12192000"/>
   <p:defaultTextStyle>
@@ -121,13 +121,20 @@
       </a:defRPr>
     </a:lvl9pPr>
   </p:defaultTextStyle>
+  <p:extLst>
+    <p:ext uri="{EFAFB233-063F-42B5-8137-9DF3F51BA10A}">
+      <p15:sldGuideLst xmlns:p15="http://schemas.microsoft.com/office/powerpoint/2012/main"/>
+    </p:ext>
+  </p:extLst>
 </p:presentation>
 </file>
 
 <file path=ppt/charts/chart1.xml><?xml version="1.0" encoding="utf-8"?>
-<c:chartSpace xmlns:c="http://schemas.openxmlformats.org/drawingml/2006/chart" xmlns:a="http://schemas.openxmlformats.org/drawingml/2006/main" xmlns:r="http://schemas.openxmlformats.org/officeDocument/2006/relationships">
+<c:chartSpace xmlns:c="http://schemas.openxmlformats.org/drawingml/2006/chart" xmlns:a="http://schemas.openxmlformats.org/drawingml/2006/main" xmlns:r="http://schemas.openxmlformats.org/officeDocument/2006/relationships" xmlns:c16r2="http://schemas.microsoft.com/office/drawing/2015/06/chart">
   <c:date1904 val="0"/>
+  <c:lang val="en-US"/>
   <c:roundedCorners val="1"/>
+  <c:style val="2"/>
   <c:chart>
     <c:autoTitleDeleted val="1"/>
     <c:plotArea>
@@ -157,63 +164,37 @@
             <a:effectLst/>
           </c:spPr>
           <c:invertIfNegative val="0"/>
-          <c:dLbls>
-            <c:numFmt formatCode="#,##0" sourceLinked="0"/>
-            <c:txPr>
-              <a:bodyPr/>
-              <a:lstStyle/>
-              <a:p>
-                <a:pPr>
-                  <a:defRPr b="0" i="0" strike="noStrike" sz="1200" u="none">
-                    <a:solidFill>
-                      <a:srgbClr val="000000"/>
-                    </a:solidFill>
-                    <a:latin typeface="Arial"/>
-                  </a:defRPr>
-                </a:pPr>
-              </a:p>
-            </c:txPr>
-            <c:showLegendKey val="0"/>
-            <c:showVal val="0"/>
-            <c:showCatName val="0"/>
-            <c:showSerName val="0"/>
-            <c:showPercent val="0"/>
-            <c:showBubbleSize val="0"/>
-            <c:showLeaderLines val="0"/>
-          </c:dLbls>
           <c:cat>
-            <c:multiLvlStrRef>
+            <c:strRef>
               <c:f>Sheet1!$A$2:$A$9</c:f>
-              <c:multiLvlStrCache>
+              <c:strCache>
                 <c:ptCount val="8"/>
-                <c:lvl>
-                  <c:pt idx="0">
-                    <c:v>SCED dispatch</c:v>
-                  </c:pt>
-                  <c:pt idx="1">
-                    <c:v>Nodal prices</c:v>
-                  </c:pt>
-                  <c:pt idx="2">
-                    <c:v>ERCOT load</c:v>
-                  </c:pt>
-                  <c:pt idx="3">
-                    <c:v>ERCOT fuel mix</c:v>
-                  </c:pt>
-                  <c:pt idx="4">
-                    <c:v>CAISO hourly</c:v>
-                  </c:pt>
-                  <c:pt idx="5">
-                    <c:v>Monthly rollup</c:v>
-                  </c:pt>
-                  <c:pt idx="6">
-                    <c:v>Node stats</c:v>
-                  </c:pt>
-                  <c:pt idx="7">
-                    <c:v>PJM stats</c:v>
-                  </c:pt>
-                </c:lvl>
-              </c:multiLvlStrCache>
-            </c:multiLvlStrRef>
+                <c:pt idx="0">
+                  <c:v>SCED dispatch</c:v>
+                </c:pt>
+                <c:pt idx="1">
+                  <c:v>Nodal prices</c:v>
+                </c:pt>
+                <c:pt idx="2">
+                  <c:v>ERCOT load</c:v>
+                </c:pt>
+                <c:pt idx="3">
+                  <c:v>ERCOT fuel mix</c:v>
+                </c:pt>
+                <c:pt idx="4">
+                  <c:v>CAISO hourly</c:v>
+                </c:pt>
+                <c:pt idx="5">
+                  <c:v>Monthly rollup</c:v>
+                </c:pt>
+                <c:pt idx="6">
+                  <c:v>Node stats</c:v>
+                </c:pt>
+                <c:pt idx="7">
+                  <c:v>PJM stats</c:v>
+                </c:pt>
+              </c:strCache>
+            </c:strRef>
           </c:cat>
           <c:val>
             <c:numRef>
@@ -248,36 +229,23 @@
               </c:numCache>
             </c:numRef>
           </c:val>
+          <c:extLst>
+            <c:ext xmlns:c16="http://schemas.microsoft.com/office/drawing/2014/chart" uri="{C3380CC4-5D6E-409C-BE32-E72D297353CC}">
+              <c16:uniqueId val="{00000000-8E0D-4309-81F8-645395785771}"/>
+            </c:ext>
+          </c:extLst>
         </c:ser>
         <c:dLbls>
-          <c:numFmt formatCode="#,##0" sourceLinked="0"/>
-          <c:txPr>
-            <a:bodyPr/>
-            <a:lstStyle/>
-            <a:p>
-              <a:pPr>
-                <a:defRPr b="0" i="0" strike="noStrike" sz="1200" u="none">
-                  <a:solidFill>
-                    <a:srgbClr val="000000"/>
-                  </a:solidFill>
-                  <a:latin typeface="Arial"/>
-                </a:defRPr>
-              </a:pPr>
-            </a:p>
-          </c:txPr>
           <c:showLegendKey val="0"/>
           <c:showVal val="0"/>
           <c:showCatName val="0"/>
           <c:showSerName val="0"/>
           <c:showPercent val="0"/>
           <c:showBubbleSize val="0"/>
-          <c:showLeaderLines val="0"/>
         </c:dLbls>
         <c:gapWidth val="45"/>
-        <c:overlap val="0"/>
         <c:axId val="2094734554"/>
         <c:axId val="2094734552"/>
-        <c:axId val="2094734556"/>
       </c:barChart>
       <c:catAx>
         <c:axId val="2094734554"/>
@@ -318,6 +286,7 @@
         <c:crosses val="autoZero"/>
         <c:auto val="1"/>
         <c:lblAlgn val="ctr"/>
+        <c:lblOffset val="100"/>
         <c:noMultiLvlLbl val="1"/>
       </c:catAx>
       <c:valAx>
@@ -380,6 +349,7 @@
     </c:plotArea>
     <c:plotVisOnly val="1"/>
     <c:dispBlanksAs val="span"/>
+    <c:showDLblsOverMax val="1"/>
   </c:chart>
   <c:spPr>
     <a:noFill/>
@@ -395,9 +365,11 @@
 </file>
 
 <file path=ppt/charts/chart2.xml><?xml version="1.0" encoding="utf-8"?>
-<c:chartSpace xmlns:c="http://schemas.openxmlformats.org/drawingml/2006/chart" xmlns:a="http://schemas.openxmlformats.org/drawingml/2006/main" xmlns:r="http://schemas.openxmlformats.org/officeDocument/2006/relationships">
+<c:chartSpace xmlns:c="http://schemas.openxmlformats.org/drawingml/2006/chart" xmlns:a="http://schemas.openxmlformats.org/drawingml/2006/main" xmlns:r="http://schemas.openxmlformats.org/officeDocument/2006/relationships" xmlns:c16r2="http://schemas.microsoft.com/office/drawing/2015/06/chart">
   <c:date1904 val="0"/>
+  <c:lang val="en-US"/>
   <c:roundedCorners val="1"/>
+  <c:style val="2"/>
   <c:chart>
     <c:autoTitleDeleted val="1"/>
     <c:plotArea>
@@ -427,40 +399,15 @@
             <a:effectLst/>
           </c:spPr>
           <c:invertIfNegative val="0"/>
-          <c:dLbls>
-            <c:numFmt formatCode="&quot;$&quot;#,##0" sourceLinked="0"/>
-            <c:txPr>
-              <a:bodyPr/>
-              <a:lstStyle/>
-              <a:p>
-                <a:pPr>
-                  <a:defRPr b="0" i="0" strike="noStrike" sz="1000" u="none">
-                    <a:solidFill>
-                      <a:srgbClr val="0E1A2B"/>
-                    </a:solidFill>
-                    <a:latin typeface="Calibri"/>
-                  </a:defRPr>
-                </a:pPr>
-              </a:p>
-            </c:txPr>
-            <c:showLegendKey val="0"/>
-            <c:showVal val="1"/>
-            <c:showCatName val="0"/>
-            <c:showSerName val="0"/>
-            <c:showPercent val="0"/>
-            <c:showBubbleSize val="0"/>
-            <c:showLeaderLines val="0"/>
-          </c:dLbls>
           <c:dPt>
             <c:idx val="0"/>
             <c:invertIfNegative val="0"/>
             <c:bubble3D val="0"/>
-            <c:spPr>
-              <a:solidFill>
-                <a:srgbClr val="2E86AB"/>
-              </a:solidFill>
-              <a:effectLst/>
-            </c:spPr>
+            <c:extLst>
+              <c:ext xmlns:c16="http://schemas.microsoft.com/office/drawing/2014/chart" uri="{C3380CC4-5D6E-409C-BE32-E72D297353CC}">
+                <c16:uniqueId val="{00000001-1F8A-4B48-93A5-1DF905515C7D}"/>
+              </c:ext>
+            </c:extLst>
           </c:dPt>
           <c:dPt>
             <c:idx val="1"/>
@@ -472,6 +419,11 @@
               </a:solidFill>
               <a:effectLst/>
             </c:spPr>
+            <c:extLst>
+              <c:ext xmlns:c16="http://schemas.microsoft.com/office/drawing/2014/chart" uri="{C3380CC4-5D6E-409C-BE32-E72D297353CC}">
+                <c16:uniqueId val="{00000003-1F8A-4B48-93A5-1DF905515C7D}"/>
+              </c:ext>
+            </c:extLst>
           </c:dPt>
           <c:dPt>
             <c:idx val="2"/>
@@ -483,6 +435,11 @@
               </a:solidFill>
               <a:effectLst/>
             </c:spPr>
+            <c:extLst>
+              <c:ext xmlns:c16="http://schemas.microsoft.com/office/drawing/2014/chart" uri="{C3380CC4-5D6E-409C-BE32-E72D297353CC}">
+                <c16:uniqueId val="{00000005-1F8A-4B48-93A5-1DF905515C7D}"/>
+              </c:ext>
+            </c:extLst>
           </c:dPt>
           <c:dPt>
             <c:idx val="3"/>
@@ -494,6 +451,11 @@
               </a:solidFill>
               <a:effectLst/>
             </c:spPr>
+            <c:extLst>
+              <c:ext xmlns:c16="http://schemas.microsoft.com/office/drawing/2014/chart" uri="{C3380CC4-5D6E-409C-BE32-E72D297353CC}">
+                <c16:uniqueId val="{00000007-1F8A-4B48-93A5-1DF905515C7D}"/>
+              </c:ext>
+            </c:extLst>
           </c:dPt>
           <c:dPt>
             <c:idx val="4"/>
@@ -505,36 +467,76 @@
               </a:solidFill>
               <a:effectLst/>
             </c:spPr>
+            <c:extLst>
+              <c:ext xmlns:c16="http://schemas.microsoft.com/office/drawing/2014/chart" uri="{C3380CC4-5D6E-409C-BE32-E72D297353CC}">
+                <c16:uniqueId val="{00000009-1F8A-4B48-93A5-1DF905515C7D}"/>
+              </c:ext>
+            </c:extLst>
           </c:dPt>
+          <c:dLbls>
+            <c:numFmt formatCode="&quot;$&quot;#,##0" sourceLinked="0"/>
+            <c:spPr>
+              <a:noFill/>
+              <a:ln>
+                <a:noFill/>
+              </a:ln>
+              <a:effectLst/>
+            </c:spPr>
+            <c:txPr>
+              <a:bodyPr/>
+              <a:lstStyle/>
+              <a:p>
+                <a:pPr>
+                  <a:defRPr sz="1000" b="0" i="0" u="none" strike="noStrike">
+                    <a:solidFill>
+                      <a:srgbClr val="0E1A2B"/>
+                    </a:solidFill>
+                    <a:latin typeface="Calibri"/>
+                  </a:defRPr>
+                </a:pPr>
+                <a:endParaRPr lang="en-US"/>
+              </a:p>
+            </c:txPr>
+            <c:showLegendKey val="0"/>
+            <c:showVal val="1"/>
+            <c:showCatName val="0"/>
+            <c:showSerName val="0"/>
+            <c:showPercent val="0"/>
+            <c:showBubbleSize val="0"/>
+            <c:showLeaderLines val="0"/>
+            <c:extLst>
+              <c:ext xmlns:c15="http://schemas.microsoft.com/office/drawing/2012/chart" uri="{CE6537A1-D6FC-4f65-9D91-7224C49458BB}">
+                <c15:showLeaderLines val="0"/>
+              </c:ext>
+            </c:extLst>
+          </c:dLbls>
           <c:cat>
-            <c:multiLvlStrRef>
+            <c:strRef>
               <c:f>Sheet1!$A$2:$A$6</c:f>
-              <c:multiLvlStrCache>
+              <c:strCache>
                 <c:ptCount val="5"/>
-                <c:lvl>
-                  <c:pt idx="0">
-                    <c:v>As-built
+                <c:pt idx="0">
+                  <c:v>As-built
 (VM + PG)</c:v>
-                  </c:pt>
-                  <c:pt idx="1">
-                    <c:v>Phase 1
+                </c:pt>
+                <c:pt idx="1">
+                  <c:v>Phase 1
 + Fabric F2</c:v>
-                  </c:pt>
-                  <c:pt idx="2">
-                    <c:v>Phase 2
+                </c:pt>
+                <c:pt idx="2">
+                  <c:v>Phase 2
 + Container Apps</c:v>
-                  </c:pt>
-                  <c:pt idx="3">
-                    <c:v>Phase 3
+                </c:pt>
+                <c:pt idx="3">
+                  <c:v>Phase 3
 + Purview</c:v>
-                  </c:pt>
-                  <c:pt idx="4">
-                    <c:v>Phase 5
+                </c:pt>
+                <c:pt idx="4">
+                  <c:v>Phase 5
 + Foundry</c:v>
-                  </c:pt>
-                </c:lvl>
-              </c:multiLvlStrCache>
-            </c:multiLvlStrRef>
+                </c:pt>
+              </c:strCache>
+            </c:strRef>
           </c:cat>
           <c:val>
             <c:numRef>
@@ -560,36 +562,23 @@
               </c:numCache>
             </c:numRef>
           </c:val>
+          <c:extLst>
+            <c:ext xmlns:c16="http://schemas.microsoft.com/office/drawing/2014/chart" uri="{C3380CC4-5D6E-409C-BE32-E72D297353CC}">
+              <c16:uniqueId val="{0000000A-1F8A-4B48-93A5-1DF905515C7D}"/>
+            </c:ext>
+          </c:extLst>
         </c:ser>
         <c:dLbls>
-          <c:numFmt formatCode="&quot;$&quot;#,##0" sourceLinked="0"/>
-          <c:txPr>
-            <a:bodyPr/>
-            <a:lstStyle/>
-            <a:p>
-              <a:pPr>
-                <a:defRPr b="0" i="0" strike="noStrike" sz="1000" u="none">
-                  <a:solidFill>
-                    <a:srgbClr val="0E1A2B"/>
-                  </a:solidFill>
-                  <a:latin typeface="Calibri"/>
-                </a:defRPr>
-              </a:pPr>
-            </a:p>
-          </c:txPr>
           <c:showLegendKey val="0"/>
           <c:showVal val="1"/>
           <c:showCatName val="0"/>
           <c:showSerName val="0"/>
           <c:showPercent val="0"/>
           <c:showBubbleSize val="0"/>
-          <c:showLeaderLines val="0"/>
         </c:dLbls>
         <c:gapWidth val="55"/>
-        <c:overlap val="0"/>
         <c:axId val="2094734554"/>
         <c:axId val="2094734552"/>
-        <c:axId val="2094734556"/>
       </c:barChart>
       <c:catAx>
         <c:axId val="2094734554"/>
@@ -630,6 +619,7 @@
         <c:crosses val="autoZero"/>
         <c:auto val="1"/>
         <c:lblAlgn val="ctr"/>
+        <c:lblOffset val="100"/>
         <c:noMultiLvlLbl val="1"/>
       </c:catAx>
       <c:valAx>
@@ -692,6 +682,7 @@
     </c:plotArea>
     <c:plotVisOnly val="1"/>
     <c:dispBlanksAs val="span"/>
+    <c:showDLblsOverMax val="1"/>
   </c:chart>
   <c:spPr>
     <a:noFill/>
@@ -728,234 +719,10 @@
           <a:chExt cx="0" cy="0"/>
         </a:xfrm>
       </p:grpSpPr>
-      <p:sp>
-        <p:nvSpPr>
-          <p:cNvPr id="2" name="Header Placeholder 1"/>
-          <p:cNvSpPr>
-            <a:spLocks noGrp="1"/>
-          </p:cNvSpPr>
-          <p:nvPr>
-            <p:ph type="hdr" sz="quarter"/>
-          </p:nvPr>
-        </p:nvSpPr>
-        <p:spPr>
-          <a:xfrm>
-            <a:off x="0" y="0"/>
-            <a:ext cx="2971800" cy="458788"/>
-          </a:xfrm>
-          <a:prstGeom prst="rect">
-            <a:avLst/>
-          </a:prstGeom>
-        </p:spPr>
-        <p:txBody>
-          <a:bodyPr vert="horz" lIns="91440" tIns="45720" rIns="91440" bIns="45720" rtlCol="0"/>
-          <a:lstStyle>
-            <a:lvl1pPr algn="l">
-              <a:defRPr sz="1200"/>
-            </a:lvl1pPr>
-          </a:lstStyle>
-          <a:p>
-            <a:endParaRPr lang="en-US"/>
-          </a:p>
-        </p:txBody>
-      </p:sp>
-      <p:sp>
-        <p:nvSpPr>
-          <p:cNvPr id="3" name="Date Placeholder 2"/>
-          <p:cNvSpPr>
-            <a:spLocks noGrp="1"/>
-          </p:cNvSpPr>
-          <p:nvPr>
-            <p:ph type="dt" idx="1"/>
-          </p:nvPr>
-        </p:nvSpPr>
-        <p:spPr>
-          <a:xfrm>
-            <a:off x="3884613" y="0"/>
-            <a:ext cx="2971800" cy="458788"/>
-          </a:xfrm>
-          <a:prstGeom prst="rect">
-            <a:avLst/>
-          </a:prstGeom>
-        </p:spPr>
-        <p:txBody>
-          <a:bodyPr vert="horz" lIns="91440" tIns="45720" rIns="91440" bIns="45720" rtlCol="0"/>
-          <a:lstStyle>
-            <a:lvl1pPr algn="r">
-              <a:defRPr sz="1200"/>
-            </a:lvl1pPr>
-          </a:lstStyle>
-          <a:p>
-            <a:fld id="{5282F153-3F37-0F45-9E97-73ACFA13230C}" type="datetimeFigureOut">
-              <a:rPr lang="en-US"/>
-              <a:t>7/23/19</a:t>
-            </a:fld>
-            <a:endParaRPr lang="en-US"/>
-          </a:p>
-        </p:txBody>
-      </p:sp>
-      <p:sp>
-        <p:nvSpPr>
-          <p:cNvPr id="4" name="Slide Image Placeholder 3"/>
-          <p:cNvSpPr>
-            <a:spLocks noGrp="1" noRot="1" noChangeAspect="1"/>
-          </p:cNvSpPr>
-          <p:nvPr>
-            <p:ph type="sldImg" idx="2"/>
-          </p:nvPr>
-        </p:nvSpPr>
-        <p:spPr>
-          <a:xfrm>
-            <a:off x="685800" y="1143000"/>
-            <a:ext cx="5486400" cy="3086100"/>
-          </a:xfrm>
-          <a:prstGeom prst="rect">
-            <a:avLst/>
-          </a:prstGeom>
-          <a:noFill/>
-          <a:ln w="12700">
-            <a:solidFill>
-              <a:prstClr val="black"/>
-            </a:solidFill>
-          </a:ln>
-        </p:spPr>
-        <p:txBody>
-          <a:bodyPr vert="horz" lIns="91440" tIns="45720" rIns="91440" bIns="45720" rtlCol="0" anchor="ctr"/>
-          <a:lstStyle/>
-          <a:p>
-            <a:endParaRPr lang="en-US"/>
-          </a:p>
-        </p:txBody>
-      </p:sp>
-      <p:sp>
-        <p:nvSpPr>
-          <p:cNvPr id="5" name="Notes Placeholder 4"/>
-          <p:cNvSpPr>
-            <a:spLocks noGrp="1"/>
-          </p:cNvSpPr>
-          <p:nvPr>
-            <p:ph type="body" sz="quarter" idx="3"/>
-          </p:nvPr>
-        </p:nvSpPr>
-        <p:spPr>
-          <a:xfrm>
-            <a:off x="685800" y="4400550"/>
-            <a:ext cx="5486400" cy="3600450"/>
-          </a:xfrm>
-          <a:prstGeom prst="rect">
-            <a:avLst/>
-          </a:prstGeom>
-        </p:spPr>
-        <p:txBody>
-          <a:bodyPr vert="horz" lIns="91440" tIns="45720" rIns="91440" bIns="45720" rtlCol="0"/>
-          <a:lstStyle/>
-          <a:p>
-            <a:pPr lvl="0"/>
-            <a:r>
-              <a:rPr lang="en-US"/>
-              <a:t>Click to edit Master text styles</a:t>
-            </a:r>
-          </a:p>
-          <a:p>
-            <a:pPr lvl="1"/>
-            <a:r>
-              <a:rPr lang="en-US"/>
-              <a:t>Second level</a:t>
-            </a:r>
-          </a:p>
-          <a:p>
-            <a:pPr lvl="2"/>
-            <a:r>
-              <a:rPr lang="en-US"/>
-              <a:t>Third level</a:t>
-            </a:r>
-          </a:p>
-          <a:p>
-            <a:pPr lvl="3"/>
-            <a:r>
-              <a:rPr lang="en-US"/>
-              <a:t>Fourth level</a:t>
-            </a:r>
-          </a:p>
-          <a:p>
-            <a:pPr lvl="4"/>
-            <a:r>
-              <a:rPr lang="en-US"/>
-              <a:t>Fifth level</a:t>
-            </a:r>
-          </a:p>
-        </p:txBody>
-      </p:sp>
-      <p:sp>
-        <p:nvSpPr>
-          <p:cNvPr id="6" name="Footer Placeholder 5"/>
-          <p:cNvSpPr>
-            <a:spLocks noGrp="1"/>
-          </p:cNvSpPr>
-          <p:nvPr>
-            <p:ph type="ftr" sz="quarter" idx="4"/>
-          </p:nvPr>
-        </p:nvSpPr>
-        <p:spPr>
-          <a:xfrm>
-            <a:off x="0" y="8685213"/>
-            <a:ext cx="2971800" cy="458787"/>
-          </a:xfrm>
-          <a:prstGeom prst="rect">
-            <a:avLst/>
-          </a:prstGeom>
-        </p:spPr>
-        <p:txBody>
-          <a:bodyPr vert="horz" lIns="91440" tIns="45720" rIns="91440" bIns="45720" rtlCol="0" anchor="b"/>
-          <a:lstStyle>
-            <a:lvl1pPr algn="l">
-              <a:defRPr sz="1200"/>
-            </a:lvl1pPr>
-          </a:lstStyle>
-          <a:p>
-            <a:endParaRPr lang="en-US"/>
-          </a:p>
-        </p:txBody>
-      </p:sp>
-      <p:sp>
-        <p:nvSpPr>
-          <p:cNvPr id="7" name="Slide Number Placeholder 6"/>
-          <p:cNvSpPr>
-            <a:spLocks noGrp="1"/>
-          </p:cNvSpPr>
-          <p:nvPr>
-            <p:ph type="sldNum" sz="quarter" idx="5"/>
-          </p:nvPr>
-        </p:nvSpPr>
-        <p:spPr>
-          <a:xfrm>
-            <a:off x="3884613" y="8685213"/>
-            <a:ext cx="2971800" cy="458787"/>
-          </a:xfrm>
-          <a:prstGeom prst="rect">
-            <a:avLst/>
-          </a:prstGeom>
-        </p:spPr>
-        <p:txBody>
-          <a:bodyPr vert="horz" lIns="91440" tIns="45720" rIns="91440" bIns="45720" rtlCol="0" anchor="b"/>
-          <a:lstStyle>
-            <a:lvl1pPr algn="r">
-              <a:defRPr sz="1200"/>
-            </a:lvl1pPr>
-          </a:lstStyle>
-          <a:p>
-            <a:fld id="{CE5E9CC1-C706-0F49-92D6-E571CC5EEA8F}" type="slidenum">
-              <a:rPr lang="en-US"/>
-              <a:t>‹#›</a:t>
-            </a:fld>
-            <a:endParaRPr lang="en-US"/>
-          </a:p>
-        </p:txBody>
-      </p:sp>
     </p:spTree>
     <p:extLst>
       <p:ext uri="{BB962C8B-B14F-4D97-AF65-F5344CB8AC3E}">
-        <p14:creationId xmlns:p14="http://schemas.microsoft.com/office/powerpoint/2010/main" val="1024086991"/>
+        <p14:creationId xmlns:p14="http://schemas.microsoft.com/office/powerpoint/2010/main" val="1936291380"/>
       </p:ext>
     </p:extLst>
   </p:cSld>
@@ -1103,7 +870,6 @@
               <a:rPr lang="en-US" dirty="0"/>
               <a:t>Framing: this is a live production system I designed and built end-to-end — not a prototype. Today I want to cover three things: the architecture as built and why I made those calls, the engineering problems I hit and how I solved them, and how this scales onto the full Azure data platform for enterprise clients.</a:t>
             </a:r>
-            <a:endParaRPr lang="en-US" dirty="0"/>
           </a:p>
         </p:txBody>
       </p:sp>
@@ -1191,7 +957,6 @@
               <a:rPr lang="en-US" dirty="0"/>
               <a:t>This is the slide I'd want them to remember. The lean build was not a dead end — it's forward-compatible. Mirroring means the migration is additive rather than a rewrite: Postgres keeps serving the product while Fabric takes over analytics and AI. That de-risks the whole path.</a:t>
             </a:r>
-            <a:endParaRPr lang="en-US" dirty="0"/>
           </a:p>
         </p:txBody>
       </p:sp>
@@ -1279,7 +1044,6 @@
               <a:rPr lang="en-US" dirty="0"/>
               <a:t>If they ask one 'do you really know Azure' question, it will be this one. The answer they want to hear is not a favourite product — it's workload-to-store reasoning. Note the Synapse row: knowing it's supported-but-not-strategic, and that Data Explorer specifically retired, is the kind of currency that separates real practice from a certification.</a:t>
             </a:r>
-            <a:endParaRPr lang="en-US" dirty="0"/>
           </a:p>
         </p:txBody>
       </p:sp>
@@ -1367,7 +1131,6 @@
               <a:rPr lang="en-US" dirty="0"/>
               <a:t>The consolidation argument is the real Fabric value proposition for a consulting engagement. Clients are not short of tools; they're short of integration budget. Fabric's answer is that the seams between ingestion, storage, warehousing, BI and AI are pre-built and governed by one model.</a:t>
             </a:r>
-            <a:endParaRPr lang="en-US" dirty="0"/>
           </a:p>
         </p:txBody>
       </p:sp>
@@ -1455,7 +1218,6 @@
               <a:rPr lang="en-US" dirty="0"/>
               <a:t>Two things to land. First, I've already built the agentic pattern — tool-calling over a real database and a real solver — so this isn't theory. Second, the retirement date: knowing the Assistants API dies in August 2026 is exactly the kind of detail that decides whether a client's roadmap is real or aspirational.</a:t>
             </a:r>
-            <a:endParaRPr lang="en-US" dirty="0"/>
           </a:p>
         </p:txBody>
       </p:sp>
@@ -1543,7 +1305,6 @@
               <a:rPr lang="en-US" dirty="0"/>
               <a:t>This is the slide that connects the technical deck to the commercial one. Engineering directors sometimes treat governance as overhead. In energy trading and origination it is the gate — if you can't evidence lineage and prevent leakage, the deal team can't use your output regardless of how good the model is.</a:t>
             </a:r>
-            <a:endParaRPr lang="en-US" dirty="0"/>
           </a:p>
         </p:txBody>
       </p:sp>
@@ -1631,7 +1392,6 @@
               <a:rPr lang="en-US" dirty="0"/>
               <a:t>I deliberately give the alternatives real strengths. Claiming Azure wins on every axis would tell them I haven't used the others. The defensible claim is narrower and stronger: for a client already on M365 and Entra, needing unified governance across data AND AI agents, Azure's integration story wins — and that is most large energy clients.</a:t>
             </a:r>
-            <a:endParaRPr lang="en-US" dirty="0"/>
           </a:p>
         </p:txBody>
       </p:sp>
@@ -1719,7 +1479,6 @@
               <a:rPr lang="en-US" dirty="0"/>
               <a:t>The sequencing is the argument. Mirroring first because it's additive and reversible. Governance before client data — non-negotiable. Agents last, because an agent over ungoverned data is a liability, not a feature. If they push on timeline, the honest answer is that Phase 1 is weeks and Phase 5 depends on how much semantic modelling the client's data needs.</a:t>
             </a:r>
-            <a:endParaRPr lang="en-US" dirty="0"/>
           </a:p>
         </p:txBody>
       </p:sp>
@@ -1807,7 +1566,6 @@
               <a:rPr lang="en-US" dirty="0"/>
               <a:t>Be explicit that these are planning numbers, not a quote — an engineering director will respect the caveat and distrust false precision. The substantive point is that the Fabric capacity SKU is a reservation, so FinOps discipline (right-sizing and pausing) is part of the architecture, not an afterthought.</a:t>
             </a:r>
-            <a:endParaRPr lang="en-US" dirty="0"/>
           </a:p>
         </p:txBody>
       </p:sp>
@@ -1895,7 +1653,6 @@
               <a:rPr lang="en-US" dirty="0"/>
               <a:t>Close on transferability. The energy domain is incidental — what moves to a client engagement is the reasoning: how to pick a store per workload, how to sequence a migration so it stays fundable and reversible, and how to put governance in front of AI rather than behind it.</a:t>
             </a:r>
-            <a:endParaRPr lang="en-US" dirty="0"/>
           </a:p>
         </p:txBody>
       </p:sp>
@@ -1983,7 +1740,6 @@
               <a:rPr lang="en-US" dirty="0"/>
               <a:t>Keep this brief — it's context, not the point of the deck. The one thing to land: every number on the screen traces to a primary regulator source, not an estimate. That matters for a deal team signing a 15-year PPA.</a:t>
             </a:r>
-            <a:endParaRPr lang="en-US" dirty="0"/>
           </a:p>
         </p:txBody>
       </p:sp>
@@ -2071,7 +1827,6 @@
               <a:rPr lang="en-US" dirty="0"/>
               <a:t>The point of this slide is that the architecture is boring on purpose. Two processes, one database. No Kubernetes, no message bus, no orchestrator. For a single-tenant analytical product with batch ingestion and a synchronous solver, added distributed machinery would be cost and failure surface with no payoff. I'll show where that stops being true later in the deck.</a:t>
             </a:r>
-            <a:endParaRPr lang="en-US" dirty="0"/>
           </a:p>
         </p:txBody>
       </p:sp>
@@ -2159,7 +1914,6 @@
               <a:rPr lang="en-US" dirty="0"/>
               <a:t>This is where I'd expect technical questions. The design constraint was a 2 vCPU / 8 GB VM against multi-gigabyte regulator archives. The answer was to never hold a full day in memory and to make every unit of work independently replayable. Polars over pandas was a deliberate memory decision, not a preference.</a:t>
             </a:r>
-            <a:endParaRPr lang="en-US" dirty="0"/>
           </a:p>
         </p:txBody>
       </p:sp>
@@ -2247,7 +2001,6 @@
               <a:rPr lang="en-US" dirty="0"/>
               <a:t>I want to be judged on the reasoning, not the stack. Every row here is a constraint-driven call I can defend, and every one has a real cost I accepted knowingly. The last row is the honest one: a single VM has no rolling deploy and no self-healing. That's fine for one tenant and unacceptable for a client platform — which is the bridge to the Azure section.</a:t>
             </a:r>
-            <a:endParaRPr lang="en-US" dirty="0"/>
           </a:p>
         </p:txBody>
       </p:sp>
@@ -2335,7 +2088,6 @@
               <a:rPr lang="en-US" dirty="0"/>
               <a:t>This is my favourite slide because it's the one that shows how I actually work. The instinct is to reach for more hardware or more indexes. The real fix was reading the plan and realising a four-expression composite key can't be hashed. Same data, same result, 300x faster — from changing the shape of the join, not the size of the machine.</a:t>
             </a:r>
-            <a:endParaRPr lang="en-US" dirty="0"/>
           </a:p>
         </p:txBody>
       </p:sp>
@@ -2423,7 +2175,6 @@
               <a:rPr lang="en-US" dirty="0"/>
               <a:t>The log scale is the message. 25 million rows of dispatch, but the endpoints read tables in the tens of thousands. Designing that seam deliberately — rather than indexing the big table harder — is what keeps the product responsive on a 2 vCPU box.</a:t>
             </a:r>
-            <a:endParaRPr lang="en-US" dirty="0"/>
           </a:p>
         </p:txBody>
       </p:sp>
@@ -2511,7 +2262,6 @@
               <a:rPr lang="en-US" dirty="0"/>
               <a:t>Leading with limitations is deliberate. I'd rather name the ceiling myself than have them find it. The important framing: none of these are mistakes — they're the correct trade for a single-tenant internal tool. They become blockers the moment this is client-facing, and that's precisely what the Azure target state addresses.</a:t>
             </a:r>
-            <a:endParaRPr lang="en-US" dirty="0"/>
           </a:p>
         </p:txBody>
       </p:sp>
@@ -2599,7 +2349,6 @@
               <a:rPr lang="en-US" dirty="0"/>
               <a:t>Note what I did NOT do: I did not throw away PostgreSQL. The transactional store and the solver stay where they are strongest, and Fabric takes the analytical and AI surface. Ripping out a working OLTP engine to put everything in a lakehouse would be architecture-by-fashion.</a:t>
             </a:r>
-            <a:endParaRPr lang="en-US" dirty="0"/>
           </a:p>
         </p:txBody>
       </p:sp>
@@ -2672,6 +2421,11 @@
 <file path=ppt/slideMasters/slideMaster1.xml><?xml version="1.0" encoding="utf-8"?>
 <p:sldMaster xmlns:a="http://schemas.openxmlformats.org/drawingml/2006/main" xmlns:r="http://schemas.openxmlformats.org/officeDocument/2006/relationships" xmlns:p="http://schemas.openxmlformats.org/presentationml/2006/main">
   <p:cSld>
+    <p:bg>
+      <p:bgRef idx="1001">
+        <a:schemeClr val="bg1"/>
+      </p:bgRef>
+    </p:bg>
     <p:spTree>
       <p:nvGrpSpPr>
         <p:cNvPr id="1" name=""/>
@@ -2954,6 +2708,7 @@
         <a:solidFill>
           <a:srgbClr val="0E1A2B"/>
         </a:solidFill>
+        <a:effectLst/>
       </p:bgPr>
     </p:bg>
     <p:spTree>
@@ -3018,11 +2773,11 @@
           <a:bodyPr wrap="square" lIns="0" tIns="0" rIns="0" bIns="0" rtlCol="0" anchor="ctr"/>
           <a:lstStyle/>
           <a:p>
-            <a:pPr algn="ctr" indent="0" marL="0">
-              <a:buNone/>
-            </a:pPr>
-            <a:r>
-              <a:rPr lang="en-US" sz="950" b="1" spc="100" kern="0" dirty="0">
+            <a:pPr marL="0" indent="0" algn="ctr">
+              <a:buNone/>
+            </a:pPr>
+            <a:r>
+              <a:rPr lang="en-US" sz="950" b="1" kern="0" spc="100" dirty="0">
                 <a:solidFill>
                   <a:srgbClr val="0E1A2B"/>
                 </a:solidFill>
@@ -3057,7 +2812,7 @@
           <a:bodyPr wrap="square" lIns="0" tIns="0" rIns="0" bIns="0" rtlCol="0" anchor="ctr"/>
           <a:lstStyle/>
           <a:p>
-            <a:pPr indent="0" marL="0">
+            <a:pPr marL="0" indent="0">
               <a:lnSpc>
                 <a:spcPct val="95000"/>
               </a:lnSpc>
@@ -3072,42 +2827,100 @@
                 <a:ea typeface="Cambria" pitchFamily="34" charset="-122"/>
                 <a:cs typeface="Cambria" pitchFamily="34" charset="-120"/>
               </a:rPr>
-              <a:t>Grid Origination</a:t>
+              <a:t>Grid Intelligence Platform</a:t>
             </a:r>
             <a:endParaRPr lang="en-US" sz="4200" dirty="0"/>
           </a:p>
-          <a:p>
-            <a:pPr indent="0" marL="0">
-              <a:lnSpc>
-                <a:spcPct val="95000"/>
-              </a:lnSpc>
-              <a:buNone/>
-            </a:pPr>
-            <a:r>
-              <a:rPr lang="en-US" sz="4200" b="1" dirty="0">
-                <a:solidFill>
-                  <a:srgbClr val="FFFFFF"/>
+        </p:txBody>
+      </p:sp>
+      <p:sp>
+        <p:nvSpPr>
+          <p:cNvPr id="5" name="Text 3"/>
+          <p:cNvSpPr/>
+          <p:nvPr/>
+        </p:nvSpPr>
+        <p:spPr>
+          <a:xfrm>
+            <a:off x="548640" y="3429000"/>
+            <a:ext cx="8046720" cy="457200"/>
+          </a:xfrm>
+          <a:prstGeom prst="rect">
+            <a:avLst/>
+          </a:prstGeom>
+          <a:noFill/>
+          <a:ln/>
+        </p:spPr>
+        <p:txBody>
+          <a:bodyPr wrap="square" lIns="0" tIns="0" rIns="0" bIns="0" rtlCol="0" anchor="ctr"/>
+          <a:lstStyle/>
+          <a:p>
+            <a:pPr marL="0" indent="0">
+              <a:buNone/>
+            </a:pPr>
+            <a:r>
+              <a:rPr lang="en-US" sz="1550" dirty="0">
+                <a:solidFill>
+                  <a:srgbClr val="D6E4F0"/>
+                </a:solidFill>
+                <a:latin typeface="Calibri" pitchFamily="34" charset="0"/>
+                <a:ea typeface="Calibri" pitchFamily="34" charset="-122"/>
+                <a:cs typeface="Calibri" pitchFamily="34" charset="-120"/>
+              </a:rPr>
+              <a:t>Technical architecture, engineering trade-offs, and the Azure-native scale path</a:t>
+            </a:r>
+            <a:endParaRPr lang="en-US" sz="1550" dirty="0"/>
+          </a:p>
+        </p:txBody>
+      </p:sp>
+      <p:sp>
+        <p:nvSpPr>
+          <p:cNvPr id="6" name="Text 4"/>
+          <p:cNvSpPr/>
+          <p:nvPr/>
+        </p:nvSpPr>
+        <p:spPr>
+          <a:xfrm>
+            <a:off x="9052560" y="1572768"/>
+            <a:ext cx="2743200" cy="457200"/>
+          </a:xfrm>
+          <a:prstGeom prst="rect">
+            <a:avLst/>
+          </a:prstGeom>
+          <a:noFill/>
+          <a:ln/>
+        </p:spPr>
+        <p:txBody>
+          <a:bodyPr wrap="square" lIns="0" tIns="0" rIns="0" bIns="0" rtlCol="0" anchor="ctr"/>
+          <a:lstStyle/>
+          <a:p>
+            <a:pPr marL="0" indent="0">
+              <a:buNone/>
+            </a:pPr>
+            <a:r>
+              <a:rPr lang="en-US" sz="2400" b="1" dirty="0">
+                <a:solidFill>
+                  <a:srgbClr val="02C39A"/>
                 </a:solidFill>
                 <a:latin typeface="Cambria" pitchFamily="34" charset="0"/>
                 <a:ea typeface="Cambria" pitchFamily="34" charset="-122"/>
                 <a:cs typeface="Cambria" pitchFamily="34" charset="-120"/>
               </a:rPr>
-              <a:t>Intelligence Platform</a:t>
-            </a:r>
-            <a:endParaRPr lang="en-US" sz="4200" dirty="0"/>
-          </a:p>
-        </p:txBody>
-      </p:sp>
-      <p:sp>
-        <p:nvSpPr>
-          <p:cNvPr id="5" name="Text 3"/>
-          <p:cNvSpPr/>
-          <p:nvPr/>
-        </p:nvSpPr>
-        <p:spPr>
-          <a:xfrm>
-            <a:off x="548640" y="3429000"/>
-            <a:ext cx="8046720" cy="457200"/>
+              <a:t>25.5M</a:t>
+            </a:r>
+            <a:endParaRPr lang="en-US" sz="2400" dirty="0"/>
+          </a:p>
+        </p:txBody>
+      </p:sp>
+      <p:sp>
+        <p:nvSpPr>
+          <p:cNvPr id="7" name="Text 5"/>
+          <p:cNvSpPr/>
+          <p:nvPr/>
+        </p:nvSpPr>
+        <p:spPr>
+          <a:xfrm>
+            <a:off x="9052560" y="1975104"/>
+            <a:ext cx="2743200" cy="274320"/>
           </a:xfrm>
           <a:prstGeom prst="rect">
             <a:avLst/>
@@ -3119,33 +2932,33 @@
           <a:bodyPr wrap="square" lIns="0" tIns="0" rIns="0" bIns="0" rtlCol="0" anchor="ctr"/>
           <a:lstStyle/>
           <a:p>
-            <a:pPr indent="0" marL="0">
-              <a:buNone/>
-            </a:pPr>
-            <a:r>
-              <a:rPr lang="en-US" sz="1550" dirty="0">
-                <a:solidFill>
-                  <a:srgbClr val="D6E4F0"/>
-                </a:solidFill>
-                <a:latin typeface="Calibri" pitchFamily="34" charset="0"/>
-                <a:ea typeface="Calibri" pitchFamily="34" charset="-122"/>
-                <a:cs typeface="Calibri" pitchFamily="34" charset="-120"/>
-              </a:rPr>
-              <a:t>Technical architecture, engineering trade-offs, and the Azure-native scale path</a:t>
-            </a:r>
-            <a:endParaRPr lang="en-US" sz="1550" dirty="0"/>
-          </a:p>
-        </p:txBody>
-      </p:sp>
-      <p:sp>
-        <p:nvSpPr>
-          <p:cNvPr id="6" name="Text 4"/>
-          <p:cNvSpPr/>
-          <p:nvPr/>
-        </p:nvSpPr>
-        <p:spPr>
-          <a:xfrm>
-            <a:off x="9052560" y="1572768"/>
+            <a:pPr marL="0" indent="0">
+              <a:buNone/>
+            </a:pPr>
+            <a:r>
+              <a:rPr lang="en-US" sz="1050" dirty="0">
+                <a:solidFill>
+                  <a:srgbClr val="8CA3BC"/>
+                </a:solidFill>
+                <a:latin typeface="Calibri" pitchFamily="34" charset="0"/>
+                <a:ea typeface="Calibri" pitchFamily="34" charset="-122"/>
+                <a:cs typeface="Calibri" pitchFamily="34" charset="-120"/>
+              </a:rPr>
+              <a:t>SCED dispatch rows</a:t>
+            </a:r>
+            <a:endParaRPr lang="en-US" sz="1050" dirty="0"/>
+          </a:p>
+        </p:txBody>
+      </p:sp>
+      <p:sp>
+        <p:nvSpPr>
+          <p:cNvPr id="8" name="Text 6"/>
+          <p:cNvSpPr/>
+          <p:nvPr/>
+        </p:nvSpPr>
+        <p:spPr>
+          <a:xfrm>
+            <a:off x="9052560" y="2505456"/>
             <a:ext cx="2743200" cy="457200"/>
           </a:xfrm>
           <a:prstGeom prst="rect">
@@ -3158,7 +2971,7 @@
           <a:bodyPr wrap="square" lIns="0" tIns="0" rIns="0" bIns="0" rtlCol="0" anchor="ctr"/>
           <a:lstStyle/>
           <a:p>
-            <a:pPr indent="0" marL="0">
+            <a:pPr marL="0" indent="0">
               <a:buNone/>
             </a:pPr>
             <a:r>
@@ -3170,7 +2983,7 @@
                 <a:ea typeface="Cambria" pitchFamily="34" charset="-122"/>
                 <a:cs typeface="Cambria" pitchFamily="34" charset="-120"/>
               </a:rPr>
-              <a:t>25.5M</a:t>
+              <a:t>11.7M</a:t>
             </a:r>
             <a:endParaRPr lang="en-US" sz="2400" dirty="0"/>
           </a:p>
@@ -3178,13 +2991,13 @@
       </p:sp>
       <p:sp>
         <p:nvSpPr>
-          <p:cNvPr id="7" name="Text 5"/>
-          <p:cNvSpPr/>
-          <p:nvPr/>
-        </p:nvSpPr>
-        <p:spPr>
-          <a:xfrm>
-            <a:off x="9052560" y="1975104"/>
+          <p:cNvPr id="9" name="Text 7"/>
+          <p:cNvSpPr/>
+          <p:nvPr/>
+        </p:nvSpPr>
+        <p:spPr>
+          <a:xfrm>
+            <a:off x="9052560" y="2907792"/>
             <a:ext cx="2743200" cy="274320"/>
           </a:xfrm>
           <a:prstGeom prst="rect">
@@ -3197,7 +3010,7 @@
           <a:bodyPr wrap="square" lIns="0" tIns="0" rIns="0" bIns="0" rtlCol="0" anchor="ctr"/>
           <a:lstStyle/>
           <a:p>
-            <a:pPr indent="0" marL="0">
+            <a:pPr marL="0" indent="0">
               <a:buNone/>
             </a:pPr>
             <a:r>
@@ -3209,7 +3022,7 @@
                 <a:ea typeface="Calibri" pitchFamily="34" charset="-122"/>
                 <a:cs typeface="Calibri" pitchFamily="34" charset="-120"/>
               </a:rPr>
-              <a:t>SCED dispatch rows</a:t>
+              <a:t>nodal price node-hours</a:t>
             </a:r>
             <a:endParaRPr lang="en-US" sz="1050" dirty="0"/>
           </a:p>
@@ -3217,13 +3030,13 @@
       </p:sp>
       <p:sp>
         <p:nvSpPr>
-          <p:cNvPr id="8" name="Text 6"/>
-          <p:cNvSpPr/>
-          <p:nvPr/>
-        </p:nvSpPr>
-        <p:spPr>
-          <a:xfrm>
-            <a:off x="9052560" y="2505456"/>
+          <p:cNvPr id="10" name="Text 8"/>
+          <p:cNvSpPr/>
+          <p:nvPr/>
+        </p:nvSpPr>
+        <p:spPr>
+          <a:xfrm>
+            <a:off x="9052560" y="3438144"/>
             <a:ext cx="2743200" cy="457200"/>
           </a:xfrm>
           <a:prstGeom prst="rect">
@@ -3236,7 +3049,7 @@
           <a:bodyPr wrap="square" lIns="0" tIns="0" rIns="0" bIns="0" rtlCol="0" anchor="ctr"/>
           <a:lstStyle/>
           <a:p>
-            <a:pPr indent="0" marL="0">
+            <a:pPr marL="0" indent="0">
               <a:buNone/>
             </a:pPr>
             <a:r>
@@ -3248,7 +3061,7 @@
                 <a:ea typeface="Cambria" pitchFamily="34" charset="-122"/>
                 <a:cs typeface="Cambria" pitchFamily="34" charset="-120"/>
               </a:rPr>
-              <a:t>11.7M</a:t>
+              <a:t>1,109</a:t>
             </a:r>
             <a:endParaRPr lang="en-US" sz="2400" dirty="0"/>
           </a:p>
@@ -3256,13 +3069,13 @@
       </p:sp>
       <p:sp>
         <p:nvSpPr>
-          <p:cNvPr id="9" name="Text 7"/>
-          <p:cNvSpPr/>
-          <p:nvPr/>
-        </p:nvSpPr>
-        <p:spPr>
-          <a:xfrm>
-            <a:off x="9052560" y="2907792"/>
+          <p:cNvPr id="11" name="Text 9"/>
+          <p:cNvSpPr/>
+          <p:nvPr/>
+        </p:nvSpPr>
+        <p:spPr>
+          <a:xfrm>
+            <a:off x="9052560" y="3840480"/>
             <a:ext cx="2743200" cy="274320"/>
           </a:xfrm>
           <a:prstGeom prst="rect">
@@ -3275,7 +3088,7 @@
           <a:bodyPr wrap="square" lIns="0" tIns="0" rIns="0" bIns="0" rtlCol="0" anchor="ctr"/>
           <a:lstStyle/>
           <a:p>
-            <a:pPr indent="0" marL="0">
+            <a:pPr marL="0" indent="0">
               <a:buNone/>
             </a:pPr>
             <a:r>
@@ -3287,7 +3100,7 @@
                 <a:ea typeface="Calibri" pitchFamily="34" charset="-122"/>
                 <a:cs typeface="Calibri" pitchFamily="34" charset="-120"/>
               </a:rPr>
-              <a:t>nodal price node-hours</a:t>
+              <a:t>ERCOT settlement nodes</a:t>
             </a:r>
             <a:endParaRPr lang="en-US" sz="1050" dirty="0"/>
           </a:p>
@@ -3295,13 +3108,13 @@
       </p:sp>
       <p:sp>
         <p:nvSpPr>
-          <p:cNvPr id="10" name="Text 8"/>
-          <p:cNvSpPr/>
-          <p:nvPr/>
-        </p:nvSpPr>
-        <p:spPr>
-          <a:xfrm>
-            <a:off x="9052560" y="3438144"/>
+          <p:cNvPr id="12" name="Text 10"/>
+          <p:cNvSpPr/>
+          <p:nvPr/>
+        </p:nvSpPr>
+        <p:spPr>
+          <a:xfrm>
+            <a:off x="9052560" y="4370832"/>
             <a:ext cx="2743200" cy="457200"/>
           </a:xfrm>
           <a:prstGeom prst="rect">
@@ -3314,7 +3127,7 @@
           <a:bodyPr wrap="square" lIns="0" tIns="0" rIns="0" bIns="0" rtlCol="0" anchor="ctr"/>
           <a:lstStyle/>
           <a:p>
-            <a:pPr indent="0" marL="0">
+            <a:pPr marL="0" indent="0">
               <a:buNone/>
             </a:pPr>
             <a:r>
@@ -3326,84 +3139,6 @@
                 <a:ea typeface="Cambria" pitchFamily="34" charset="-122"/>
                 <a:cs typeface="Cambria" pitchFamily="34" charset="-120"/>
               </a:rPr>
-              <a:t>1,109</a:t>
-            </a:r>
-            <a:endParaRPr lang="en-US" sz="2400" dirty="0"/>
-          </a:p>
-        </p:txBody>
-      </p:sp>
-      <p:sp>
-        <p:nvSpPr>
-          <p:cNvPr id="11" name="Text 9"/>
-          <p:cNvSpPr/>
-          <p:nvPr/>
-        </p:nvSpPr>
-        <p:spPr>
-          <a:xfrm>
-            <a:off x="9052560" y="3840480"/>
-            <a:ext cx="2743200" cy="274320"/>
-          </a:xfrm>
-          <a:prstGeom prst="rect">
-            <a:avLst/>
-          </a:prstGeom>
-          <a:noFill/>
-          <a:ln/>
-        </p:spPr>
-        <p:txBody>
-          <a:bodyPr wrap="square" lIns="0" tIns="0" rIns="0" bIns="0" rtlCol="0" anchor="ctr"/>
-          <a:lstStyle/>
-          <a:p>
-            <a:pPr indent="0" marL="0">
-              <a:buNone/>
-            </a:pPr>
-            <a:r>
-              <a:rPr lang="en-US" sz="1050" dirty="0">
-                <a:solidFill>
-                  <a:srgbClr val="8CA3BC"/>
-                </a:solidFill>
-                <a:latin typeface="Calibri" pitchFamily="34" charset="0"/>
-                <a:ea typeface="Calibri" pitchFamily="34" charset="-122"/>
-                <a:cs typeface="Calibri" pitchFamily="34" charset="-120"/>
-              </a:rPr>
-              <a:t>ERCOT settlement nodes</a:t>
-            </a:r>
-            <a:endParaRPr lang="en-US" sz="1050" dirty="0"/>
-          </a:p>
-        </p:txBody>
-      </p:sp>
-      <p:sp>
-        <p:nvSpPr>
-          <p:cNvPr id="12" name="Text 10"/>
-          <p:cNvSpPr/>
-          <p:nvPr/>
-        </p:nvSpPr>
-        <p:spPr>
-          <a:xfrm>
-            <a:off x="9052560" y="4370832"/>
-            <a:ext cx="2743200" cy="457200"/>
-          </a:xfrm>
-          <a:prstGeom prst="rect">
-            <a:avLst/>
-          </a:prstGeom>
-          <a:noFill/>
-          <a:ln/>
-        </p:spPr>
-        <p:txBody>
-          <a:bodyPr wrap="square" lIns="0" tIns="0" rIns="0" bIns="0" rtlCol="0" anchor="ctr"/>
-          <a:lstStyle/>
-          <a:p>
-            <a:pPr indent="0" marL="0">
-              <a:buNone/>
-            </a:pPr>
-            <a:r>
-              <a:rPr lang="en-US" sz="2400" b="1" dirty="0">
-                <a:solidFill>
-                  <a:srgbClr val="02C39A"/>
-                </a:solidFill>
-                <a:latin typeface="Cambria" pitchFamily="34" charset="0"/>
-                <a:ea typeface="Cambria" pitchFamily="34" charset="-122"/>
-                <a:cs typeface="Cambria" pitchFamily="34" charset="-120"/>
-              </a:rPr>
               <a:t>340-bus</a:t>
             </a:r>
             <a:endParaRPr lang="en-US" sz="2400" dirty="0"/>
@@ -3431,7 +3166,7 @@
           <a:bodyPr wrap="square" lIns="0" tIns="0" rIns="0" bIns="0" rtlCol="0" anchor="ctr"/>
           <a:lstStyle/>
           <a:p>
-            <a:pPr indent="0" marL="0">
+            <a:pPr marL="0" indent="0">
               <a:buNone/>
             </a:pPr>
             <a:r>
@@ -3470,7 +3205,7 @@
           <a:bodyPr wrap="square" lIns="0" tIns="0" rIns="0" bIns="0" rtlCol="0" anchor="ctr"/>
           <a:lstStyle/>
           <a:p>
-            <a:pPr indent="0" marL="0">
+            <a:pPr marL="0" indent="0">
               <a:buNone/>
             </a:pPr>
             <a:r>
@@ -3504,6 +3239,7 @@
         <a:solidFill>
           <a:srgbClr val="F4F7FA"/>
         </a:solidFill>
+        <a:effectLst/>
       </p:bgPr>
     </p:bg>
     <p:spTree>
@@ -3541,11 +3277,11 @@
           <a:bodyPr wrap="square" lIns="0" tIns="0" rIns="0" bIns="0" rtlCol="0" anchor="ctr"/>
           <a:lstStyle/>
           <a:p>
-            <a:pPr indent="0" marL="0">
-              <a:buNone/>
-            </a:pPr>
-            <a:r>
-              <a:rPr lang="en-US" sz="950" b="1" spc="200" kern="0" dirty="0">
+            <a:pPr marL="0" indent="0">
+              <a:buNone/>
+            </a:pPr>
+            <a:r>
+              <a:rPr lang="en-US" sz="950" b="1" kern="0" spc="200" dirty="0">
                 <a:solidFill>
                   <a:srgbClr val="2E86AB"/>
                 </a:solidFill>
@@ -3580,7 +3316,7 @@
           <a:bodyPr wrap="square" lIns="0" tIns="0" rIns="0" bIns="0" rtlCol="0" anchor="ctr"/>
           <a:lstStyle/>
           <a:p>
-            <a:pPr algn="l" indent="0" marL="0">
+            <a:pPr marL="0" indent="0" algn="l">
               <a:buNone/>
             </a:pPr>
             <a:r>
@@ -3619,7 +3355,7 @@
           <a:bodyPr wrap="square" lIns="0" tIns="0" rIns="0" bIns="0" rtlCol="0" anchor="ctr"/>
           <a:lstStyle/>
           <a:p>
-            <a:pPr algn="l" indent="0" marL="0">
+            <a:pPr marL="0" indent="0" algn="l">
               <a:buNone/>
             </a:pPr>
             <a:r>
@@ -3663,7 +3399,7 @@
             <a:prstDash val="solid"/>
           </a:ln>
           <a:effectLst>
-            <a:outerShdw sx="100000" sy="100000" kx="0" ky="0" algn="bl" rotWithShape="0" blurRad="101600" dist="19050" dir="5400000">
+            <a:outerShdw blurRad="101600" dist="19050" dir="5400000" algn="bl" rotWithShape="0">
               <a:srgbClr val="8CA3BC">
                 <a:alpha val="22000"/>
               </a:srgbClr>
@@ -3692,7 +3428,7 @@
           <a:bodyPr wrap="square" lIns="0" tIns="0" rIns="0" bIns="0" rtlCol="0" anchor="ctr"/>
           <a:lstStyle/>
           <a:p>
-            <a:pPr algn="l" indent="0" marL="0">
+            <a:pPr marL="0" indent="0" algn="l">
               <a:buNone/>
             </a:pPr>
             <a:r>
@@ -3731,7 +3467,7 @@
           <a:bodyPr wrap="square" lIns="0" tIns="0" rIns="0" bIns="0" rtlCol="0" anchor="t"/>
           <a:lstStyle/>
           <a:p>
-            <a:pPr algn="l" indent="0" marL="0">
+            <a:pPr marL="0" indent="0" algn="l">
               <a:lnSpc>
                 <a:spcPct val="120000"/>
               </a:lnSpc>
@@ -3751,7 +3487,7 @@
             <a:endParaRPr lang="en-US" sz="1100" dirty="0"/>
           </a:p>
           <a:p>
-            <a:pPr algn="l" indent="0" marL="0">
+            <a:pPr marL="0" indent="0" algn="l">
               <a:lnSpc>
                 <a:spcPct val="120000"/>
               </a:lnSpc>
@@ -3771,7 +3507,7 @@
             <a:endParaRPr lang="en-US" sz="1100" dirty="0"/>
           </a:p>
           <a:p>
-            <a:pPr algn="l" indent="0" marL="0">
+            <a:pPr marL="0" indent="0" algn="l">
               <a:lnSpc>
                 <a:spcPct val="120000"/>
               </a:lnSpc>
@@ -3838,7 +3574,7 @@
           <a:bodyPr wrap="square" lIns="0" tIns="0" rIns="0" bIns="0" rtlCol="0" anchor="ctr"/>
           <a:lstStyle/>
           <a:p>
-            <a:pPr algn="ctr" indent="0" marL="0">
+            <a:pPr marL="0" indent="0" algn="ctr">
               <a:buNone/>
             </a:pPr>
             <a:r>
@@ -3882,7 +3618,7 @@
             <a:prstDash val="solid"/>
           </a:ln>
           <a:effectLst>
-            <a:outerShdw sx="100000" sy="100000" kx="0" ky="0" algn="bl" rotWithShape="0" blurRad="101600" dist="19050" dir="5400000">
+            <a:outerShdw blurRad="101600" dist="19050" dir="5400000" algn="bl" rotWithShape="0">
               <a:srgbClr val="8CA3BC">
                 <a:alpha val="22000"/>
               </a:srgbClr>
@@ -3911,7 +3647,7 @@
           <a:bodyPr wrap="square" lIns="0" tIns="0" rIns="0" bIns="0" rtlCol="0" anchor="ctr"/>
           <a:lstStyle/>
           <a:p>
-            <a:pPr algn="l" indent="0" marL="0">
+            <a:pPr marL="0" indent="0" algn="l">
               <a:buNone/>
             </a:pPr>
             <a:r>
@@ -3950,7 +3686,7 @@
           <a:bodyPr wrap="square" lIns="0" tIns="0" rIns="0" bIns="0" rtlCol="0" anchor="t"/>
           <a:lstStyle/>
           <a:p>
-            <a:pPr algn="l" indent="0" marL="0">
+            <a:pPr marL="0" indent="0" algn="l">
               <a:lnSpc>
                 <a:spcPct val="120000"/>
               </a:lnSpc>
@@ -3970,7 +3706,7 @@
             <a:endParaRPr lang="en-US" sz="1100" dirty="0"/>
           </a:p>
           <a:p>
-            <a:pPr algn="l" indent="0" marL="0">
+            <a:pPr marL="0" indent="0" algn="l">
               <a:lnSpc>
                 <a:spcPct val="120000"/>
               </a:lnSpc>
@@ -3990,7 +3726,7 @@
             <a:endParaRPr lang="en-US" sz="1100" dirty="0"/>
           </a:p>
           <a:p>
-            <a:pPr algn="l" indent="0" marL="0">
+            <a:pPr marL="0" indent="0" algn="l">
               <a:lnSpc>
                 <a:spcPct val="120000"/>
               </a:lnSpc>
@@ -4062,7 +3798,7 @@
             <a:prstDash val="solid"/>
           </a:ln>
           <a:effectLst>
-            <a:outerShdw sx="100000" sy="100000" kx="0" ky="0" algn="bl" rotWithShape="0" blurRad="101600" dist="19050" dir="5400000">
+            <a:outerShdw blurRad="101600" dist="19050" dir="5400000" algn="bl" rotWithShape="0">
               <a:srgbClr val="8CA3BC">
                 <a:alpha val="22000"/>
               </a:srgbClr>
@@ -4091,7 +3827,7 @@
           <a:bodyPr wrap="square" lIns="0" tIns="0" rIns="0" bIns="0" rtlCol="0" anchor="ctr"/>
           <a:lstStyle/>
           <a:p>
-            <a:pPr algn="l" indent="0" marL="0">
+            <a:pPr marL="0" indent="0" algn="l">
               <a:buNone/>
             </a:pPr>
             <a:r>
@@ -4130,7 +3866,7 @@
           <a:bodyPr wrap="square" lIns="0" tIns="0" rIns="0" bIns="0" rtlCol="0" anchor="t"/>
           <a:lstStyle/>
           <a:p>
-            <a:pPr algn="l" indent="0" marL="0">
+            <a:pPr marL="0" indent="0" algn="l">
               <a:lnSpc>
                 <a:spcPct val="120000"/>
               </a:lnSpc>
@@ -4150,7 +3886,7 @@
             <a:endParaRPr lang="en-US" sz="1100" dirty="0"/>
           </a:p>
           <a:p>
-            <a:pPr algn="l" indent="0" marL="0">
+            <a:pPr marL="0" indent="0" algn="l">
               <a:lnSpc>
                 <a:spcPct val="120000"/>
               </a:lnSpc>
@@ -4170,7 +3906,7 @@
             <a:endParaRPr lang="en-US" sz="1100" dirty="0"/>
           </a:p>
           <a:p>
-            <a:pPr algn="l" indent="0" marL="0">
+            <a:pPr marL="0" indent="0" algn="l">
               <a:lnSpc>
                 <a:spcPct val="120000"/>
               </a:lnSpc>
@@ -4217,7 +3953,7 @@
             <a:prstDash val="solid"/>
           </a:ln>
           <a:effectLst>
-            <a:outerShdw sx="100000" sy="100000" kx="0" ky="0" algn="bl" rotWithShape="0" blurRad="101600" dist="19050" dir="5400000">
+            <a:outerShdw blurRad="101600" dist="19050" dir="5400000" algn="bl" rotWithShape="0">
               <a:srgbClr val="8CA3BC">
                 <a:alpha val="22000"/>
               </a:srgbClr>
@@ -4246,7 +3982,7 @@
           <a:bodyPr wrap="square" lIns="0" tIns="0" rIns="0" bIns="0" rtlCol="0" anchor="ctr"/>
           <a:lstStyle/>
           <a:p>
-            <a:pPr algn="l" indent="0" marL="0">
+            <a:pPr marL="0" indent="0" algn="l">
               <a:buNone/>
             </a:pPr>
             <a:r>
@@ -4396,7 +4132,7 @@
             <a:prstDash val="solid"/>
           </a:ln>
           <a:effectLst>
-            <a:outerShdw sx="100000" sy="100000" kx="0" ky="0" algn="bl" rotWithShape="0" blurRad="101600" dist="19050" dir="5400000">
+            <a:outerShdw blurRad="101600" dist="19050" dir="5400000" algn="bl" rotWithShape="0">
               <a:srgbClr val="8CA3BC">
                 <a:alpha val="22000"/>
               </a:srgbClr>
@@ -4425,7 +4161,7 @@
           <a:bodyPr wrap="square" lIns="0" tIns="0" rIns="0" bIns="0" rtlCol="0" anchor="ctr"/>
           <a:lstStyle/>
           <a:p>
-            <a:pPr algn="l" indent="0" marL="0">
+            <a:pPr marL="0" indent="0" algn="l">
               <a:buNone/>
             </a:pPr>
             <a:r>
@@ -4570,7 +4306,7 @@
           <a:bodyPr wrap="square" lIns="0" tIns="0" rIns="0" bIns="0" rtlCol="0" anchor="ctr"/>
           <a:lstStyle/>
           <a:p>
-            <a:pPr algn="l" indent="0" marL="0">
+            <a:pPr marL="0" indent="0" algn="l">
               <a:buNone/>
             </a:pPr>
             <a:r>
@@ -4604,6 +4340,7 @@
         <a:solidFill>
           <a:srgbClr val="F4F7FA"/>
         </a:solidFill>
+        <a:effectLst/>
       </p:bgPr>
     </p:bg>
     <p:spTree>
@@ -4641,11 +4378,11 @@
           <a:bodyPr wrap="square" lIns="0" tIns="0" rIns="0" bIns="0" rtlCol="0" anchor="ctr"/>
           <a:lstStyle/>
           <a:p>
-            <a:pPr indent="0" marL="0">
-              <a:buNone/>
-            </a:pPr>
-            <a:r>
-              <a:rPr lang="en-US" sz="950" b="1" spc="200" kern="0" dirty="0">
+            <a:pPr marL="0" indent="0">
+              <a:buNone/>
+            </a:pPr>
+            <a:r>
+              <a:rPr lang="en-US" sz="950" b="1" kern="0" spc="200" dirty="0">
                 <a:solidFill>
                   <a:srgbClr val="2E86AB"/>
                 </a:solidFill>
@@ -4680,7 +4417,7 @@
           <a:bodyPr wrap="square" lIns="0" tIns="0" rIns="0" bIns="0" rtlCol="0" anchor="ctr"/>
           <a:lstStyle/>
           <a:p>
-            <a:pPr algn="l" indent="0" marL="0">
+            <a:pPr marL="0" indent="0" algn="l">
               <a:buNone/>
             </a:pPr>
             <a:r>
@@ -4719,7 +4456,7 @@
           <a:bodyPr wrap="square" lIns="0" tIns="0" rIns="0" bIns="0" rtlCol="0" anchor="ctr"/>
           <a:lstStyle/>
           <a:p>
-            <a:pPr algn="l" indent="0" marL="0">
+            <a:pPr marL="0" indent="0" algn="l">
               <a:buNone/>
             </a:pPr>
             <a:r>
@@ -4758,11 +4495,11 @@
           <a:bodyPr wrap="square" lIns="0" tIns="0" rIns="0" bIns="0" rtlCol="0" anchor="ctr"/>
           <a:lstStyle/>
           <a:p>
-            <a:pPr indent="0" marL="0">
-              <a:buNone/>
-            </a:pPr>
-            <a:r>
-              <a:rPr lang="en-US" sz="900" b="1" spc="150" kern="0" dirty="0">
+            <a:pPr marL="0" indent="0">
+              <a:buNone/>
+            </a:pPr>
+            <a:r>
+              <a:rPr lang="en-US" sz="900" b="1" kern="0" spc="150" dirty="0">
                 <a:solidFill>
                   <a:srgbClr val="5A6E85"/>
                 </a:solidFill>
@@ -4797,11 +4534,11 @@
           <a:bodyPr wrap="square" lIns="0" tIns="0" rIns="0" bIns="0" rtlCol="0" anchor="ctr"/>
           <a:lstStyle/>
           <a:p>
-            <a:pPr indent="0" marL="0">
-              <a:buNone/>
-            </a:pPr>
-            <a:r>
-              <a:rPr lang="en-US" sz="900" b="1" spc="150" kern="0" dirty="0">
+            <a:pPr marL="0" indent="0">
+              <a:buNone/>
+            </a:pPr>
+            <a:r>
+              <a:rPr lang="en-US" sz="900" b="1" kern="0" spc="150" dirty="0">
                 <a:solidFill>
                   <a:srgbClr val="5A6E85"/>
                 </a:solidFill>
@@ -4836,11 +4573,11 @@
           <a:bodyPr wrap="square" lIns="0" tIns="0" rIns="0" bIns="0" rtlCol="0" anchor="ctr"/>
           <a:lstStyle/>
           <a:p>
-            <a:pPr indent="0" marL="0">
-              <a:buNone/>
-            </a:pPr>
-            <a:r>
-              <a:rPr lang="en-US" sz="900" b="1" spc="150" kern="0" dirty="0">
+            <a:pPr marL="0" indent="0">
+              <a:buNone/>
+            </a:pPr>
+            <a:r>
+              <a:rPr lang="en-US" sz="900" b="1" kern="0" spc="150" dirty="0">
                 <a:solidFill>
                   <a:srgbClr val="5A6E85"/>
                 </a:solidFill>
@@ -4880,7 +4617,7 @@
             <a:prstDash val="solid"/>
           </a:ln>
           <a:effectLst>
-            <a:outerShdw sx="100000" sy="100000" kx="0" ky="0" algn="bl" rotWithShape="0" blurRad="101600" dist="19050" dir="5400000">
+            <a:outerShdw blurRad="101600" dist="19050" dir="5400000" algn="bl" rotWithShape="0">
               <a:srgbClr val="8CA3BC">
                 <a:alpha val="22000"/>
               </a:srgbClr>
@@ -4934,7 +4671,7 @@
           <a:bodyPr wrap="square" lIns="0" tIns="0" rIns="0" bIns="0" rtlCol="0" anchor="t"/>
           <a:lstStyle/>
           <a:p>
-            <a:pPr algn="l" indent="0" marL="0">
+            <a:pPr marL="0" indent="0" algn="l">
               <a:lnSpc>
                 <a:spcPct val="112000"/>
               </a:lnSpc>
@@ -4976,7 +4713,7 @@
           <a:bodyPr wrap="square" lIns="0" tIns="0" rIns="0" bIns="0" rtlCol="0" anchor="t"/>
           <a:lstStyle/>
           <a:p>
-            <a:pPr algn="l" indent="0" marL="0">
+            <a:pPr marL="0" indent="0" algn="l">
               <a:lnSpc>
                 <a:spcPct val="112000"/>
               </a:lnSpc>
@@ -5018,7 +4755,7 @@
           <a:bodyPr wrap="square" lIns="0" tIns="0" rIns="0" bIns="0" rtlCol="0" anchor="t"/>
           <a:lstStyle/>
           <a:p>
-            <a:pPr algn="l" indent="0" marL="0">
+            <a:pPr marL="0" indent="0" algn="l">
               <a:lnSpc>
                 <a:spcPct val="112000"/>
               </a:lnSpc>
@@ -5065,7 +4802,7 @@
             <a:prstDash val="solid"/>
           </a:ln>
           <a:effectLst>
-            <a:outerShdw sx="100000" sy="100000" kx="0" ky="0" algn="bl" rotWithShape="0" blurRad="101600" dist="19050" dir="5400000">
+            <a:outerShdw blurRad="101600" dist="19050" dir="5400000" algn="bl" rotWithShape="0">
               <a:srgbClr val="8CA3BC">
                 <a:alpha val="22000"/>
               </a:srgbClr>
@@ -5119,7 +4856,7 @@
           <a:bodyPr wrap="square" lIns="0" tIns="0" rIns="0" bIns="0" rtlCol="0" anchor="t"/>
           <a:lstStyle/>
           <a:p>
-            <a:pPr algn="l" indent="0" marL="0">
+            <a:pPr marL="0" indent="0" algn="l">
               <a:lnSpc>
                 <a:spcPct val="112000"/>
               </a:lnSpc>
@@ -5161,7 +4898,7 @@
           <a:bodyPr wrap="square" lIns="0" tIns="0" rIns="0" bIns="0" rtlCol="0" anchor="t"/>
           <a:lstStyle/>
           <a:p>
-            <a:pPr algn="l" indent="0" marL="0">
+            <a:pPr marL="0" indent="0" algn="l">
               <a:lnSpc>
                 <a:spcPct val="112000"/>
               </a:lnSpc>
@@ -5203,7 +4940,7 @@
           <a:bodyPr wrap="square" lIns="0" tIns="0" rIns="0" bIns="0" rtlCol="0" anchor="t"/>
           <a:lstStyle/>
           <a:p>
-            <a:pPr algn="l" indent="0" marL="0">
+            <a:pPr marL="0" indent="0" algn="l">
               <a:lnSpc>
                 <a:spcPct val="112000"/>
               </a:lnSpc>
@@ -5250,7 +4987,7 @@
             <a:prstDash val="solid"/>
           </a:ln>
           <a:effectLst>
-            <a:outerShdw sx="100000" sy="100000" kx="0" ky="0" algn="bl" rotWithShape="0" blurRad="101600" dist="19050" dir="5400000">
+            <a:outerShdw blurRad="101600" dist="19050" dir="5400000" algn="bl" rotWithShape="0">
               <a:srgbClr val="8CA3BC">
                 <a:alpha val="22000"/>
               </a:srgbClr>
@@ -5304,7 +5041,7 @@
           <a:bodyPr wrap="square" lIns="0" tIns="0" rIns="0" bIns="0" rtlCol="0" anchor="t"/>
           <a:lstStyle/>
           <a:p>
-            <a:pPr algn="l" indent="0" marL="0">
+            <a:pPr marL="0" indent="0" algn="l">
               <a:lnSpc>
                 <a:spcPct val="112000"/>
               </a:lnSpc>
@@ -5346,7 +5083,7 @@
           <a:bodyPr wrap="square" lIns="0" tIns="0" rIns="0" bIns="0" rtlCol="0" anchor="t"/>
           <a:lstStyle/>
           <a:p>
-            <a:pPr algn="l" indent="0" marL="0">
+            <a:pPr marL="0" indent="0" algn="l">
               <a:lnSpc>
                 <a:spcPct val="112000"/>
               </a:lnSpc>
@@ -5388,7 +5125,7 @@
           <a:bodyPr wrap="square" lIns="0" tIns="0" rIns="0" bIns="0" rtlCol="0" anchor="t"/>
           <a:lstStyle/>
           <a:p>
-            <a:pPr algn="l" indent="0" marL="0">
+            <a:pPr marL="0" indent="0" algn="l">
               <a:lnSpc>
                 <a:spcPct val="112000"/>
               </a:lnSpc>
@@ -5435,7 +5172,7 @@
             <a:prstDash val="solid"/>
           </a:ln>
           <a:effectLst>
-            <a:outerShdw sx="100000" sy="100000" kx="0" ky="0" algn="bl" rotWithShape="0" blurRad="101600" dist="19050" dir="5400000">
+            <a:outerShdw blurRad="101600" dist="19050" dir="5400000" algn="bl" rotWithShape="0">
               <a:srgbClr val="8CA3BC">
                 <a:alpha val="22000"/>
               </a:srgbClr>
@@ -5489,7 +5226,7 @@
           <a:bodyPr wrap="square" lIns="0" tIns="0" rIns="0" bIns="0" rtlCol="0" anchor="t"/>
           <a:lstStyle/>
           <a:p>
-            <a:pPr algn="l" indent="0" marL="0">
+            <a:pPr marL="0" indent="0" algn="l">
               <a:lnSpc>
                 <a:spcPct val="112000"/>
               </a:lnSpc>
@@ -5531,7 +5268,7 @@
           <a:bodyPr wrap="square" lIns="0" tIns="0" rIns="0" bIns="0" rtlCol="0" anchor="t"/>
           <a:lstStyle/>
           <a:p>
-            <a:pPr algn="l" indent="0" marL="0">
+            <a:pPr marL="0" indent="0" algn="l">
               <a:lnSpc>
                 <a:spcPct val="112000"/>
               </a:lnSpc>
@@ -5573,7 +5310,7 @@
           <a:bodyPr wrap="square" lIns="0" tIns="0" rIns="0" bIns="0" rtlCol="0" anchor="t"/>
           <a:lstStyle/>
           <a:p>
-            <a:pPr algn="l" indent="0" marL="0">
+            <a:pPr marL="0" indent="0" algn="l">
               <a:lnSpc>
                 <a:spcPct val="112000"/>
               </a:lnSpc>
@@ -5620,7 +5357,7 @@
             <a:prstDash val="solid"/>
           </a:ln>
           <a:effectLst>
-            <a:outerShdw sx="100000" sy="100000" kx="0" ky="0" algn="bl" rotWithShape="0" blurRad="101600" dist="19050" dir="5400000">
+            <a:outerShdw blurRad="101600" dist="19050" dir="5400000" algn="bl" rotWithShape="0">
               <a:srgbClr val="8CA3BC">
                 <a:alpha val="22000"/>
               </a:srgbClr>
@@ -5674,7 +5411,7 @@
           <a:bodyPr wrap="square" lIns="0" tIns="0" rIns="0" bIns="0" rtlCol="0" anchor="t"/>
           <a:lstStyle/>
           <a:p>
-            <a:pPr algn="l" indent="0" marL="0">
+            <a:pPr marL="0" indent="0" algn="l">
               <a:lnSpc>
                 <a:spcPct val="112000"/>
               </a:lnSpc>
@@ -5716,7 +5453,7 @@
           <a:bodyPr wrap="square" lIns="0" tIns="0" rIns="0" bIns="0" rtlCol="0" anchor="t"/>
           <a:lstStyle/>
           <a:p>
-            <a:pPr algn="l" indent="0" marL="0">
+            <a:pPr marL="0" indent="0" algn="l">
               <a:lnSpc>
                 <a:spcPct val="112000"/>
               </a:lnSpc>
@@ -5758,7 +5495,7 @@
           <a:bodyPr wrap="square" lIns="0" tIns="0" rIns="0" bIns="0" rtlCol="0" anchor="t"/>
           <a:lstStyle/>
           <a:p>
-            <a:pPr algn="l" indent="0" marL="0">
+            <a:pPr marL="0" indent="0" algn="l">
               <a:lnSpc>
                 <a:spcPct val="112000"/>
               </a:lnSpc>
@@ -5805,7 +5542,7 @@
             <a:prstDash val="solid"/>
           </a:ln>
           <a:effectLst>
-            <a:outerShdw sx="100000" sy="100000" kx="0" ky="0" algn="bl" rotWithShape="0" blurRad="101600" dist="19050" dir="5400000">
+            <a:outerShdw blurRad="101600" dist="19050" dir="5400000" algn="bl" rotWithShape="0">
               <a:srgbClr val="8CA3BC">
                 <a:alpha val="22000"/>
               </a:srgbClr>
@@ -5859,7 +5596,7 @@
           <a:bodyPr wrap="square" lIns="0" tIns="0" rIns="0" bIns="0" rtlCol="0" anchor="t"/>
           <a:lstStyle/>
           <a:p>
-            <a:pPr algn="l" indent="0" marL="0">
+            <a:pPr marL="0" indent="0" algn="l">
               <a:lnSpc>
                 <a:spcPct val="112000"/>
               </a:lnSpc>
@@ -5901,7 +5638,7 @@
           <a:bodyPr wrap="square" lIns="0" tIns="0" rIns="0" bIns="0" rtlCol="0" anchor="t"/>
           <a:lstStyle/>
           <a:p>
-            <a:pPr algn="l" indent="0" marL="0">
+            <a:pPr marL="0" indent="0" algn="l">
               <a:lnSpc>
                 <a:spcPct val="112000"/>
               </a:lnSpc>
@@ -5943,7 +5680,7 @@
           <a:bodyPr wrap="square" lIns="0" tIns="0" rIns="0" bIns="0" rtlCol="0" anchor="t"/>
           <a:lstStyle/>
           <a:p>
-            <a:pPr algn="l" indent="0" marL="0">
+            <a:pPr marL="0" indent="0" algn="l">
               <a:lnSpc>
                 <a:spcPct val="112000"/>
               </a:lnSpc>
@@ -5985,7 +5722,7 @@
           <a:bodyPr wrap="square" lIns="0" tIns="0" rIns="0" bIns="0" rtlCol="0" anchor="ctr"/>
           <a:lstStyle/>
           <a:p>
-            <a:pPr algn="l" indent="0" marL="0">
+            <a:pPr marL="0" indent="0" algn="l">
               <a:buNone/>
             </a:pPr>
             <a:r>
@@ -6019,6 +5756,7 @@
         <a:solidFill>
           <a:srgbClr val="0E1A2B"/>
         </a:solidFill>
+        <a:effectLst/>
       </p:bgPr>
     </p:bg>
     <p:spTree>
@@ -6056,11 +5794,11 @@
           <a:bodyPr wrap="square" lIns="0" tIns="0" rIns="0" bIns="0" rtlCol="0" anchor="ctr"/>
           <a:lstStyle/>
           <a:p>
-            <a:pPr indent="0" marL="0">
-              <a:buNone/>
-            </a:pPr>
-            <a:r>
-              <a:rPr lang="en-US" sz="950" b="1" spc="200" kern="0" dirty="0">
+            <a:pPr marL="0" indent="0">
+              <a:buNone/>
+            </a:pPr>
+            <a:r>
+              <a:rPr lang="en-US" sz="950" b="1" kern="0" spc="200" dirty="0">
                 <a:solidFill>
                   <a:srgbClr val="02C39A"/>
                 </a:solidFill>
@@ -6095,7 +5833,7 @@
           <a:bodyPr wrap="square" lIns="0" tIns="0" rIns="0" bIns="0" rtlCol="0" anchor="ctr"/>
           <a:lstStyle/>
           <a:p>
-            <a:pPr algn="l" indent="0" marL="0">
+            <a:pPr marL="0" indent="0" algn="l">
               <a:buNone/>
             </a:pPr>
             <a:r>
@@ -6134,7 +5872,7 @@
           <a:bodyPr wrap="square" lIns="0" tIns="0" rIns="0" bIns="0" rtlCol="0" anchor="ctr"/>
           <a:lstStyle/>
           <a:p>
-            <a:pPr algn="l" indent="0" marL="0">
+            <a:pPr marL="0" indent="0" algn="l">
               <a:buNone/>
             </a:pPr>
             <a:r>
@@ -6225,7 +5963,7 @@
           <a:bodyPr wrap="square" lIns="0" tIns="0" rIns="0" bIns="0" rtlCol="0" anchor="ctr"/>
           <a:lstStyle/>
           <a:p>
-            <a:pPr algn="ctr" indent="0" marL="0">
+            <a:pPr marL="0" indent="0" algn="ctr">
               <a:buNone/>
             </a:pPr>
             <a:r>
@@ -6264,7 +6002,7 @@
           <a:bodyPr wrap="square" lIns="0" tIns="0" rIns="0" bIns="0" rtlCol="0" anchor="t"/>
           <a:lstStyle/>
           <a:p>
-            <a:pPr algn="l" indent="0" marL="0">
+            <a:pPr marL="0" indent="0" algn="l">
               <a:lnSpc>
                 <a:spcPct val="112000"/>
               </a:lnSpc>
@@ -6306,7 +6044,7 @@
           <a:bodyPr wrap="square" lIns="0" tIns="0" rIns="0" bIns="0" rtlCol="0" anchor="t"/>
           <a:lstStyle/>
           <a:p>
-            <a:pPr algn="l" indent="0" marL="0">
+            <a:pPr marL="0" indent="0" algn="l">
               <a:lnSpc>
                 <a:spcPct val="112000"/>
               </a:lnSpc>
@@ -6400,7 +6138,7 @@
           <a:bodyPr wrap="square" lIns="0" tIns="0" rIns="0" bIns="0" rtlCol="0" anchor="ctr"/>
           <a:lstStyle/>
           <a:p>
-            <a:pPr algn="ctr" indent="0" marL="0">
+            <a:pPr marL="0" indent="0" algn="ctr">
               <a:buNone/>
             </a:pPr>
             <a:r>
@@ -6439,7 +6177,7 @@
           <a:bodyPr wrap="square" lIns="0" tIns="0" rIns="0" bIns="0" rtlCol="0" anchor="t"/>
           <a:lstStyle/>
           <a:p>
-            <a:pPr algn="l" indent="0" marL="0">
+            <a:pPr marL="0" indent="0" algn="l">
               <a:lnSpc>
                 <a:spcPct val="112000"/>
               </a:lnSpc>
@@ -6481,7 +6219,7 @@
           <a:bodyPr wrap="square" lIns="0" tIns="0" rIns="0" bIns="0" rtlCol="0" anchor="t"/>
           <a:lstStyle/>
           <a:p>
-            <a:pPr algn="l" indent="0" marL="0">
+            <a:pPr marL="0" indent="0" algn="l">
               <a:lnSpc>
                 <a:spcPct val="112000"/>
               </a:lnSpc>
@@ -6575,7 +6313,7 @@
           <a:bodyPr wrap="square" lIns="0" tIns="0" rIns="0" bIns="0" rtlCol="0" anchor="ctr"/>
           <a:lstStyle/>
           <a:p>
-            <a:pPr algn="ctr" indent="0" marL="0">
+            <a:pPr marL="0" indent="0" algn="ctr">
               <a:buNone/>
             </a:pPr>
             <a:r>
@@ -6614,7 +6352,7 @@
           <a:bodyPr wrap="square" lIns="0" tIns="0" rIns="0" bIns="0" rtlCol="0" anchor="t"/>
           <a:lstStyle/>
           <a:p>
-            <a:pPr algn="l" indent="0" marL="0">
+            <a:pPr marL="0" indent="0" algn="l">
               <a:lnSpc>
                 <a:spcPct val="112000"/>
               </a:lnSpc>
@@ -6656,7 +6394,7 @@
           <a:bodyPr wrap="square" lIns="0" tIns="0" rIns="0" bIns="0" rtlCol="0" anchor="t"/>
           <a:lstStyle/>
           <a:p>
-            <a:pPr algn="l" indent="0" marL="0">
+            <a:pPr marL="0" indent="0" algn="l">
               <a:lnSpc>
                 <a:spcPct val="112000"/>
               </a:lnSpc>
@@ -6750,7 +6488,7 @@
           <a:bodyPr wrap="square" lIns="0" tIns="0" rIns="0" bIns="0" rtlCol="0" anchor="ctr"/>
           <a:lstStyle/>
           <a:p>
-            <a:pPr algn="ctr" indent="0" marL="0">
+            <a:pPr marL="0" indent="0" algn="ctr">
               <a:buNone/>
             </a:pPr>
             <a:r>
@@ -6789,7 +6527,7 @@
           <a:bodyPr wrap="square" lIns="0" tIns="0" rIns="0" bIns="0" rtlCol="0" anchor="t"/>
           <a:lstStyle/>
           <a:p>
-            <a:pPr algn="l" indent="0" marL="0">
+            <a:pPr marL="0" indent="0" algn="l">
               <a:lnSpc>
                 <a:spcPct val="112000"/>
               </a:lnSpc>
@@ -6831,7 +6569,7 @@
           <a:bodyPr wrap="square" lIns="0" tIns="0" rIns="0" bIns="0" rtlCol="0" anchor="t"/>
           <a:lstStyle/>
           <a:p>
-            <a:pPr algn="l" indent="0" marL="0">
+            <a:pPr marL="0" indent="0" algn="l">
               <a:lnSpc>
                 <a:spcPct val="112000"/>
               </a:lnSpc>
@@ -6925,7 +6663,7 @@
           <a:bodyPr wrap="square" lIns="0" tIns="0" rIns="0" bIns="0" rtlCol="0" anchor="ctr"/>
           <a:lstStyle/>
           <a:p>
-            <a:pPr algn="ctr" indent="0" marL="0">
+            <a:pPr marL="0" indent="0" algn="ctr">
               <a:buNone/>
             </a:pPr>
             <a:r>
@@ -6964,7 +6702,7 @@
           <a:bodyPr wrap="square" lIns="0" tIns="0" rIns="0" bIns="0" rtlCol="0" anchor="t"/>
           <a:lstStyle/>
           <a:p>
-            <a:pPr algn="l" indent="0" marL="0">
+            <a:pPr marL="0" indent="0" algn="l">
               <a:lnSpc>
                 <a:spcPct val="112000"/>
               </a:lnSpc>
@@ -7006,7 +6744,7 @@
           <a:bodyPr wrap="square" lIns="0" tIns="0" rIns="0" bIns="0" rtlCol="0" anchor="t"/>
           <a:lstStyle/>
           <a:p>
-            <a:pPr algn="l" indent="0" marL="0">
+            <a:pPr marL="0" indent="0" algn="l">
               <a:lnSpc>
                 <a:spcPct val="112000"/>
               </a:lnSpc>
@@ -7100,7 +6838,7 @@
           <a:bodyPr wrap="square" lIns="0" tIns="0" rIns="0" bIns="0" rtlCol="0" anchor="ctr"/>
           <a:lstStyle/>
           <a:p>
-            <a:pPr algn="ctr" indent="0" marL="0">
+            <a:pPr marL="0" indent="0" algn="ctr">
               <a:buNone/>
             </a:pPr>
             <a:r>
@@ -7139,7 +6877,7 @@
           <a:bodyPr wrap="square" lIns="0" tIns="0" rIns="0" bIns="0" rtlCol="0" anchor="t"/>
           <a:lstStyle/>
           <a:p>
-            <a:pPr algn="l" indent="0" marL="0">
+            <a:pPr marL="0" indent="0" algn="l">
               <a:lnSpc>
                 <a:spcPct val="112000"/>
               </a:lnSpc>
@@ -7181,7 +6919,7 @@
           <a:bodyPr wrap="square" lIns="0" tIns="0" rIns="0" bIns="0" rtlCol="0" anchor="t"/>
           <a:lstStyle/>
           <a:p>
-            <a:pPr algn="l" indent="0" marL="0">
+            <a:pPr marL="0" indent="0" algn="l">
               <a:lnSpc>
                 <a:spcPct val="112000"/>
               </a:lnSpc>
@@ -7275,7 +7013,7 @@
           <a:bodyPr wrap="square" lIns="0" tIns="0" rIns="0" bIns="0" rtlCol="0" anchor="ctr"/>
           <a:lstStyle/>
           <a:p>
-            <a:pPr algn="ctr" indent="0" marL="0">
+            <a:pPr marL="0" indent="0" algn="ctr">
               <a:buNone/>
             </a:pPr>
             <a:r>
@@ -7314,7 +7052,7 @@
           <a:bodyPr wrap="square" lIns="0" tIns="0" rIns="0" bIns="0" rtlCol="0" anchor="t"/>
           <a:lstStyle/>
           <a:p>
-            <a:pPr algn="l" indent="0" marL="0">
+            <a:pPr marL="0" indent="0" algn="l">
               <a:lnSpc>
                 <a:spcPct val="112000"/>
               </a:lnSpc>
@@ -7356,7 +7094,7 @@
           <a:bodyPr wrap="square" lIns="0" tIns="0" rIns="0" bIns="0" rtlCol="0" anchor="t"/>
           <a:lstStyle/>
           <a:p>
-            <a:pPr algn="l" indent="0" marL="0">
+            <a:pPr marL="0" indent="0" algn="l">
               <a:lnSpc>
                 <a:spcPct val="112000"/>
               </a:lnSpc>
@@ -7425,7 +7163,7 @@
           <a:bodyPr wrap="square" lIns="0" tIns="0" rIns="0" bIns="0" rtlCol="0" anchor="t"/>
           <a:lstStyle/>
           <a:p>
-            <a:pPr algn="l" indent="0" marL="0">
+            <a:pPr marL="0" indent="0" algn="l">
               <a:lnSpc>
                 <a:spcPct val="115000"/>
               </a:lnSpc>
@@ -7445,7 +7183,7 @@
             <a:endParaRPr lang="en-US" sz="1100" dirty="0"/>
           </a:p>
           <a:p>
-            <a:pPr algn="l" indent="0" marL="0">
+            <a:pPr marL="0" indent="0" algn="l">
               <a:lnSpc>
                 <a:spcPct val="115000"/>
               </a:lnSpc>
@@ -7482,6 +7220,7 @@
         <a:solidFill>
           <a:srgbClr val="F4F7FA"/>
         </a:solidFill>
+        <a:effectLst/>
       </p:bgPr>
     </p:bg>
     <p:spTree>
@@ -7519,11 +7258,11 @@
           <a:bodyPr wrap="square" lIns="0" tIns="0" rIns="0" bIns="0" rtlCol="0" anchor="ctr"/>
           <a:lstStyle/>
           <a:p>
-            <a:pPr indent="0" marL="0">
-              <a:buNone/>
-            </a:pPr>
-            <a:r>
-              <a:rPr lang="en-US" sz="950" b="1" spc="200" kern="0" dirty="0">
+            <a:pPr marL="0" indent="0">
+              <a:buNone/>
+            </a:pPr>
+            <a:r>
+              <a:rPr lang="en-US" sz="950" b="1" kern="0" spc="200" dirty="0">
                 <a:solidFill>
                   <a:srgbClr val="E8A33D"/>
                 </a:solidFill>
@@ -7558,7 +7297,7 @@
           <a:bodyPr wrap="square" lIns="0" tIns="0" rIns="0" bIns="0" rtlCol="0" anchor="ctr"/>
           <a:lstStyle/>
           <a:p>
-            <a:pPr algn="l" indent="0" marL="0">
+            <a:pPr marL="0" indent="0" algn="l">
               <a:buNone/>
             </a:pPr>
             <a:r>
@@ -7597,7 +7336,7 @@
           <a:bodyPr wrap="square" lIns="0" tIns="0" rIns="0" bIns="0" rtlCol="0" anchor="ctr"/>
           <a:lstStyle/>
           <a:p>
-            <a:pPr algn="l" indent="0" marL="0">
+            <a:pPr marL="0" indent="0" algn="l">
               <a:buNone/>
             </a:pPr>
             <a:r>
@@ -7641,7 +7380,7 @@
             <a:prstDash val="solid"/>
           </a:ln>
           <a:effectLst>
-            <a:outerShdw sx="100000" sy="100000" kx="0" ky="0" algn="bl" rotWithShape="0" blurRad="101600" dist="19050" dir="5400000">
+            <a:outerShdw blurRad="101600" dist="19050" dir="5400000" algn="bl" rotWithShape="0">
               <a:srgbClr val="8CA3BC">
                 <a:alpha val="22000"/>
               </a:srgbClr>
@@ -7670,7 +7409,7 @@
           <a:bodyPr wrap="square" lIns="0" tIns="0" rIns="0" bIns="0" rtlCol="0" anchor="ctr"/>
           <a:lstStyle/>
           <a:p>
-            <a:pPr algn="l" indent="0" marL="0">
+            <a:pPr marL="0" indent="0" algn="l">
               <a:buNone/>
             </a:pPr>
             <a:r>
@@ -7709,7 +7448,7 @@
           <a:bodyPr wrap="square" lIns="0" tIns="0" rIns="0" bIns="0" rtlCol="0" anchor="t"/>
           <a:lstStyle/>
           <a:p>
-            <a:pPr algn="l" indent="0" marL="0">
+            <a:pPr marL="0" indent="0" algn="l">
               <a:lnSpc>
                 <a:spcPct val="120000"/>
               </a:lnSpc>
@@ -7729,7 +7468,7 @@
             <a:endParaRPr lang="en-US" sz="1100" dirty="0"/>
           </a:p>
           <a:p>
-            <a:pPr algn="l" indent="0" marL="0">
+            <a:pPr marL="0" indent="0" algn="l">
               <a:lnSpc>
                 <a:spcPct val="120000"/>
               </a:lnSpc>
@@ -7738,7 +7477,7 @@
             <a:endParaRPr lang="en-US" sz="1100" dirty="0"/>
           </a:p>
           <a:p>
-            <a:pPr algn="l" indent="0" marL="0">
+            <a:pPr marL="0" indent="0" algn="l">
               <a:lnSpc>
                 <a:spcPct val="120000"/>
               </a:lnSpc>
@@ -7785,7 +7524,7 @@
             <a:prstDash val="solid"/>
           </a:ln>
           <a:effectLst>
-            <a:outerShdw sx="100000" sy="100000" kx="0" ky="0" algn="bl" rotWithShape="0" blurRad="101600" dist="19050" dir="5400000">
+            <a:outerShdw blurRad="101600" dist="19050" dir="5400000" algn="bl" rotWithShape="0">
               <a:srgbClr val="8CA3BC">
                 <a:alpha val="22000"/>
               </a:srgbClr>
@@ -7814,7 +7553,7 @@
           <a:bodyPr wrap="square" lIns="0" tIns="0" rIns="0" bIns="0" rtlCol="0" anchor="ctr"/>
           <a:lstStyle/>
           <a:p>
-            <a:pPr algn="l" indent="0" marL="0">
+            <a:pPr marL="0" indent="0" algn="l">
               <a:buNone/>
             </a:pPr>
             <a:r>
@@ -7853,7 +7592,7 @@
           <a:bodyPr wrap="square" lIns="0" tIns="0" rIns="0" bIns="0" rtlCol="0" anchor="t"/>
           <a:lstStyle/>
           <a:p>
-            <a:pPr algn="l" indent="0" marL="0">
+            <a:pPr marL="0" indent="0" algn="l">
               <a:lnSpc>
                 <a:spcPct val="120000"/>
               </a:lnSpc>
@@ -7873,7 +7612,7 @@
             <a:endParaRPr lang="en-US" sz="1100" dirty="0"/>
           </a:p>
           <a:p>
-            <a:pPr algn="l" indent="0" marL="0">
+            <a:pPr marL="0" indent="0" algn="l">
               <a:lnSpc>
                 <a:spcPct val="120000"/>
               </a:lnSpc>
@@ -7882,7 +7621,7 @@
             <a:endParaRPr lang="en-US" sz="1100" dirty="0"/>
           </a:p>
           <a:p>
-            <a:pPr algn="l" indent="0" marL="0">
+            <a:pPr marL="0" indent="0" algn="l">
               <a:lnSpc>
                 <a:spcPct val="120000"/>
               </a:lnSpc>
@@ -7949,7 +7688,7 @@
           <a:bodyPr wrap="square" lIns="0" tIns="0" rIns="0" bIns="0" rtlCol="0" anchor="ctr"/>
           <a:lstStyle/>
           <a:p>
-            <a:pPr algn="ctr" indent="0" marL="0">
+            <a:pPr marL="0" indent="0" algn="ctr">
               <a:buNone/>
             </a:pPr>
             <a:r>
@@ -7988,7 +7727,7 @@
           <a:bodyPr wrap="square" lIns="0" tIns="0" rIns="0" bIns="0" rtlCol="0" anchor="t"/>
           <a:lstStyle/>
           <a:p>
-            <a:pPr algn="l" indent="0" marL="0">
+            <a:pPr marL="0" indent="0" algn="l">
               <a:lnSpc>
                 <a:spcPct val="112000"/>
               </a:lnSpc>
@@ -8030,7 +7769,7 @@
           <a:bodyPr wrap="square" lIns="0" tIns="0" rIns="0" bIns="0" rtlCol="0" anchor="t"/>
           <a:lstStyle/>
           <a:p>
-            <a:pPr algn="l" indent="0" marL="0">
+            <a:pPr marL="0" indent="0" algn="l">
               <a:lnSpc>
                 <a:spcPct val="112000"/>
               </a:lnSpc>
@@ -8097,7 +7836,7 @@
           <a:bodyPr wrap="square" lIns="0" tIns="0" rIns="0" bIns="0" rtlCol="0" anchor="ctr"/>
           <a:lstStyle/>
           <a:p>
-            <a:pPr algn="ctr" indent="0" marL="0">
+            <a:pPr marL="0" indent="0" algn="ctr">
               <a:buNone/>
             </a:pPr>
             <a:r>
@@ -8136,7 +7875,7 @@
           <a:bodyPr wrap="square" lIns="0" tIns="0" rIns="0" bIns="0" rtlCol="0" anchor="t"/>
           <a:lstStyle/>
           <a:p>
-            <a:pPr algn="l" indent="0" marL="0">
+            <a:pPr marL="0" indent="0" algn="l">
               <a:lnSpc>
                 <a:spcPct val="112000"/>
               </a:lnSpc>
@@ -8178,7 +7917,7 @@
           <a:bodyPr wrap="square" lIns="0" tIns="0" rIns="0" bIns="0" rtlCol="0" anchor="t"/>
           <a:lstStyle/>
           <a:p>
-            <a:pPr algn="l" indent="0" marL="0">
+            <a:pPr marL="0" indent="0" algn="l">
               <a:lnSpc>
                 <a:spcPct val="112000"/>
               </a:lnSpc>
@@ -8245,7 +7984,7 @@
           <a:bodyPr wrap="square" lIns="0" tIns="0" rIns="0" bIns="0" rtlCol="0" anchor="ctr"/>
           <a:lstStyle/>
           <a:p>
-            <a:pPr algn="ctr" indent="0" marL="0">
+            <a:pPr marL="0" indent="0" algn="ctr">
               <a:buNone/>
             </a:pPr>
             <a:r>
@@ -8284,7 +8023,7 @@
           <a:bodyPr wrap="square" lIns="0" tIns="0" rIns="0" bIns="0" rtlCol="0" anchor="t"/>
           <a:lstStyle/>
           <a:p>
-            <a:pPr algn="l" indent="0" marL="0">
+            <a:pPr marL="0" indent="0" algn="l">
               <a:lnSpc>
                 <a:spcPct val="112000"/>
               </a:lnSpc>
@@ -8326,7 +8065,7 @@
           <a:bodyPr wrap="square" lIns="0" tIns="0" rIns="0" bIns="0" rtlCol="0" anchor="t"/>
           <a:lstStyle/>
           <a:p>
-            <a:pPr algn="l" indent="0" marL="0">
+            <a:pPr marL="0" indent="0" algn="l">
               <a:lnSpc>
                 <a:spcPct val="112000"/>
               </a:lnSpc>
@@ -8393,7 +8132,7 @@
           <a:bodyPr wrap="square" lIns="0" tIns="0" rIns="0" bIns="0" rtlCol="0" anchor="ctr"/>
           <a:lstStyle/>
           <a:p>
-            <a:pPr algn="ctr" indent="0" marL="0">
+            <a:pPr marL="0" indent="0" algn="ctr">
               <a:buNone/>
             </a:pPr>
             <a:r>
@@ -8432,7 +8171,7 @@
           <a:bodyPr wrap="square" lIns="0" tIns="0" rIns="0" bIns="0" rtlCol="0" anchor="t"/>
           <a:lstStyle/>
           <a:p>
-            <a:pPr algn="l" indent="0" marL="0">
+            <a:pPr marL="0" indent="0" algn="l">
               <a:lnSpc>
                 <a:spcPct val="112000"/>
               </a:lnSpc>
@@ -8474,7 +8213,7 @@
           <a:bodyPr wrap="square" lIns="0" tIns="0" rIns="0" bIns="0" rtlCol="0" anchor="t"/>
           <a:lstStyle/>
           <a:p>
-            <a:pPr algn="l" indent="0" marL="0">
+            <a:pPr marL="0" indent="0" algn="l">
               <a:lnSpc>
                 <a:spcPct val="112000"/>
               </a:lnSpc>
@@ -8516,7 +8255,7 @@
           <a:bodyPr wrap="square" lIns="0" tIns="0" rIns="0" bIns="0" rtlCol="0" anchor="ctr"/>
           <a:lstStyle/>
           <a:p>
-            <a:pPr algn="l" indent="0" marL="0">
+            <a:pPr marL="0" indent="0" algn="l">
               <a:buNone/>
             </a:pPr>
             <a:r>
@@ -8550,6 +8289,7 @@
         <a:solidFill>
           <a:srgbClr val="0E1A2B"/>
         </a:solidFill>
+        <a:effectLst/>
       </p:bgPr>
     </p:bg>
     <p:spTree>
@@ -8587,11 +8327,11 @@
           <a:bodyPr wrap="square" lIns="0" tIns="0" rIns="0" bIns="0" rtlCol="0" anchor="ctr"/>
           <a:lstStyle/>
           <a:p>
-            <a:pPr indent="0" marL="0">
-              <a:buNone/>
-            </a:pPr>
-            <a:r>
-              <a:rPr lang="en-US" sz="950" b="1" spc="200" kern="0" dirty="0">
+            <a:pPr marL="0" indent="0">
+              <a:buNone/>
+            </a:pPr>
+            <a:r>
+              <a:rPr lang="en-US" sz="950" b="1" kern="0" spc="200" dirty="0">
                 <a:solidFill>
                   <a:srgbClr val="02C39A"/>
                 </a:solidFill>
@@ -8626,7 +8366,7 @@
           <a:bodyPr wrap="square" lIns="0" tIns="0" rIns="0" bIns="0" rtlCol="0" anchor="ctr"/>
           <a:lstStyle/>
           <a:p>
-            <a:pPr algn="l" indent="0" marL="0">
+            <a:pPr marL="0" indent="0" algn="l">
               <a:buNone/>
             </a:pPr>
             <a:r>
@@ -8665,7 +8405,7 @@
           <a:bodyPr wrap="square" lIns="0" tIns="0" rIns="0" bIns="0" rtlCol="0" anchor="ctr"/>
           <a:lstStyle/>
           <a:p>
-            <a:pPr algn="l" indent="0" marL="0">
+            <a:pPr marL="0" indent="0" algn="l">
               <a:buNone/>
             </a:pPr>
             <a:r>
@@ -8756,7 +8496,7 @@
           <a:bodyPr wrap="square" lIns="0" tIns="0" rIns="0" bIns="0" rtlCol="0" anchor="ctr"/>
           <a:lstStyle/>
           <a:p>
-            <a:pPr algn="ctr" indent="0" marL="0">
+            <a:pPr marL="0" indent="0" algn="ctr">
               <a:buNone/>
             </a:pPr>
             <a:r>
@@ -8795,7 +8535,7 @@
           <a:bodyPr wrap="square" lIns="0" tIns="0" rIns="0" bIns="0" rtlCol="0" anchor="ctr"/>
           <a:lstStyle/>
           <a:p>
-            <a:pPr algn="l" indent="0" marL="0">
+            <a:pPr marL="0" indent="0" algn="l">
               <a:buNone/>
             </a:pPr>
             <a:r>
@@ -8834,7 +8574,7 @@
           <a:bodyPr wrap="square" lIns="0" tIns="0" rIns="0" bIns="0" rtlCol="0" anchor="t"/>
           <a:lstStyle/>
           <a:p>
-            <a:pPr algn="l" indent="0" marL="0">
+            <a:pPr marL="0" indent="0" algn="l">
               <a:lnSpc>
                 <a:spcPct val="120000"/>
               </a:lnSpc>
@@ -8928,7 +8668,7 @@
           <a:bodyPr wrap="square" lIns="0" tIns="0" rIns="0" bIns="0" rtlCol="0" anchor="ctr"/>
           <a:lstStyle/>
           <a:p>
-            <a:pPr algn="ctr" indent="0" marL="0">
+            <a:pPr marL="0" indent="0" algn="ctr">
               <a:buNone/>
             </a:pPr>
             <a:r>
@@ -8967,7 +8707,7 @@
           <a:bodyPr wrap="square" lIns="0" tIns="0" rIns="0" bIns="0" rtlCol="0" anchor="ctr"/>
           <a:lstStyle/>
           <a:p>
-            <a:pPr algn="l" indent="0" marL="0">
+            <a:pPr marL="0" indent="0" algn="l">
               <a:buNone/>
             </a:pPr>
             <a:r>
@@ -9006,7 +8746,7 @@
           <a:bodyPr wrap="square" lIns="0" tIns="0" rIns="0" bIns="0" rtlCol="0" anchor="t"/>
           <a:lstStyle/>
           <a:p>
-            <a:pPr algn="l" indent="0" marL="0">
+            <a:pPr marL="0" indent="0" algn="l">
               <a:lnSpc>
                 <a:spcPct val="120000"/>
               </a:lnSpc>
@@ -9100,7 +8840,7 @@
           <a:bodyPr wrap="square" lIns="0" tIns="0" rIns="0" bIns="0" rtlCol="0" anchor="ctr"/>
           <a:lstStyle/>
           <a:p>
-            <a:pPr algn="ctr" indent="0" marL="0">
+            <a:pPr marL="0" indent="0" algn="ctr">
               <a:buNone/>
             </a:pPr>
             <a:r>
@@ -9139,7 +8879,7 @@
           <a:bodyPr wrap="square" lIns="0" tIns="0" rIns="0" bIns="0" rtlCol="0" anchor="ctr"/>
           <a:lstStyle/>
           <a:p>
-            <a:pPr algn="l" indent="0" marL="0">
+            <a:pPr marL="0" indent="0" algn="l">
               <a:buNone/>
             </a:pPr>
             <a:r>
@@ -9178,7 +8918,7 @@
           <a:bodyPr wrap="square" lIns="0" tIns="0" rIns="0" bIns="0" rtlCol="0" anchor="t"/>
           <a:lstStyle/>
           <a:p>
-            <a:pPr algn="l" indent="0" marL="0">
+            <a:pPr marL="0" indent="0" algn="l">
               <a:lnSpc>
                 <a:spcPct val="120000"/>
               </a:lnSpc>
@@ -9247,7 +8987,7 @@
           <a:bodyPr wrap="square" lIns="0" tIns="0" rIns="0" bIns="0" rtlCol="0" anchor="ctr"/>
           <a:lstStyle/>
           <a:p>
-            <a:pPr algn="l" indent="0" marL="0">
+            <a:pPr marL="0" indent="0" algn="l">
               <a:buNone/>
             </a:pPr>
             <a:r>
@@ -9286,7 +9026,7 @@
           <a:bodyPr wrap="square" lIns="0" tIns="0" rIns="0" bIns="0" rtlCol="0" anchor="t"/>
           <a:lstStyle/>
           <a:p>
-            <a:pPr algn="l" indent="0" marL="0">
+            <a:pPr marL="0" indent="0" algn="l">
               <a:lnSpc>
                 <a:spcPct val="125000"/>
               </a:lnSpc>
@@ -9306,7 +9046,7 @@
             <a:endParaRPr lang="en-US" sz="1150" dirty="0"/>
           </a:p>
           <a:p>
-            <a:pPr algn="l" indent="0" marL="0">
+            <a:pPr marL="0" indent="0" algn="l">
               <a:lnSpc>
                 <a:spcPct val="125000"/>
               </a:lnSpc>
@@ -9315,7 +9055,7 @@
             <a:endParaRPr lang="en-US" sz="1150" dirty="0"/>
           </a:p>
           <a:p>
-            <a:pPr algn="l" indent="0" marL="0">
+            <a:pPr marL="0" indent="0" algn="l">
               <a:lnSpc>
                 <a:spcPct val="125000"/>
               </a:lnSpc>
@@ -9352,6 +9092,7 @@
         <a:solidFill>
           <a:srgbClr val="F4F7FA"/>
         </a:solidFill>
+        <a:effectLst/>
       </p:bgPr>
     </p:bg>
     <p:spTree>
@@ -9389,11 +9130,11 @@
           <a:bodyPr wrap="square" lIns="0" tIns="0" rIns="0" bIns="0" rtlCol="0" anchor="ctr"/>
           <a:lstStyle/>
           <a:p>
-            <a:pPr indent="0" marL="0">
-              <a:buNone/>
-            </a:pPr>
-            <a:r>
-              <a:rPr lang="en-US" sz="950" b="1" spc="200" kern="0" dirty="0">
+            <a:pPr marL="0" indent="0">
+              <a:buNone/>
+            </a:pPr>
+            <a:r>
+              <a:rPr lang="en-US" sz="950" b="1" kern="0" spc="200" dirty="0">
                 <a:solidFill>
                   <a:srgbClr val="2E86AB"/>
                 </a:solidFill>
@@ -9428,7 +9169,7 @@
           <a:bodyPr wrap="square" lIns="0" tIns="0" rIns="0" bIns="0" rtlCol="0" anchor="ctr"/>
           <a:lstStyle/>
           <a:p>
-            <a:pPr algn="l" indent="0" marL="0">
+            <a:pPr marL="0" indent="0" algn="l">
               <a:buNone/>
             </a:pPr>
             <a:r>
@@ -9467,7 +9208,7 @@
           <a:bodyPr wrap="square" lIns="0" tIns="0" rIns="0" bIns="0" rtlCol="0" anchor="ctr"/>
           <a:lstStyle/>
           <a:p>
-            <a:pPr algn="l" indent="0" marL="0">
+            <a:pPr marL="0" indent="0" algn="l">
               <a:buNone/>
             </a:pPr>
             <a:r>
@@ -9511,7 +9252,7 @@
             <a:prstDash val="solid"/>
           </a:ln>
           <a:effectLst>
-            <a:outerShdw sx="100000" sy="100000" kx="0" ky="0" algn="bl" rotWithShape="0" blurRad="101600" dist="19050" dir="5400000">
+            <a:outerShdw blurRad="101600" dist="19050" dir="5400000" algn="bl" rotWithShape="0">
               <a:srgbClr val="8CA3BC">
                 <a:alpha val="22000"/>
               </a:srgbClr>
@@ -9567,7 +9308,7 @@
           <a:bodyPr wrap="square" lIns="0" tIns="0" rIns="0" bIns="0" rtlCol="0" anchor="ctr"/>
           <a:lstStyle/>
           <a:p>
-            <a:pPr algn="ctr" indent="0" marL="0">
+            <a:pPr marL="0" indent="0" algn="ctr">
               <a:buNone/>
             </a:pPr>
             <a:r>
@@ -9606,11 +9347,11 @@
           <a:bodyPr wrap="square" lIns="0" tIns="0" rIns="0" bIns="0" rtlCol="0" anchor="ctr"/>
           <a:lstStyle/>
           <a:p>
-            <a:pPr indent="0" marL="0">
-              <a:buNone/>
-            </a:pPr>
-            <a:r>
-              <a:rPr lang="en-US" sz="850" b="1" spc="120" kern="0" dirty="0">
+            <a:pPr marL="0" indent="0">
+              <a:buNone/>
+            </a:pPr>
+            <a:r>
+              <a:rPr lang="en-US" sz="850" b="1" kern="0" spc="120" dirty="0">
                 <a:solidFill>
                   <a:srgbClr val="3FA372"/>
                 </a:solidFill>
@@ -9730,11 +9471,11 @@
           <a:bodyPr wrap="square" lIns="0" tIns="0" rIns="0" bIns="0" rtlCol="0" anchor="ctr"/>
           <a:lstStyle/>
           <a:p>
-            <a:pPr indent="0" marL="0">
-              <a:buNone/>
-            </a:pPr>
-            <a:r>
-              <a:rPr lang="en-US" sz="850" b="1" spc="120" kern="0" dirty="0">
+            <a:pPr marL="0" indent="0">
+              <a:buNone/>
+            </a:pPr>
+            <a:r>
+              <a:rPr lang="en-US" sz="850" b="1" kern="0" spc="120" dirty="0">
                 <a:solidFill>
                   <a:srgbClr val="D9544D"/>
                 </a:solidFill>
@@ -9838,7 +9579,7 @@
             <a:prstDash val="solid"/>
           </a:ln>
           <a:effectLst>
-            <a:outerShdw sx="100000" sy="100000" kx="0" ky="0" algn="bl" rotWithShape="0" blurRad="101600" dist="19050" dir="5400000">
+            <a:outerShdw blurRad="101600" dist="19050" dir="5400000" algn="bl" rotWithShape="0">
               <a:srgbClr val="8CA3BC">
                 <a:alpha val="22000"/>
               </a:srgbClr>
@@ -9894,7 +9635,7 @@
           <a:bodyPr wrap="square" lIns="0" tIns="0" rIns="0" bIns="0" rtlCol="0" anchor="ctr"/>
           <a:lstStyle/>
           <a:p>
-            <a:pPr algn="ctr" indent="0" marL="0">
+            <a:pPr marL="0" indent="0" algn="ctr">
               <a:buNone/>
             </a:pPr>
             <a:r>
@@ -9933,11 +9674,11 @@
           <a:bodyPr wrap="square" lIns="0" tIns="0" rIns="0" bIns="0" rtlCol="0" anchor="ctr"/>
           <a:lstStyle/>
           <a:p>
-            <a:pPr indent="0" marL="0">
-              <a:buNone/>
-            </a:pPr>
-            <a:r>
-              <a:rPr lang="en-US" sz="850" b="1" spc="120" kern="0" dirty="0">
+            <a:pPr marL="0" indent="0">
+              <a:buNone/>
+            </a:pPr>
+            <a:r>
+              <a:rPr lang="en-US" sz="850" b="1" kern="0" spc="120" dirty="0">
                 <a:solidFill>
                   <a:srgbClr val="3FA372"/>
                 </a:solidFill>
@@ -10036,11 +9777,11 @@
           <a:bodyPr wrap="square" lIns="0" tIns="0" rIns="0" bIns="0" rtlCol="0" anchor="ctr"/>
           <a:lstStyle/>
           <a:p>
-            <a:pPr indent="0" marL="0">
-              <a:buNone/>
-            </a:pPr>
-            <a:r>
-              <a:rPr lang="en-US" sz="850" b="1" spc="120" kern="0" dirty="0">
+            <a:pPr marL="0" indent="0">
+              <a:buNone/>
+            </a:pPr>
+            <a:r>
+              <a:rPr lang="en-US" sz="850" b="1" kern="0" spc="120" dirty="0">
                 <a:solidFill>
                   <a:srgbClr val="D9544D"/>
                 </a:solidFill>
@@ -10144,7 +9885,7 @@
             <a:prstDash val="solid"/>
           </a:ln>
           <a:effectLst>
-            <a:outerShdw sx="100000" sy="100000" kx="0" ky="0" algn="bl" rotWithShape="0" blurRad="101600" dist="19050" dir="5400000">
+            <a:outerShdw blurRad="101600" dist="19050" dir="5400000" algn="bl" rotWithShape="0">
               <a:srgbClr val="8CA3BC">
                 <a:alpha val="22000"/>
               </a:srgbClr>
@@ -10200,7 +9941,7 @@
           <a:bodyPr wrap="square" lIns="0" tIns="0" rIns="0" bIns="0" rtlCol="0" anchor="ctr"/>
           <a:lstStyle/>
           <a:p>
-            <a:pPr algn="ctr" indent="0" marL="0">
+            <a:pPr marL="0" indent="0" algn="ctr">
               <a:buNone/>
             </a:pPr>
             <a:r>
@@ -10239,11 +9980,11 @@
           <a:bodyPr wrap="square" lIns="0" tIns="0" rIns="0" bIns="0" rtlCol="0" anchor="ctr"/>
           <a:lstStyle/>
           <a:p>
-            <a:pPr indent="0" marL="0">
-              <a:buNone/>
-            </a:pPr>
-            <a:r>
-              <a:rPr lang="en-US" sz="850" b="1" spc="120" kern="0" dirty="0">
+            <a:pPr marL="0" indent="0">
+              <a:buNone/>
+            </a:pPr>
+            <a:r>
+              <a:rPr lang="en-US" sz="850" b="1" kern="0" spc="120" dirty="0">
                 <a:solidFill>
                   <a:srgbClr val="3FA372"/>
                 </a:solidFill>
@@ -10342,11 +10083,11 @@
           <a:bodyPr wrap="square" lIns="0" tIns="0" rIns="0" bIns="0" rtlCol="0" anchor="ctr"/>
           <a:lstStyle/>
           <a:p>
-            <a:pPr indent="0" marL="0">
-              <a:buNone/>
-            </a:pPr>
-            <a:r>
-              <a:rPr lang="en-US" sz="850" b="1" spc="120" kern="0" dirty="0">
+            <a:pPr marL="0" indent="0">
+              <a:buNone/>
+            </a:pPr>
+            <a:r>
+              <a:rPr lang="en-US" sz="850" b="1" kern="0" spc="120" dirty="0">
                 <a:solidFill>
                   <a:srgbClr val="D9544D"/>
                 </a:solidFill>
@@ -10450,7 +10191,7 @@
             <a:prstDash val="solid"/>
           </a:ln>
           <a:effectLst>
-            <a:outerShdw sx="100000" sy="100000" kx="0" ky="0" algn="bl" rotWithShape="0" blurRad="101600" dist="19050" dir="5400000">
+            <a:outerShdw blurRad="101600" dist="19050" dir="5400000" algn="bl" rotWithShape="0">
               <a:srgbClr val="8CA3BC">
                 <a:alpha val="22000"/>
               </a:srgbClr>
@@ -10506,7 +10247,7 @@
           <a:bodyPr wrap="square" lIns="0" tIns="0" rIns="0" bIns="0" rtlCol="0" anchor="ctr"/>
           <a:lstStyle/>
           <a:p>
-            <a:pPr algn="ctr" indent="0" marL="0">
+            <a:pPr marL="0" indent="0" algn="ctr">
               <a:buNone/>
             </a:pPr>
             <a:r>
@@ -10545,11 +10286,11 @@
           <a:bodyPr wrap="square" lIns="0" tIns="0" rIns="0" bIns="0" rtlCol="0" anchor="ctr"/>
           <a:lstStyle/>
           <a:p>
-            <a:pPr indent="0" marL="0">
-              <a:buNone/>
-            </a:pPr>
-            <a:r>
-              <a:rPr lang="en-US" sz="850" b="1" spc="120" kern="0" dirty="0">
+            <a:pPr marL="0" indent="0">
+              <a:buNone/>
+            </a:pPr>
+            <a:r>
+              <a:rPr lang="en-US" sz="850" b="1" kern="0" spc="120" dirty="0">
                 <a:solidFill>
                   <a:srgbClr val="3FA372"/>
                 </a:solidFill>
@@ -10648,11 +10389,11 @@
           <a:bodyPr wrap="square" lIns="0" tIns="0" rIns="0" bIns="0" rtlCol="0" anchor="ctr"/>
           <a:lstStyle/>
           <a:p>
-            <a:pPr indent="0" marL="0">
-              <a:buNone/>
-            </a:pPr>
-            <a:r>
-              <a:rPr lang="en-US" sz="850" b="1" spc="120" kern="0" dirty="0">
+            <a:pPr marL="0" indent="0">
+              <a:buNone/>
+            </a:pPr>
+            <a:r>
+              <a:rPr lang="en-US" sz="850" b="1" kern="0" spc="120" dirty="0">
                 <a:solidFill>
                   <a:srgbClr val="D9544D"/>
                 </a:solidFill>
@@ -10746,6 +10487,7 @@
         <a:solidFill>
           <a:srgbClr val="F4F7FA"/>
         </a:solidFill>
+        <a:effectLst/>
       </p:bgPr>
     </p:bg>
     <p:spTree>
@@ -10783,11 +10525,11 @@
           <a:bodyPr wrap="square" lIns="0" tIns="0" rIns="0" bIns="0" rtlCol="0" anchor="ctr"/>
           <a:lstStyle/>
           <a:p>
-            <a:pPr indent="0" marL="0">
-              <a:buNone/>
-            </a:pPr>
-            <a:r>
-              <a:rPr lang="en-US" sz="950" b="1" spc="200" kern="0" dirty="0">
+            <a:pPr marL="0" indent="0">
+              <a:buNone/>
+            </a:pPr>
+            <a:r>
+              <a:rPr lang="en-US" sz="950" b="1" kern="0" spc="200" dirty="0">
                 <a:solidFill>
                   <a:srgbClr val="2E86AB"/>
                 </a:solidFill>
@@ -10822,7 +10564,7 @@
           <a:bodyPr wrap="square" lIns="0" tIns="0" rIns="0" bIns="0" rtlCol="0" anchor="ctr"/>
           <a:lstStyle/>
           <a:p>
-            <a:pPr algn="l" indent="0" marL="0">
+            <a:pPr marL="0" indent="0" algn="l">
               <a:buNone/>
             </a:pPr>
             <a:r>
@@ -10861,7 +10603,7 @@
           <a:bodyPr wrap="square" lIns="0" tIns="0" rIns="0" bIns="0" rtlCol="0" anchor="ctr"/>
           <a:lstStyle/>
           <a:p>
-            <a:pPr algn="l" indent="0" marL="0">
+            <a:pPr marL="0" indent="0" algn="l">
               <a:buNone/>
             </a:pPr>
             <a:r>
@@ -10905,7 +10647,7 @@
             <a:prstDash val="solid"/>
           </a:ln>
           <a:effectLst>
-            <a:outerShdw sx="100000" sy="100000" kx="0" ky="0" algn="bl" rotWithShape="0" blurRad="101600" dist="19050" dir="5400000">
+            <a:outerShdw blurRad="101600" dist="19050" dir="5400000" algn="bl" rotWithShape="0">
               <a:srgbClr val="8CA3BC">
                 <a:alpha val="22000"/>
               </a:srgbClr>
@@ -10959,7 +10701,7 @@
           <a:bodyPr wrap="square" lIns="0" tIns="0" rIns="0" bIns="0" rtlCol="0" anchor="ctr"/>
           <a:lstStyle/>
           <a:p>
-            <a:pPr algn="ctr" indent="0" marL="0">
+            <a:pPr marL="0" indent="0" algn="ctr">
               <a:buNone/>
             </a:pPr>
             <a:r>
@@ -10998,7 +10740,7 @@
           <a:bodyPr wrap="square" lIns="0" tIns="0" rIns="0" bIns="0" rtlCol="0" anchor="t"/>
           <a:lstStyle/>
           <a:p>
-            <a:pPr algn="l" indent="0" marL="0">
+            <a:pPr marL="0" indent="0" algn="l">
               <a:lnSpc>
                 <a:spcPct val="112000"/>
               </a:lnSpc>
@@ -11040,7 +10782,7 @@
           <a:bodyPr wrap="square" lIns="0" tIns="0" rIns="0" bIns="0" rtlCol="0" anchor="t"/>
           <a:lstStyle/>
           <a:p>
-            <a:pPr algn="l" indent="0" marL="0">
+            <a:pPr marL="0" indent="0" algn="l">
               <a:lnSpc>
                 <a:spcPct val="112000"/>
               </a:lnSpc>
@@ -11082,7 +10824,7 @@
           <a:bodyPr wrap="square" lIns="0" tIns="0" rIns="0" bIns="0" rtlCol="0" anchor="t"/>
           <a:lstStyle/>
           <a:p>
-            <a:pPr algn="l" indent="0" marL="0">
+            <a:pPr marL="0" indent="0" algn="l">
               <a:lnSpc>
                 <a:spcPct val="115000"/>
               </a:lnSpc>
@@ -11129,7 +10871,7 @@
             <a:prstDash val="solid"/>
           </a:ln>
           <a:effectLst>
-            <a:outerShdw sx="100000" sy="100000" kx="0" ky="0" algn="bl" rotWithShape="0" blurRad="101600" dist="19050" dir="5400000">
+            <a:outerShdw blurRad="101600" dist="19050" dir="5400000" algn="bl" rotWithShape="0">
               <a:srgbClr val="8CA3BC">
                 <a:alpha val="22000"/>
               </a:srgbClr>
@@ -11183,7 +10925,7 @@
           <a:bodyPr wrap="square" lIns="0" tIns="0" rIns="0" bIns="0" rtlCol="0" anchor="ctr"/>
           <a:lstStyle/>
           <a:p>
-            <a:pPr algn="ctr" indent="0" marL="0">
+            <a:pPr marL="0" indent="0" algn="ctr">
               <a:buNone/>
             </a:pPr>
             <a:r>
@@ -11222,7 +10964,7 @@
           <a:bodyPr wrap="square" lIns="0" tIns="0" rIns="0" bIns="0" rtlCol="0" anchor="t"/>
           <a:lstStyle/>
           <a:p>
-            <a:pPr algn="l" indent="0" marL="0">
+            <a:pPr marL="0" indent="0" algn="l">
               <a:lnSpc>
                 <a:spcPct val="112000"/>
               </a:lnSpc>
@@ -11264,7 +11006,7 @@
           <a:bodyPr wrap="square" lIns="0" tIns="0" rIns="0" bIns="0" rtlCol="0" anchor="t"/>
           <a:lstStyle/>
           <a:p>
-            <a:pPr algn="l" indent="0" marL="0">
+            <a:pPr marL="0" indent="0" algn="l">
               <a:lnSpc>
                 <a:spcPct val="112000"/>
               </a:lnSpc>
@@ -11306,7 +11048,7 @@
           <a:bodyPr wrap="square" lIns="0" tIns="0" rIns="0" bIns="0" rtlCol="0" anchor="t"/>
           <a:lstStyle/>
           <a:p>
-            <a:pPr algn="l" indent="0" marL="0">
+            <a:pPr marL="0" indent="0" algn="l">
               <a:lnSpc>
                 <a:spcPct val="115000"/>
               </a:lnSpc>
@@ -11353,7 +11095,7 @@
             <a:prstDash val="solid"/>
           </a:ln>
           <a:effectLst>
-            <a:outerShdw sx="100000" sy="100000" kx="0" ky="0" algn="bl" rotWithShape="0" blurRad="101600" dist="19050" dir="5400000">
+            <a:outerShdw blurRad="101600" dist="19050" dir="5400000" algn="bl" rotWithShape="0">
               <a:srgbClr val="8CA3BC">
                 <a:alpha val="22000"/>
               </a:srgbClr>
@@ -11407,7 +11149,7 @@
           <a:bodyPr wrap="square" lIns="0" tIns="0" rIns="0" bIns="0" rtlCol="0" anchor="ctr"/>
           <a:lstStyle/>
           <a:p>
-            <a:pPr algn="ctr" indent="0" marL="0">
+            <a:pPr marL="0" indent="0" algn="ctr">
               <a:buNone/>
             </a:pPr>
             <a:r>
@@ -11446,7 +11188,7 @@
           <a:bodyPr wrap="square" lIns="0" tIns="0" rIns="0" bIns="0" rtlCol="0" anchor="t"/>
           <a:lstStyle/>
           <a:p>
-            <a:pPr algn="l" indent="0" marL="0">
+            <a:pPr marL="0" indent="0" algn="l">
               <a:lnSpc>
                 <a:spcPct val="112000"/>
               </a:lnSpc>
@@ -11488,7 +11230,7 @@
           <a:bodyPr wrap="square" lIns="0" tIns="0" rIns="0" bIns="0" rtlCol="0" anchor="t"/>
           <a:lstStyle/>
           <a:p>
-            <a:pPr algn="l" indent="0" marL="0">
+            <a:pPr marL="0" indent="0" algn="l">
               <a:lnSpc>
                 <a:spcPct val="112000"/>
               </a:lnSpc>
@@ -11530,7 +11272,7 @@
           <a:bodyPr wrap="square" lIns="0" tIns="0" rIns="0" bIns="0" rtlCol="0" anchor="t"/>
           <a:lstStyle/>
           <a:p>
-            <a:pPr algn="l" indent="0" marL="0">
+            <a:pPr marL="0" indent="0" algn="l">
               <a:lnSpc>
                 <a:spcPct val="115000"/>
               </a:lnSpc>
@@ -11577,7 +11319,7 @@
             <a:prstDash val="solid"/>
           </a:ln>
           <a:effectLst>
-            <a:outerShdw sx="100000" sy="100000" kx="0" ky="0" algn="bl" rotWithShape="0" blurRad="101600" dist="19050" dir="5400000">
+            <a:outerShdw blurRad="101600" dist="19050" dir="5400000" algn="bl" rotWithShape="0">
               <a:srgbClr val="8CA3BC">
                 <a:alpha val="22000"/>
               </a:srgbClr>
@@ -11631,7 +11373,7 @@
           <a:bodyPr wrap="square" lIns="0" tIns="0" rIns="0" bIns="0" rtlCol="0" anchor="ctr"/>
           <a:lstStyle/>
           <a:p>
-            <a:pPr algn="ctr" indent="0" marL="0">
+            <a:pPr marL="0" indent="0" algn="ctr">
               <a:buNone/>
             </a:pPr>
             <a:r>
@@ -11670,7 +11412,7 @@
           <a:bodyPr wrap="square" lIns="0" tIns="0" rIns="0" bIns="0" rtlCol="0" anchor="t"/>
           <a:lstStyle/>
           <a:p>
-            <a:pPr algn="l" indent="0" marL="0">
+            <a:pPr marL="0" indent="0" algn="l">
               <a:lnSpc>
                 <a:spcPct val="112000"/>
               </a:lnSpc>
@@ -11712,7 +11454,7 @@
           <a:bodyPr wrap="square" lIns="0" tIns="0" rIns="0" bIns="0" rtlCol="0" anchor="t"/>
           <a:lstStyle/>
           <a:p>
-            <a:pPr algn="l" indent="0" marL="0">
+            <a:pPr marL="0" indent="0" algn="l">
               <a:lnSpc>
                 <a:spcPct val="112000"/>
               </a:lnSpc>
@@ -11754,7 +11496,7 @@
           <a:bodyPr wrap="square" lIns="0" tIns="0" rIns="0" bIns="0" rtlCol="0" anchor="t"/>
           <a:lstStyle/>
           <a:p>
-            <a:pPr algn="l" indent="0" marL="0">
+            <a:pPr marL="0" indent="0" algn="l">
               <a:lnSpc>
                 <a:spcPct val="115000"/>
               </a:lnSpc>
@@ -11801,7 +11543,7 @@
             <a:prstDash val="solid"/>
           </a:ln>
           <a:effectLst>
-            <a:outerShdw sx="100000" sy="100000" kx="0" ky="0" algn="bl" rotWithShape="0" blurRad="101600" dist="19050" dir="5400000">
+            <a:outerShdw blurRad="101600" dist="19050" dir="5400000" algn="bl" rotWithShape="0">
               <a:srgbClr val="8CA3BC">
                 <a:alpha val="22000"/>
               </a:srgbClr>
@@ -11855,7 +11597,7 @@
           <a:bodyPr wrap="square" lIns="0" tIns="0" rIns="0" bIns="0" rtlCol="0" anchor="ctr"/>
           <a:lstStyle/>
           <a:p>
-            <a:pPr algn="ctr" indent="0" marL="0">
+            <a:pPr marL="0" indent="0" algn="ctr">
               <a:buNone/>
             </a:pPr>
             <a:r>
@@ -11894,7 +11636,7 @@
           <a:bodyPr wrap="square" lIns="0" tIns="0" rIns="0" bIns="0" rtlCol="0" anchor="t"/>
           <a:lstStyle/>
           <a:p>
-            <a:pPr algn="l" indent="0" marL="0">
+            <a:pPr marL="0" indent="0" algn="l">
               <a:lnSpc>
                 <a:spcPct val="112000"/>
               </a:lnSpc>
@@ -11936,7 +11678,7 @@
           <a:bodyPr wrap="square" lIns="0" tIns="0" rIns="0" bIns="0" rtlCol="0" anchor="t"/>
           <a:lstStyle/>
           <a:p>
-            <a:pPr algn="l" indent="0" marL="0">
+            <a:pPr marL="0" indent="0" algn="l">
               <a:lnSpc>
                 <a:spcPct val="112000"/>
               </a:lnSpc>
@@ -11978,7 +11720,7 @@
           <a:bodyPr wrap="square" lIns="0" tIns="0" rIns="0" bIns="0" rtlCol="0" anchor="t"/>
           <a:lstStyle/>
           <a:p>
-            <a:pPr algn="l" indent="0" marL="0">
+            <a:pPr marL="0" indent="0" algn="l">
               <a:lnSpc>
                 <a:spcPct val="115000"/>
               </a:lnSpc>
@@ -12020,7 +11762,7 @@
           <a:bodyPr wrap="square" lIns="0" tIns="0" rIns="0" bIns="0" rtlCol="0" anchor="ctr"/>
           <a:lstStyle/>
           <a:p>
-            <a:pPr algn="l" indent="0" marL="0">
+            <a:pPr marL="0" indent="0" algn="l">
               <a:buNone/>
             </a:pPr>
             <a:r>
@@ -12054,6 +11796,7 @@
         <a:solidFill>
           <a:srgbClr val="F4F7FA"/>
         </a:solidFill>
+        <a:effectLst/>
       </p:bgPr>
     </p:bg>
     <p:spTree>
@@ -12091,11 +11834,11 @@
           <a:bodyPr wrap="square" lIns="0" tIns="0" rIns="0" bIns="0" rtlCol="0" anchor="ctr"/>
           <a:lstStyle/>
           <a:p>
-            <a:pPr indent="0" marL="0">
-              <a:buNone/>
-            </a:pPr>
-            <a:r>
-              <a:rPr lang="en-US" sz="950" b="1" spc="200" kern="0" dirty="0">
+            <a:pPr marL="0" indent="0">
+              <a:buNone/>
+            </a:pPr>
+            <a:r>
+              <a:rPr lang="en-US" sz="950" b="1" kern="0" spc="200" dirty="0">
                 <a:solidFill>
                   <a:srgbClr val="2E86AB"/>
                 </a:solidFill>
@@ -12130,7 +11873,7 @@
           <a:bodyPr wrap="square" lIns="0" tIns="0" rIns="0" bIns="0" rtlCol="0" anchor="ctr"/>
           <a:lstStyle/>
           <a:p>
-            <a:pPr algn="l" indent="0" marL="0">
+            <a:pPr marL="0" indent="0" algn="l">
               <a:buNone/>
             </a:pPr>
             <a:r>
@@ -12169,7 +11912,7 @@
           <a:bodyPr wrap="square" lIns="0" tIns="0" rIns="0" bIns="0" rtlCol="0" anchor="ctr"/>
           <a:lstStyle/>
           <a:p>
-            <a:pPr algn="l" indent="0" marL="0">
+            <a:pPr marL="0" indent="0" algn="l">
               <a:buNone/>
             </a:pPr>
             <a:r>
@@ -12189,7 +11932,7 @@
       </p:sp>
       <p:graphicFrame>
         <p:nvGraphicFramePr>
-          <p:cNvPr id="5" name="Chart 0" descr=""/>
+          <p:cNvPr id="5" name="Chart 0"/>
           <p:cNvGraphicFramePr/>
           <p:nvPr/>
         </p:nvGraphicFramePr>
@@ -12197,9 +11940,9 @@
           <a:off x="548640" y="1645920"/>
           <a:ext cx="6766560" cy="4114800"/>
         </p:xfrm>
-        <a:graphic xmlns:a="http://schemas.openxmlformats.org/drawingml/2006/main">
+        <a:graphic>
           <a:graphicData uri="http://schemas.openxmlformats.org/drawingml/2006/chart">
-            <c:chart xmlns:c="http://schemas.openxmlformats.org/drawingml/2006/chart" r:id="rId1"/>
+            <c:chart xmlns:c="http://schemas.openxmlformats.org/drawingml/2006/chart" xmlns:r="http://schemas.openxmlformats.org/officeDocument/2006/relationships" r:id="rId3"/>
           </a:graphicData>
         </a:graphic>
       </p:graphicFrame>
@@ -12229,7 +11972,7 @@
             <a:prstDash val="solid"/>
           </a:ln>
           <a:effectLst>
-            <a:outerShdw sx="100000" sy="100000" kx="0" ky="0" algn="bl" rotWithShape="0" blurRad="101600" dist="19050" dir="5400000">
+            <a:outerShdw blurRad="101600" dist="19050" dir="5400000" algn="bl" rotWithShape="0">
               <a:srgbClr val="8CA3BC">
                 <a:alpha val="22000"/>
               </a:srgbClr>
@@ -12258,7 +12001,7 @@
           <a:bodyPr wrap="square" lIns="0" tIns="0" rIns="0" bIns="0" rtlCol="0" anchor="ctr"/>
           <a:lstStyle/>
           <a:p>
-            <a:pPr algn="l" indent="0" marL="0">
+            <a:pPr marL="0" indent="0" algn="l">
               <a:buNone/>
             </a:pPr>
             <a:r>
@@ -12297,7 +12040,7 @@
           <a:bodyPr wrap="square" lIns="0" tIns="0" rIns="0" bIns="0" rtlCol="0" anchor="t"/>
           <a:lstStyle/>
           <a:p>
-            <a:pPr algn="l" indent="0" marL="0">
+            <a:pPr marL="0" indent="0" algn="l">
               <a:lnSpc>
                 <a:spcPct val="122000"/>
               </a:lnSpc>
@@ -12317,7 +12060,7 @@
             <a:endParaRPr lang="en-US" sz="1050" dirty="0"/>
           </a:p>
           <a:p>
-            <a:pPr algn="l" indent="0" marL="0">
+            <a:pPr marL="0" indent="0" algn="l">
               <a:lnSpc>
                 <a:spcPct val="122000"/>
               </a:lnSpc>
@@ -12326,7 +12069,7 @@
             <a:endParaRPr lang="en-US" sz="1050" dirty="0"/>
           </a:p>
           <a:p>
-            <a:pPr algn="l" indent="0" marL="0">
+            <a:pPr marL="0" indent="0" algn="l">
               <a:lnSpc>
                 <a:spcPct val="122000"/>
               </a:lnSpc>
@@ -12346,7 +12089,7 @@
             <a:endParaRPr lang="en-US" sz="1050" dirty="0"/>
           </a:p>
           <a:p>
-            <a:pPr algn="l" indent="0" marL="0">
+            <a:pPr marL="0" indent="0" algn="l">
               <a:lnSpc>
                 <a:spcPct val="122000"/>
               </a:lnSpc>
@@ -12355,7 +12098,7 @@
             <a:endParaRPr lang="en-US" sz="1050" dirty="0"/>
           </a:p>
           <a:p>
-            <a:pPr algn="l" indent="0" marL="0">
+            <a:pPr marL="0" indent="0" algn="l">
               <a:lnSpc>
                 <a:spcPct val="122000"/>
               </a:lnSpc>
@@ -12375,7 +12118,7 @@
             <a:endParaRPr lang="en-US" sz="1050" dirty="0"/>
           </a:p>
           <a:p>
-            <a:pPr algn="l" indent="0" marL="0">
+            <a:pPr marL="0" indent="0" algn="l">
               <a:lnSpc>
                 <a:spcPct val="122000"/>
               </a:lnSpc>
@@ -12384,7 +12127,7 @@
             <a:endParaRPr lang="en-US" sz="1050" dirty="0"/>
           </a:p>
           <a:p>
-            <a:pPr algn="l" indent="0" marL="0">
+            <a:pPr marL="0" indent="0" algn="l">
               <a:lnSpc>
                 <a:spcPct val="122000"/>
               </a:lnSpc>
@@ -12426,7 +12169,7 @@
           <a:bodyPr wrap="square" lIns="0" tIns="0" rIns="0" bIns="0" rtlCol="0" anchor="ctr"/>
           <a:lstStyle/>
           <a:p>
-            <a:pPr algn="l" indent="0" marL="0">
+            <a:pPr marL="0" indent="0" algn="l">
               <a:buNone/>
             </a:pPr>
             <a:r>
@@ -12460,6 +12203,7 @@
         <a:solidFill>
           <a:srgbClr val="0E1A2B"/>
         </a:solidFill>
+        <a:effectLst/>
       </p:bgPr>
     </p:bg>
     <p:spTree>
@@ -12497,11 +12241,11 @@
           <a:bodyPr wrap="square" lIns="0" tIns="0" rIns="0" bIns="0" rtlCol="0" anchor="ctr"/>
           <a:lstStyle/>
           <a:p>
-            <a:pPr indent="0" marL="0">
-              <a:buNone/>
-            </a:pPr>
-            <a:r>
-              <a:rPr lang="en-US" sz="950" b="1" spc="200" kern="0" dirty="0">
+            <a:pPr marL="0" indent="0">
+              <a:buNone/>
+            </a:pPr>
+            <a:r>
+              <a:rPr lang="en-US" sz="950" b="1" kern="0" spc="200" dirty="0">
                 <a:solidFill>
                   <a:srgbClr val="02C39A"/>
                 </a:solidFill>
@@ -12536,7 +12280,7 @@
           <a:bodyPr wrap="square" lIns="0" tIns="0" rIns="0" bIns="0" rtlCol="0" anchor="ctr"/>
           <a:lstStyle/>
           <a:p>
-            <a:pPr algn="l" indent="0" marL="0">
+            <a:pPr marL="0" indent="0" algn="l">
               <a:buNone/>
             </a:pPr>
             <a:r>
@@ -12627,7 +12371,7 @@
           <a:bodyPr wrap="square" lIns="0" tIns="0" rIns="0" bIns="0" rtlCol="0" anchor="ctr"/>
           <a:lstStyle/>
           <a:p>
-            <a:pPr algn="ctr" indent="0" marL="0">
+            <a:pPr marL="0" indent="0" algn="ctr">
               <a:buNone/>
             </a:pPr>
             <a:r>
@@ -12666,7 +12410,7 @@
           <a:bodyPr wrap="square" lIns="0" tIns="0" rIns="0" bIns="0" rtlCol="0" anchor="t"/>
           <a:lstStyle/>
           <a:p>
-            <a:pPr algn="l" indent="0" marL="0">
+            <a:pPr marL="0" indent="0" algn="l">
               <a:lnSpc>
                 <a:spcPct val="112000"/>
               </a:lnSpc>
@@ -12708,7 +12452,7 @@
           <a:bodyPr wrap="square" lIns="0" tIns="0" rIns="0" bIns="0" rtlCol="0" anchor="t"/>
           <a:lstStyle/>
           <a:p>
-            <a:pPr algn="l" indent="0" marL="0">
+            <a:pPr marL="0" indent="0" algn="l">
               <a:lnSpc>
                 <a:spcPct val="115000"/>
               </a:lnSpc>
@@ -12802,7 +12546,7 @@
           <a:bodyPr wrap="square" lIns="0" tIns="0" rIns="0" bIns="0" rtlCol="0" anchor="ctr"/>
           <a:lstStyle/>
           <a:p>
-            <a:pPr algn="ctr" indent="0" marL="0">
+            <a:pPr marL="0" indent="0" algn="ctr">
               <a:buNone/>
             </a:pPr>
             <a:r>
@@ -12841,7 +12585,7 @@
           <a:bodyPr wrap="square" lIns="0" tIns="0" rIns="0" bIns="0" rtlCol="0" anchor="t"/>
           <a:lstStyle/>
           <a:p>
-            <a:pPr algn="l" indent="0" marL="0">
+            <a:pPr marL="0" indent="0" algn="l">
               <a:lnSpc>
                 <a:spcPct val="112000"/>
               </a:lnSpc>
@@ -12883,7 +12627,7 @@
           <a:bodyPr wrap="square" lIns="0" tIns="0" rIns="0" bIns="0" rtlCol="0" anchor="t"/>
           <a:lstStyle/>
           <a:p>
-            <a:pPr algn="l" indent="0" marL="0">
+            <a:pPr marL="0" indent="0" algn="l">
               <a:lnSpc>
                 <a:spcPct val="115000"/>
               </a:lnSpc>
@@ -12977,7 +12721,7 @@
           <a:bodyPr wrap="square" lIns="0" tIns="0" rIns="0" bIns="0" rtlCol="0" anchor="ctr"/>
           <a:lstStyle/>
           <a:p>
-            <a:pPr algn="ctr" indent="0" marL="0">
+            <a:pPr marL="0" indent="0" algn="ctr">
               <a:buNone/>
             </a:pPr>
             <a:r>
@@ -13016,7 +12760,7 @@
           <a:bodyPr wrap="square" lIns="0" tIns="0" rIns="0" bIns="0" rtlCol="0" anchor="t"/>
           <a:lstStyle/>
           <a:p>
-            <a:pPr algn="l" indent="0" marL="0">
+            <a:pPr marL="0" indent="0" algn="l">
               <a:lnSpc>
                 <a:spcPct val="112000"/>
               </a:lnSpc>
@@ -13058,7 +12802,7 @@
           <a:bodyPr wrap="square" lIns="0" tIns="0" rIns="0" bIns="0" rtlCol="0" anchor="t"/>
           <a:lstStyle/>
           <a:p>
-            <a:pPr algn="l" indent="0" marL="0">
+            <a:pPr marL="0" indent="0" algn="l">
               <a:lnSpc>
                 <a:spcPct val="115000"/>
               </a:lnSpc>
@@ -13152,7 +12896,7 @@
           <a:bodyPr wrap="square" lIns="0" tIns="0" rIns="0" bIns="0" rtlCol="0" anchor="ctr"/>
           <a:lstStyle/>
           <a:p>
-            <a:pPr algn="ctr" indent="0" marL="0">
+            <a:pPr marL="0" indent="0" algn="ctr">
               <a:buNone/>
             </a:pPr>
             <a:r>
@@ -13191,7 +12935,7 @@
           <a:bodyPr wrap="square" lIns="0" tIns="0" rIns="0" bIns="0" rtlCol="0" anchor="t"/>
           <a:lstStyle/>
           <a:p>
-            <a:pPr algn="l" indent="0" marL="0">
+            <a:pPr marL="0" indent="0" algn="l">
               <a:lnSpc>
                 <a:spcPct val="112000"/>
               </a:lnSpc>
@@ -13233,7 +12977,7 @@
           <a:bodyPr wrap="square" lIns="0" tIns="0" rIns="0" bIns="0" rtlCol="0" anchor="t"/>
           <a:lstStyle/>
           <a:p>
-            <a:pPr algn="l" indent="0" marL="0">
+            <a:pPr marL="0" indent="0" algn="l">
               <a:lnSpc>
                 <a:spcPct val="115000"/>
               </a:lnSpc>
@@ -13327,7 +13071,7 @@
           <a:bodyPr wrap="square" lIns="0" tIns="0" rIns="0" bIns="0" rtlCol="0" anchor="ctr"/>
           <a:lstStyle/>
           <a:p>
-            <a:pPr algn="ctr" indent="0" marL="0">
+            <a:pPr marL="0" indent="0" algn="ctr">
               <a:buNone/>
             </a:pPr>
             <a:r>
@@ -13366,7 +13110,7 @@
           <a:bodyPr wrap="square" lIns="0" tIns="0" rIns="0" bIns="0" rtlCol="0" anchor="t"/>
           <a:lstStyle/>
           <a:p>
-            <a:pPr algn="l" indent="0" marL="0">
+            <a:pPr marL="0" indent="0" algn="l">
               <a:lnSpc>
                 <a:spcPct val="112000"/>
               </a:lnSpc>
@@ -13408,7 +13152,7 @@
           <a:bodyPr wrap="square" lIns="0" tIns="0" rIns="0" bIns="0" rtlCol="0" anchor="t"/>
           <a:lstStyle/>
           <a:p>
-            <a:pPr algn="l" indent="0" marL="0">
+            <a:pPr marL="0" indent="0" algn="l">
               <a:lnSpc>
                 <a:spcPct val="115000"/>
               </a:lnSpc>
@@ -13450,7 +13194,7 @@
           <a:bodyPr wrap="square" lIns="0" tIns="0" rIns="0" bIns="0" rtlCol="0" anchor="ctr"/>
           <a:lstStyle/>
           <a:p>
-            <a:pPr indent="0" marL="0">
+            <a:pPr marL="0" indent="0">
               <a:buNone/>
             </a:pPr>
             <a:r>
@@ -13484,6 +13228,7 @@
         <a:solidFill>
           <a:srgbClr val="F4F7FA"/>
         </a:solidFill>
+        <a:effectLst/>
       </p:bgPr>
     </p:bg>
     <p:spTree>
@@ -13521,11 +13266,11 @@
           <a:bodyPr wrap="square" lIns="0" tIns="0" rIns="0" bIns="0" rtlCol="0" anchor="ctr"/>
           <a:lstStyle/>
           <a:p>
-            <a:pPr indent="0" marL="0">
-              <a:buNone/>
-            </a:pPr>
-            <a:r>
-              <a:rPr lang="en-US" sz="950" b="1" spc="200" kern="0" dirty="0">
+            <a:pPr marL="0" indent="0">
+              <a:buNone/>
+            </a:pPr>
+            <a:r>
+              <a:rPr lang="en-US" sz="950" b="1" kern="0" spc="200" dirty="0">
                 <a:solidFill>
                   <a:srgbClr val="2E86AB"/>
                 </a:solidFill>
@@ -13560,7 +13305,7 @@
           <a:bodyPr wrap="square" lIns="0" tIns="0" rIns="0" bIns="0" rtlCol="0" anchor="ctr"/>
           <a:lstStyle/>
           <a:p>
-            <a:pPr algn="l" indent="0" marL="0">
+            <a:pPr marL="0" indent="0" algn="l">
               <a:buNone/>
             </a:pPr>
             <a:r>
@@ -13599,7 +13344,7 @@
           <a:bodyPr wrap="square" lIns="0" tIns="0" rIns="0" bIns="0" rtlCol="0" anchor="ctr"/>
           <a:lstStyle/>
           <a:p>
-            <a:pPr algn="l" indent="0" marL="0">
+            <a:pPr marL="0" indent="0" algn="l">
               <a:buNone/>
             </a:pPr>
             <a:r>
@@ -13643,7 +13388,7 @@
             <a:prstDash val="solid"/>
           </a:ln>
           <a:effectLst>
-            <a:outerShdw sx="100000" sy="100000" kx="0" ky="0" algn="bl" rotWithShape="0" blurRad="101600" dist="19050" dir="5400000">
+            <a:outerShdw blurRad="101600" dist="19050" dir="5400000" algn="bl" rotWithShape="0">
               <a:srgbClr val="8CA3BC">
                 <a:alpha val="22000"/>
               </a:srgbClr>
@@ -13697,7 +13442,7 @@
           <a:bodyPr wrap="square" lIns="0" tIns="0" rIns="0" bIns="0" rtlCol="0" anchor="ctr"/>
           <a:lstStyle/>
           <a:p>
-            <a:pPr algn="ctr" indent="0" marL="0">
+            <a:pPr marL="0" indent="0" algn="ctr">
               <a:buNone/>
             </a:pPr>
             <a:r>
@@ -13736,7 +13481,7 @@
           <a:bodyPr wrap="square" lIns="0" tIns="0" rIns="0" bIns="0" rtlCol="0" anchor="ctr"/>
           <a:lstStyle/>
           <a:p>
-            <a:pPr algn="l" indent="0" marL="0">
+            <a:pPr marL="0" indent="0" algn="l">
               <a:buNone/>
             </a:pPr>
             <a:r>
@@ -13775,7 +13520,7 @@
           <a:bodyPr wrap="square" lIns="0" tIns="0" rIns="0" bIns="0" rtlCol="0" anchor="t"/>
           <a:lstStyle/>
           <a:p>
-            <a:pPr algn="l" indent="0" marL="0">
+            <a:pPr marL="0" indent="0" algn="l">
               <a:lnSpc>
                 <a:spcPct val="112000"/>
               </a:lnSpc>
@@ -13822,7 +13567,7 @@
             <a:prstDash val="solid"/>
           </a:ln>
           <a:effectLst>
-            <a:outerShdw sx="100000" sy="100000" kx="0" ky="0" algn="bl" rotWithShape="0" blurRad="101600" dist="19050" dir="5400000">
+            <a:outerShdw blurRad="101600" dist="19050" dir="5400000" algn="bl" rotWithShape="0">
               <a:srgbClr val="8CA3BC">
                 <a:alpha val="22000"/>
               </a:srgbClr>
@@ -13876,7 +13621,7 @@
           <a:bodyPr wrap="square" lIns="0" tIns="0" rIns="0" bIns="0" rtlCol="0" anchor="ctr"/>
           <a:lstStyle/>
           <a:p>
-            <a:pPr algn="ctr" indent="0" marL="0">
+            <a:pPr marL="0" indent="0" algn="ctr">
               <a:buNone/>
             </a:pPr>
             <a:r>
@@ -13915,7 +13660,7 @@
           <a:bodyPr wrap="square" lIns="0" tIns="0" rIns="0" bIns="0" rtlCol="0" anchor="ctr"/>
           <a:lstStyle/>
           <a:p>
-            <a:pPr algn="l" indent="0" marL="0">
+            <a:pPr marL="0" indent="0" algn="l">
               <a:buNone/>
             </a:pPr>
             <a:r>
@@ -13954,7 +13699,7 @@
           <a:bodyPr wrap="square" lIns="0" tIns="0" rIns="0" bIns="0" rtlCol="0" anchor="t"/>
           <a:lstStyle/>
           <a:p>
-            <a:pPr algn="l" indent="0" marL="0">
+            <a:pPr marL="0" indent="0" algn="l">
               <a:lnSpc>
                 <a:spcPct val="112000"/>
               </a:lnSpc>
@@ -14001,7 +13746,7 @@
             <a:prstDash val="solid"/>
           </a:ln>
           <a:effectLst>
-            <a:outerShdw sx="100000" sy="100000" kx="0" ky="0" algn="bl" rotWithShape="0" blurRad="101600" dist="19050" dir="5400000">
+            <a:outerShdw blurRad="101600" dist="19050" dir="5400000" algn="bl" rotWithShape="0">
               <a:srgbClr val="8CA3BC">
                 <a:alpha val="22000"/>
               </a:srgbClr>
@@ -14055,7 +13800,7 @@
           <a:bodyPr wrap="square" lIns="0" tIns="0" rIns="0" bIns="0" rtlCol="0" anchor="ctr"/>
           <a:lstStyle/>
           <a:p>
-            <a:pPr algn="ctr" indent="0" marL="0">
+            <a:pPr marL="0" indent="0" algn="ctr">
               <a:buNone/>
             </a:pPr>
             <a:r>
@@ -14094,7 +13839,7 @@
           <a:bodyPr wrap="square" lIns="0" tIns="0" rIns="0" bIns="0" rtlCol="0" anchor="ctr"/>
           <a:lstStyle/>
           <a:p>
-            <a:pPr algn="l" indent="0" marL="0">
+            <a:pPr marL="0" indent="0" algn="l">
               <a:buNone/>
             </a:pPr>
             <a:r>
@@ -14133,7 +13878,7 @@
           <a:bodyPr wrap="square" lIns="0" tIns="0" rIns="0" bIns="0" rtlCol="0" anchor="t"/>
           <a:lstStyle/>
           <a:p>
-            <a:pPr algn="l" indent="0" marL="0">
+            <a:pPr marL="0" indent="0" algn="l">
               <a:lnSpc>
                 <a:spcPct val="112000"/>
               </a:lnSpc>
@@ -14180,7 +13925,7 @@
             <a:prstDash val="solid"/>
           </a:ln>
           <a:effectLst>
-            <a:outerShdw sx="100000" sy="100000" kx="0" ky="0" algn="bl" rotWithShape="0" blurRad="101600" dist="19050" dir="5400000">
+            <a:outerShdw blurRad="101600" dist="19050" dir="5400000" algn="bl" rotWithShape="0">
               <a:srgbClr val="8CA3BC">
                 <a:alpha val="22000"/>
               </a:srgbClr>
@@ -14234,7 +13979,7 @@
           <a:bodyPr wrap="square" lIns="0" tIns="0" rIns="0" bIns="0" rtlCol="0" anchor="ctr"/>
           <a:lstStyle/>
           <a:p>
-            <a:pPr algn="ctr" indent="0" marL="0">
+            <a:pPr marL="0" indent="0" algn="ctr">
               <a:buNone/>
             </a:pPr>
             <a:r>
@@ -14273,7 +14018,7 @@
           <a:bodyPr wrap="square" lIns="0" tIns="0" rIns="0" bIns="0" rtlCol="0" anchor="ctr"/>
           <a:lstStyle/>
           <a:p>
-            <a:pPr algn="l" indent="0" marL="0">
+            <a:pPr marL="0" indent="0" algn="l">
               <a:buNone/>
             </a:pPr>
             <a:r>
@@ -14312,7 +14057,7 @@
           <a:bodyPr wrap="square" lIns="0" tIns="0" rIns="0" bIns="0" rtlCol="0" anchor="t"/>
           <a:lstStyle/>
           <a:p>
-            <a:pPr algn="l" indent="0" marL="0">
+            <a:pPr marL="0" indent="0" algn="l">
               <a:lnSpc>
                 <a:spcPct val="112000"/>
               </a:lnSpc>
@@ -14354,7 +14099,7 @@
           <a:bodyPr wrap="square" lIns="0" tIns="0" rIns="0" bIns="0" rtlCol="0" anchor="ctr"/>
           <a:lstStyle/>
           <a:p>
-            <a:pPr algn="l" indent="0" marL="0">
+            <a:pPr marL="0" indent="0" algn="l">
               <a:buNone/>
             </a:pPr>
             <a:r>
@@ -14388,6 +14133,7 @@
         <a:solidFill>
           <a:srgbClr val="0E1A2B"/>
         </a:solidFill>
+        <a:effectLst/>
       </p:bgPr>
     </p:bg>
     <p:spTree>
@@ -14425,11 +14171,11 @@
           <a:bodyPr wrap="square" lIns="0" tIns="0" rIns="0" bIns="0" rtlCol="0" anchor="ctr"/>
           <a:lstStyle/>
           <a:p>
-            <a:pPr indent="0" marL="0">
-              <a:buNone/>
-            </a:pPr>
-            <a:r>
-              <a:rPr lang="en-US" sz="950" b="1" spc="200" kern="0" dirty="0">
+            <a:pPr marL="0" indent="0">
+              <a:buNone/>
+            </a:pPr>
+            <a:r>
+              <a:rPr lang="en-US" sz="950" b="1" kern="0" spc="200" dirty="0">
                 <a:solidFill>
                   <a:srgbClr val="02C39A"/>
                 </a:solidFill>
@@ -14464,7 +14210,7 @@
           <a:bodyPr wrap="square" lIns="0" tIns="0" rIns="0" bIns="0" rtlCol="0" anchor="ctr"/>
           <a:lstStyle/>
           <a:p>
-            <a:pPr algn="l" indent="0" marL="0">
+            <a:pPr marL="0" indent="0" algn="l">
               <a:buNone/>
             </a:pPr>
             <a:r>
@@ -14503,7 +14249,7 @@
           <a:bodyPr wrap="square" lIns="0" tIns="0" rIns="0" bIns="0" rtlCol="0" anchor="ctr"/>
           <a:lstStyle/>
           <a:p>
-            <a:pPr algn="l" indent="0" marL="0">
+            <a:pPr marL="0" indent="0" algn="l">
               <a:buNone/>
             </a:pPr>
             <a:r>
@@ -14569,7 +14315,7 @@
           <a:bodyPr wrap="square" lIns="0" tIns="0" rIns="0" bIns="0" rtlCol="0" anchor="ctr"/>
           <a:lstStyle/>
           <a:p>
-            <a:pPr algn="l" indent="0" marL="0">
+            <a:pPr marL="0" indent="0" algn="l">
               <a:buNone/>
             </a:pPr>
             <a:r>
@@ -14608,7 +14354,7 @@
           <a:bodyPr wrap="square" lIns="0" tIns="0" rIns="0" bIns="0" rtlCol="0" anchor="t"/>
           <a:lstStyle/>
           <a:p>
-            <a:pPr algn="l" indent="0" marL="0">
+            <a:pPr marL="0" indent="0" algn="l">
               <a:lnSpc>
                 <a:spcPct val="120000"/>
               </a:lnSpc>
@@ -14628,7 +14374,7 @@
             <a:endParaRPr lang="en-US" sz="1100" dirty="0"/>
           </a:p>
           <a:p>
-            <a:pPr algn="l" indent="0" marL="0">
+            <a:pPr marL="0" indent="0" algn="l">
               <a:lnSpc>
                 <a:spcPct val="120000"/>
               </a:lnSpc>
@@ -14648,7 +14394,7 @@
             <a:endParaRPr lang="en-US" sz="1100" dirty="0"/>
           </a:p>
           <a:p>
-            <a:pPr algn="l" indent="0" marL="0">
+            <a:pPr marL="0" indent="0" algn="l">
               <a:lnSpc>
                 <a:spcPct val="120000"/>
               </a:lnSpc>
@@ -14742,7 +14488,7 @@
           <a:bodyPr wrap="square" lIns="0" tIns="0" rIns="0" bIns="0" rtlCol="0" anchor="ctr"/>
           <a:lstStyle/>
           <a:p>
-            <a:pPr algn="l" indent="0" marL="0">
+            <a:pPr marL="0" indent="0" algn="l">
               <a:buNone/>
             </a:pPr>
             <a:r>
@@ -14781,7 +14527,7 @@
           <a:bodyPr wrap="square" lIns="0" tIns="0" rIns="0" bIns="0" rtlCol="0" anchor="t"/>
           <a:lstStyle/>
           <a:p>
-            <a:pPr algn="l" indent="0" marL="0">
+            <a:pPr marL="0" indent="0" algn="l">
               <a:lnSpc>
                 <a:spcPct val="120000"/>
               </a:lnSpc>
@@ -14801,7 +14547,7 @@
             <a:endParaRPr lang="en-US" sz="1100" dirty="0"/>
           </a:p>
           <a:p>
-            <a:pPr algn="l" indent="0" marL="0">
+            <a:pPr marL="0" indent="0" algn="l">
               <a:lnSpc>
                 <a:spcPct val="120000"/>
               </a:lnSpc>
@@ -14821,7 +14567,7 @@
             <a:endParaRPr lang="en-US" sz="1100" dirty="0"/>
           </a:p>
           <a:p>
-            <a:pPr algn="l" indent="0" marL="0">
+            <a:pPr marL="0" indent="0" algn="l">
               <a:lnSpc>
                 <a:spcPct val="120000"/>
               </a:lnSpc>
@@ -14915,7 +14661,7 @@
           <a:bodyPr wrap="square" lIns="0" tIns="0" rIns="0" bIns="0" rtlCol="0" anchor="ctr"/>
           <a:lstStyle/>
           <a:p>
-            <a:pPr algn="l" indent="0" marL="0">
+            <a:pPr marL="0" indent="0" algn="l">
               <a:buNone/>
             </a:pPr>
             <a:r>
@@ -14954,7 +14700,7 @@
           <a:bodyPr wrap="square" lIns="0" tIns="0" rIns="0" bIns="0" rtlCol="0" anchor="t"/>
           <a:lstStyle/>
           <a:p>
-            <a:pPr algn="l" indent="0" marL="0">
+            <a:pPr marL="0" indent="0" algn="l">
               <a:lnSpc>
                 <a:spcPct val="120000"/>
               </a:lnSpc>
@@ -14974,7 +14720,7 @@
             <a:endParaRPr lang="en-US" sz="1100" dirty="0"/>
           </a:p>
           <a:p>
-            <a:pPr algn="l" indent="0" marL="0">
+            <a:pPr marL="0" indent="0" algn="l">
               <a:lnSpc>
                 <a:spcPct val="120000"/>
               </a:lnSpc>
@@ -14994,7 +14740,7 @@
             <a:endParaRPr lang="en-US" sz="1100" dirty="0"/>
           </a:p>
           <a:p>
-            <a:pPr algn="l" indent="0" marL="0">
+            <a:pPr marL="0" indent="0" algn="l">
               <a:lnSpc>
                 <a:spcPct val="120000"/>
               </a:lnSpc>
@@ -15063,7 +14809,7 @@
           <a:bodyPr wrap="square" lIns="0" tIns="0" rIns="0" bIns="0" rtlCol="0" anchor="ctr"/>
           <a:lstStyle/>
           <a:p>
-            <a:pPr algn="l" indent="0" marL="0">
+            <a:pPr marL="0" indent="0" algn="l">
               <a:buNone/>
             </a:pPr>
             <a:r>
@@ -15102,7 +14848,7 @@
           <a:bodyPr wrap="square" lIns="0" tIns="0" rIns="0" bIns="0" rtlCol="0" anchor="t"/>
           <a:lstStyle/>
           <a:p>
-            <a:pPr algn="l" indent="0" marL="0">
+            <a:pPr marL="0" indent="0" algn="l">
               <a:lnSpc>
                 <a:spcPct val="120000"/>
               </a:lnSpc>
@@ -15122,7 +14868,7 @@
             <a:endParaRPr lang="en-US" sz="1100" dirty="0"/>
           </a:p>
           <a:p>
-            <a:pPr algn="l" indent="0" marL="0">
+            <a:pPr marL="0" indent="0" algn="l">
               <a:lnSpc>
                 <a:spcPct val="120000"/>
               </a:lnSpc>
@@ -15191,7 +14937,7 @@
           <a:bodyPr wrap="square" lIns="0" tIns="0" rIns="0" bIns="0" rtlCol="0" anchor="ctr"/>
           <a:lstStyle/>
           <a:p>
-            <a:pPr algn="l" indent="0" marL="0">
+            <a:pPr marL="0" indent="0" algn="l">
               <a:buNone/>
             </a:pPr>
             <a:r>
@@ -15230,7 +14976,7 @@
           <a:bodyPr wrap="square" lIns="0" tIns="0" rIns="0" bIns="0" rtlCol="0" anchor="t"/>
           <a:lstStyle/>
           <a:p>
-            <a:pPr algn="l" indent="0" marL="0">
+            <a:pPr marL="0" indent="0" algn="l">
               <a:lnSpc>
                 <a:spcPct val="120000"/>
               </a:lnSpc>
@@ -15250,7 +14996,7 @@
             <a:endParaRPr lang="en-US" sz="1100" dirty="0"/>
           </a:p>
           <a:p>
-            <a:pPr algn="l" indent="0" marL="0">
+            <a:pPr marL="0" indent="0" algn="l">
               <a:lnSpc>
                 <a:spcPct val="120000"/>
               </a:lnSpc>
@@ -15292,7 +15038,7 @@
           <a:bodyPr wrap="square" lIns="0" tIns="0" rIns="0" bIns="0" rtlCol="0" anchor="ctr"/>
           <a:lstStyle/>
           <a:p>
-            <a:pPr algn="l" indent="0" marL="0">
+            <a:pPr marL="0" indent="0" algn="l">
               <a:buNone/>
             </a:pPr>
             <a:r>
@@ -15326,6 +15072,7 @@
         <a:solidFill>
           <a:srgbClr val="F4F7FA"/>
         </a:solidFill>
+        <a:effectLst/>
       </p:bgPr>
     </p:bg>
     <p:spTree>
@@ -15363,11 +15110,11 @@
           <a:bodyPr wrap="square" lIns="0" tIns="0" rIns="0" bIns="0" rtlCol="0" anchor="ctr"/>
           <a:lstStyle/>
           <a:p>
-            <a:pPr indent="0" marL="0">
-              <a:buNone/>
-            </a:pPr>
-            <a:r>
-              <a:rPr lang="en-US" sz="950" b="1" spc="200" kern="0" dirty="0">
+            <a:pPr marL="0" indent="0">
+              <a:buNone/>
+            </a:pPr>
+            <a:r>
+              <a:rPr lang="en-US" sz="950" b="1" kern="0" spc="200" dirty="0">
                 <a:solidFill>
                   <a:srgbClr val="2E86AB"/>
                 </a:solidFill>
@@ -15402,7 +15149,7 @@
           <a:bodyPr wrap="square" lIns="0" tIns="0" rIns="0" bIns="0" rtlCol="0" anchor="ctr"/>
           <a:lstStyle/>
           <a:p>
-            <a:pPr algn="l" indent="0" marL="0">
+            <a:pPr marL="0" indent="0" algn="l">
               <a:buNone/>
             </a:pPr>
             <a:r>
@@ -15441,7 +15188,7 @@
           <a:bodyPr wrap="square" lIns="0" tIns="0" rIns="0" bIns="0" rtlCol="0" anchor="ctr"/>
           <a:lstStyle/>
           <a:p>
-            <a:pPr algn="l" indent="0" marL="0">
+            <a:pPr marL="0" indent="0" algn="l">
               <a:buNone/>
             </a:pPr>
             <a:r>
@@ -15505,7 +15252,7 @@
           <a:bodyPr wrap="square" lIns="0" tIns="0" rIns="0" bIns="0" rtlCol="0" anchor="ctr"/>
           <a:lstStyle/>
           <a:p>
-            <a:pPr algn="ctr" indent="0" marL="0">
+            <a:pPr marL="0" indent="0" algn="ctr">
               <a:buNone/>
             </a:pPr>
             <a:r>
@@ -15544,7 +15291,7 @@
           <a:bodyPr wrap="square" lIns="0" tIns="0" rIns="0" bIns="0" rtlCol="0" anchor="ctr"/>
           <a:lstStyle/>
           <a:p>
-            <a:pPr algn="l" indent="0" marL="0">
+            <a:pPr marL="0" indent="0" algn="l">
               <a:buNone/>
             </a:pPr>
             <a:r>
@@ -15583,7 +15330,7 @@
           <a:bodyPr wrap="square" lIns="0" tIns="0" rIns="0" bIns="0" rtlCol="0" anchor="t"/>
           <a:lstStyle/>
           <a:p>
-            <a:pPr algn="l" indent="0" marL="0">
+            <a:pPr marL="0" indent="0" algn="l">
               <a:lnSpc>
                 <a:spcPct val="112000"/>
               </a:lnSpc>
@@ -15650,7 +15397,7 @@
           <a:bodyPr wrap="square" lIns="0" tIns="0" rIns="0" bIns="0" rtlCol="0" anchor="ctr"/>
           <a:lstStyle/>
           <a:p>
-            <a:pPr algn="ctr" indent="0" marL="0">
+            <a:pPr marL="0" indent="0" algn="ctr">
               <a:buNone/>
             </a:pPr>
             <a:r>
@@ -15689,7 +15436,7 @@
           <a:bodyPr wrap="square" lIns="0" tIns="0" rIns="0" bIns="0" rtlCol="0" anchor="ctr"/>
           <a:lstStyle/>
           <a:p>
-            <a:pPr algn="l" indent="0" marL="0">
+            <a:pPr marL="0" indent="0" algn="l">
               <a:buNone/>
             </a:pPr>
             <a:r>
@@ -15728,7 +15475,7 @@
           <a:bodyPr wrap="square" lIns="0" tIns="0" rIns="0" bIns="0" rtlCol="0" anchor="t"/>
           <a:lstStyle/>
           <a:p>
-            <a:pPr algn="l" indent="0" marL="0">
+            <a:pPr marL="0" indent="0" algn="l">
               <a:lnSpc>
                 <a:spcPct val="112000"/>
               </a:lnSpc>
@@ -15795,7 +15542,7 @@
           <a:bodyPr wrap="square" lIns="0" tIns="0" rIns="0" bIns="0" rtlCol="0" anchor="ctr"/>
           <a:lstStyle/>
           <a:p>
-            <a:pPr algn="ctr" indent="0" marL="0">
+            <a:pPr marL="0" indent="0" algn="ctr">
               <a:buNone/>
             </a:pPr>
             <a:r>
@@ -15834,7 +15581,7 @@
           <a:bodyPr wrap="square" lIns="0" tIns="0" rIns="0" bIns="0" rtlCol="0" anchor="ctr"/>
           <a:lstStyle/>
           <a:p>
-            <a:pPr algn="l" indent="0" marL="0">
+            <a:pPr marL="0" indent="0" algn="l">
               <a:buNone/>
             </a:pPr>
             <a:r>
@@ -15873,7 +15620,7 @@
           <a:bodyPr wrap="square" lIns="0" tIns="0" rIns="0" bIns="0" rtlCol="0" anchor="t"/>
           <a:lstStyle/>
           <a:p>
-            <a:pPr algn="l" indent="0" marL="0">
+            <a:pPr marL="0" indent="0" algn="l">
               <a:lnSpc>
                 <a:spcPct val="112000"/>
               </a:lnSpc>
@@ -15940,7 +15687,7 @@
           <a:bodyPr wrap="square" lIns="0" tIns="0" rIns="0" bIns="0" rtlCol="0" anchor="ctr"/>
           <a:lstStyle/>
           <a:p>
-            <a:pPr algn="ctr" indent="0" marL="0">
+            <a:pPr marL="0" indent="0" algn="ctr">
               <a:buNone/>
             </a:pPr>
             <a:r>
@@ -15979,7 +15726,7 @@
           <a:bodyPr wrap="square" lIns="0" tIns="0" rIns="0" bIns="0" rtlCol="0" anchor="ctr"/>
           <a:lstStyle/>
           <a:p>
-            <a:pPr algn="l" indent="0" marL="0">
+            <a:pPr marL="0" indent="0" algn="l">
               <a:buNone/>
             </a:pPr>
             <a:r>
@@ -16018,7 +15765,7 @@
           <a:bodyPr wrap="square" lIns="0" tIns="0" rIns="0" bIns="0" rtlCol="0" anchor="t"/>
           <a:lstStyle/>
           <a:p>
-            <a:pPr algn="l" indent="0" marL="0">
+            <a:pPr marL="0" indent="0" algn="l">
               <a:lnSpc>
                 <a:spcPct val="112000"/>
               </a:lnSpc>
@@ -16085,7 +15832,7 @@
           <a:bodyPr wrap="square" lIns="0" tIns="0" rIns="0" bIns="0" rtlCol="0" anchor="ctr"/>
           <a:lstStyle/>
           <a:p>
-            <a:pPr algn="ctr" indent="0" marL="0">
+            <a:pPr marL="0" indent="0" algn="ctr">
               <a:buNone/>
             </a:pPr>
             <a:r>
@@ -16124,7 +15871,7 @@
           <a:bodyPr wrap="square" lIns="0" tIns="0" rIns="0" bIns="0" rtlCol="0" anchor="ctr"/>
           <a:lstStyle/>
           <a:p>
-            <a:pPr algn="l" indent="0" marL="0">
+            <a:pPr marL="0" indent="0" algn="l">
               <a:buNone/>
             </a:pPr>
             <a:r>
@@ -16163,7 +15910,7 @@
           <a:bodyPr wrap="square" lIns="0" tIns="0" rIns="0" bIns="0" rtlCol="0" anchor="t"/>
           <a:lstStyle/>
           <a:p>
-            <a:pPr algn="l" indent="0" marL="0">
+            <a:pPr marL="0" indent="0" algn="l">
               <a:lnSpc>
                 <a:spcPct val="112000"/>
               </a:lnSpc>
@@ -16205,7 +15952,7 @@
           <a:bodyPr wrap="square" lIns="0" tIns="0" rIns="0" bIns="0" rtlCol="0" anchor="ctr"/>
           <a:lstStyle/>
           <a:p>
-            <a:pPr algn="l" indent="0" marL="0">
+            <a:pPr marL="0" indent="0" algn="l">
               <a:buNone/>
             </a:pPr>
             <a:r>
@@ -16239,6 +15986,7 @@
         <a:solidFill>
           <a:srgbClr val="F4F7FA"/>
         </a:solidFill>
+        <a:effectLst/>
       </p:bgPr>
     </p:bg>
     <p:spTree>
@@ -16276,11 +16024,11 @@
           <a:bodyPr wrap="square" lIns="0" tIns="0" rIns="0" bIns="0" rtlCol="0" anchor="ctr"/>
           <a:lstStyle/>
           <a:p>
-            <a:pPr indent="0" marL="0">
-              <a:buNone/>
-            </a:pPr>
-            <a:r>
-              <a:rPr lang="en-US" sz="950" b="1" spc="200" kern="0" dirty="0">
+            <a:pPr marL="0" indent="0">
+              <a:buNone/>
+            </a:pPr>
+            <a:r>
+              <a:rPr lang="en-US" sz="950" b="1" kern="0" spc="200" dirty="0">
                 <a:solidFill>
                   <a:srgbClr val="2E86AB"/>
                 </a:solidFill>
@@ -16315,7 +16063,7 @@
           <a:bodyPr wrap="square" lIns="0" tIns="0" rIns="0" bIns="0" rtlCol="0" anchor="ctr"/>
           <a:lstStyle/>
           <a:p>
-            <a:pPr algn="l" indent="0" marL="0">
+            <a:pPr marL="0" indent="0" algn="l">
               <a:buNone/>
             </a:pPr>
             <a:r>
@@ -16354,7 +16102,7 @@
           <a:bodyPr wrap="square" lIns="0" tIns="0" rIns="0" bIns="0" rtlCol="0" anchor="ctr"/>
           <a:lstStyle/>
           <a:p>
-            <a:pPr algn="l" indent="0" marL="0">
+            <a:pPr marL="0" indent="0" algn="l">
               <a:buNone/>
             </a:pPr>
             <a:r>
@@ -16398,7 +16146,7 @@
             <a:prstDash val="solid"/>
           </a:ln>
           <a:effectLst>
-            <a:outerShdw sx="100000" sy="100000" kx="0" ky="0" algn="bl" rotWithShape="0" blurRad="101600" dist="19050" dir="5400000">
+            <a:outerShdw blurRad="101600" dist="19050" dir="5400000" algn="bl" rotWithShape="0">
               <a:srgbClr val="8CA3BC">
                 <a:alpha val="22000"/>
               </a:srgbClr>
@@ -16452,7 +16200,7 @@
           <a:bodyPr wrap="square" lIns="0" tIns="0" rIns="0" bIns="0" rtlCol="0" anchor="t"/>
           <a:lstStyle/>
           <a:p>
-            <a:pPr algn="l" indent="0" marL="0">
+            <a:pPr marL="0" indent="0" algn="l">
               <a:lnSpc>
                 <a:spcPct val="105000"/>
               </a:lnSpc>
@@ -16472,7 +16220,7 @@
             <a:endParaRPr lang="en-US" sz="1150" dirty="0"/>
           </a:p>
           <a:p>
-            <a:pPr algn="l" indent="0" marL="0">
+            <a:pPr marL="0" indent="0" algn="l">
               <a:lnSpc>
                 <a:spcPct val="105000"/>
               </a:lnSpc>
@@ -16514,7 +16262,7 @@
           <a:bodyPr wrap="square" lIns="0" tIns="0" rIns="0" bIns="0" rtlCol="0" anchor="t"/>
           <a:lstStyle/>
           <a:p>
-            <a:pPr algn="l" indent="0" marL="0">
+            <a:pPr marL="0" indent="0" algn="l">
               <a:lnSpc>
                 <a:spcPct val="112000"/>
               </a:lnSpc>
@@ -16556,7 +16304,7 @@
           <a:bodyPr wrap="square" lIns="0" tIns="0" rIns="0" bIns="0" rtlCol="0" anchor="t"/>
           <a:lstStyle/>
           <a:p>
-            <a:pPr algn="l" indent="0" marL="0">
+            <a:pPr marL="0" indent="0" algn="l">
               <a:lnSpc>
                 <a:spcPct val="112000"/>
               </a:lnSpc>
@@ -16603,7 +16351,7 @@
             <a:prstDash val="solid"/>
           </a:ln>
           <a:effectLst>
-            <a:outerShdw sx="100000" sy="100000" kx="0" ky="0" algn="bl" rotWithShape="0" blurRad="101600" dist="19050" dir="5400000">
+            <a:outerShdw blurRad="101600" dist="19050" dir="5400000" algn="bl" rotWithShape="0">
               <a:srgbClr val="8CA3BC">
                 <a:alpha val="22000"/>
               </a:srgbClr>
@@ -16657,7 +16405,7 @@
           <a:bodyPr wrap="square" lIns="0" tIns="0" rIns="0" bIns="0" rtlCol="0" anchor="t"/>
           <a:lstStyle/>
           <a:p>
-            <a:pPr algn="l" indent="0" marL="0">
+            <a:pPr marL="0" indent="0" algn="l">
               <a:lnSpc>
                 <a:spcPct val="105000"/>
               </a:lnSpc>
@@ -16677,7 +16425,7 @@
             <a:endParaRPr lang="en-US" sz="1150" dirty="0"/>
           </a:p>
           <a:p>
-            <a:pPr algn="l" indent="0" marL="0">
+            <a:pPr marL="0" indent="0" algn="l">
               <a:lnSpc>
                 <a:spcPct val="105000"/>
               </a:lnSpc>
@@ -16719,7 +16467,7 @@
           <a:bodyPr wrap="square" lIns="0" tIns="0" rIns="0" bIns="0" rtlCol="0" anchor="t"/>
           <a:lstStyle/>
           <a:p>
-            <a:pPr algn="l" indent="0" marL="0">
+            <a:pPr marL="0" indent="0" algn="l">
               <a:lnSpc>
                 <a:spcPct val="112000"/>
               </a:lnSpc>
@@ -16761,7 +16509,7 @@
           <a:bodyPr wrap="square" lIns="0" tIns="0" rIns="0" bIns="0" rtlCol="0" anchor="t"/>
           <a:lstStyle/>
           <a:p>
-            <a:pPr algn="l" indent="0" marL="0">
+            <a:pPr marL="0" indent="0" algn="l">
               <a:lnSpc>
                 <a:spcPct val="112000"/>
               </a:lnSpc>
@@ -16808,7 +16556,7 @@
             <a:prstDash val="solid"/>
           </a:ln>
           <a:effectLst>
-            <a:outerShdw sx="100000" sy="100000" kx="0" ky="0" algn="bl" rotWithShape="0" blurRad="101600" dist="19050" dir="5400000">
+            <a:outerShdw blurRad="101600" dist="19050" dir="5400000" algn="bl" rotWithShape="0">
               <a:srgbClr val="8CA3BC">
                 <a:alpha val="22000"/>
               </a:srgbClr>
@@ -16862,7 +16610,7 @@
           <a:bodyPr wrap="square" lIns="0" tIns="0" rIns="0" bIns="0" rtlCol="0" anchor="t"/>
           <a:lstStyle/>
           <a:p>
-            <a:pPr algn="l" indent="0" marL="0">
+            <a:pPr marL="0" indent="0" algn="l">
               <a:lnSpc>
                 <a:spcPct val="105000"/>
               </a:lnSpc>
@@ -16882,7 +16630,7 @@
             <a:endParaRPr lang="en-US" sz="1150" dirty="0"/>
           </a:p>
           <a:p>
-            <a:pPr algn="l" indent="0" marL="0">
+            <a:pPr marL="0" indent="0" algn="l">
               <a:lnSpc>
                 <a:spcPct val="105000"/>
               </a:lnSpc>
@@ -16924,7 +16672,7 @@
           <a:bodyPr wrap="square" lIns="0" tIns="0" rIns="0" bIns="0" rtlCol="0" anchor="t"/>
           <a:lstStyle/>
           <a:p>
-            <a:pPr algn="l" indent="0" marL="0">
+            <a:pPr marL="0" indent="0" algn="l">
               <a:lnSpc>
                 <a:spcPct val="112000"/>
               </a:lnSpc>
@@ -16966,7 +16714,7 @@
           <a:bodyPr wrap="square" lIns="0" tIns="0" rIns="0" bIns="0" rtlCol="0" anchor="t"/>
           <a:lstStyle/>
           <a:p>
-            <a:pPr algn="l" indent="0" marL="0">
+            <a:pPr marL="0" indent="0" algn="l">
               <a:lnSpc>
                 <a:spcPct val="112000"/>
               </a:lnSpc>
@@ -17013,7 +16761,7 @@
             <a:prstDash val="solid"/>
           </a:ln>
           <a:effectLst>
-            <a:outerShdw sx="100000" sy="100000" kx="0" ky="0" algn="bl" rotWithShape="0" blurRad="101600" dist="19050" dir="5400000">
+            <a:outerShdw blurRad="101600" dist="19050" dir="5400000" algn="bl" rotWithShape="0">
               <a:srgbClr val="8CA3BC">
                 <a:alpha val="22000"/>
               </a:srgbClr>
@@ -17067,7 +16815,7 @@
           <a:bodyPr wrap="square" lIns="0" tIns="0" rIns="0" bIns="0" rtlCol="0" anchor="t"/>
           <a:lstStyle/>
           <a:p>
-            <a:pPr algn="l" indent="0" marL="0">
+            <a:pPr marL="0" indent="0" algn="l">
               <a:lnSpc>
                 <a:spcPct val="105000"/>
               </a:lnSpc>
@@ -17087,7 +16835,7 @@
             <a:endParaRPr lang="en-US" sz="1150" dirty="0"/>
           </a:p>
           <a:p>
-            <a:pPr algn="l" indent="0" marL="0">
+            <a:pPr marL="0" indent="0" algn="l">
               <a:lnSpc>
                 <a:spcPct val="105000"/>
               </a:lnSpc>
@@ -17129,7 +16877,7 @@
           <a:bodyPr wrap="square" lIns="0" tIns="0" rIns="0" bIns="0" rtlCol="0" anchor="t"/>
           <a:lstStyle/>
           <a:p>
-            <a:pPr algn="l" indent="0" marL="0">
+            <a:pPr marL="0" indent="0" algn="l">
               <a:lnSpc>
                 <a:spcPct val="112000"/>
               </a:lnSpc>
@@ -17171,7 +16919,7 @@
           <a:bodyPr wrap="square" lIns="0" tIns="0" rIns="0" bIns="0" rtlCol="0" anchor="t"/>
           <a:lstStyle/>
           <a:p>
-            <a:pPr algn="l" indent="0" marL="0">
+            <a:pPr marL="0" indent="0" algn="l">
               <a:lnSpc>
                 <a:spcPct val="112000"/>
               </a:lnSpc>
@@ -17218,7 +16966,7 @@
             <a:prstDash val="solid"/>
           </a:ln>
           <a:effectLst>
-            <a:outerShdw sx="100000" sy="100000" kx="0" ky="0" algn="bl" rotWithShape="0" blurRad="101600" dist="19050" dir="5400000">
+            <a:outerShdw blurRad="101600" dist="19050" dir="5400000" algn="bl" rotWithShape="0">
               <a:srgbClr val="8CA3BC">
                 <a:alpha val="22000"/>
               </a:srgbClr>
@@ -17272,7 +17020,7 @@
           <a:bodyPr wrap="square" lIns="0" tIns="0" rIns="0" bIns="0" rtlCol="0" anchor="t"/>
           <a:lstStyle/>
           <a:p>
-            <a:pPr algn="l" indent="0" marL="0">
+            <a:pPr marL="0" indent="0" algn="l">
               <a:lnSpc>
                 <a:spcPct val="105000"/>
               </a:lnSpc>
@@ -17292,7 +17040,7 @@
             <a:endParaRPr lang="en-US" sz="1150" dirty="0"/>
           </a:p>
           <a:p>
-            <a:pPr algn="l" indent="0" marL="0">
+            <a:pPr marL="0" indent="0" algn="l">
               <a:lnSpc>
                 <a:spcPct val="105000"/>
               </a:lnSpc>
@@ -17334,7 +17082,7 @@
           <a:bodyPr wrap="square" lIns="0" tIns="0" rIns="0" bIns="0" rtlCol="0" anchor="t"/>
           <a:lstStyle/>
           <a:p>
-            <a:pPr algn="l" indent="0" marL="0">
+            <a:pPr marL="0" indent="0" algn="l">
               <a:lnSpc>
                 <a:spcPct val="112000"/>
               </a:lnSpc>
@@ -17376,7 +17124,7 @@
           <a:bodyPr wrap="square" lIns="0" tIns="0" rIns="0" bIns="0" rtlCol="0" anchor="t"/>
           <a:lstStyle/>
           <a:p>
-            <a:pPr algn="l" indent="0" marL="0">
+            <a:pPr marL="0" indent="0" algn="l">
               <a:lnSpc>
                 <a:spcPct val="112000"/>
               </a:lnSpc>
@@ -17418,11 +17166,11 @@
           <a:bodyPr wrap="square" lIns="0" tIns="0" rIns="0" bIns="0" rtlCol="0" anchor="ctr"/>
           <a:lstStyle/>
           <a:p>
-            <a:pPr indent="0" marL="0">
-              <a:buNone/>
-            </a:pPr>
-            <a:r>
-              <a:rPr lang="en-US" sz="900" b="1" spc="150" kern="0" dirty="0">
+            <a:pPr marL="0" indent="0">
+              <a:buNone/>
+            </a:pPr>
+            <a:r>
+              <a:rPr lang="en-US" sz="900" b="1" kern="0" spc="150" dirty="0">
                 <a:solidFill>
                   <a:srgbClr val="3FA372"/>
                 </a:solidFill>
@@ -17457,11 +17205,11 @@
           <a:bodyPr wrap="square" lIns="0" tIns="0" rIns="0" bIns="0" rtlCol="0" anchor="ctr"/>
           <a:lstStyle/>
           <a:p>
-            <a:pPr indent="0" marL="0">
-              <a:buNone/>
-            </a:pPr>
-            <a:r>
-              <a:rPr lang="en-US" sz="900" b="1" spc="150" kern="0" dirty="0">
+            <a:pPr marL="0" indent="0">
+              <a:buNone/>
+            </a:pPr>
+            <a:r>
+              <a:rPr lang="en-US" sz="900" b="1" kern="0" spc="150" dirty="0">
                 <a:solidFill>
                   <a:srgbClr val="5A6E85"/>
                 </a:solidFill>
@@ -17491,6 +17239,7 @@
         <a:solidFill>
           <a:srgbClr val="0E1A2B"/>
         </a:solidFill>
+        <a:effectLst/>
       </p:bgPr>
     </p:bg>
     <p:spTree>
@@ -17528,11 +17277,11 @@
           <a:bodyPr wrap="square" lIns="0" tIns="0" rIns="0" bIns="0" rtlCol="0" anchor="ctr"/>
           <a:lstStyle/>
           <a:p>
-            <a:pPr indent="0" marL="0">
-              <a:buNone/>
-            </a:pPr>
-            <a:r>
-              <a:rPr lang="en-US" sz="950" b="1" spc="200" kern="0" dirty="0">
+            <a:pPr marL="0" indent="0">
+              <a:buNone/>
+            </a:pPr>
+            <a:r>
+              <a:rPr lang="en-US" sz="950" b="1" kern="0" spc="200" dirty="0">
                 <a:solidFill>
                   <a:srgbClr val="02C39A"/>
                 </a:solidFill>
@@ -17567,7 +17316,7 @@
           <a:bodyPr wrap="square" lIns="0" tIns="0" rIns="0" bIns="0" rtlCol="0" anchor="ctr"/>
           <a:lstStyle/>
           <a:p>
-            <a:pPr algn="l" indent="0" marL="0">
+            <a:pPr marL="0" indent="0" algn="l">
               <a:buNone/>
             </a:pPr>
             <a:r>
@@ -17606,7 +17355,7 @@
           <a:bodyPr wrap="square" lIns="0" tIns="0" rIns="0" bIns="0" rtlCol="0" anchor="ctr"/>
           <a:lstStyle/>
           <a:p>
-            <a:pPr algn="l" indent="0" marL="0">
+            <a:pPr marL="0" indent="0" algn="l">
               <a:buNone/>
             </a:pPr>
             <a:r>
@@ -17672,11 +17421,11 @@
           <a:bodyPr wrap="square" lIns="0" tIns="0" rIns="0" bIns="0" rtlCol="0" anchor="ctr"/>
           <a:lstStyle/>
           <a:p>
-            <a:pPr indent="0" marL="0">
-              <a:buNone/>
-            </a:pPr>
-            <a:r>
-              <a:rPr lang="en-US" sz="950" b="1" spc="150" kern="0" dirty="0">
+            <a:pPr marL="0" indent="0">
+              <a:buNone/>
+            </a:pPr>
+            <a:r>
+              <a:rPr lang="en-US" sz="950" b="1" kern="0" spc="150" dirty="0">
                 <a:solidFill>
                   <a:srgbClr val="D9544D"/>
                 </a:solidFill>
@@ -17711,7 +17460,7 @@
           <a:bodyPr wrap="square" lIns="0" tIns="0" rIns="0" bIns="0" rtlCol="0" anchor="t"/>
           <a:lstStyle/>
           <a:p>
-            <a:pPr algn="l" indent="0" marL="0">
+            <a:pPr marL="0" indent="0" algn="l">
               <a:lnSpc>
                 <a:spcPct val="120000"/>
               </a:lnSpc>
@@ -17731,7 +17480,7 @@
             <a:endParaRPr lang="en-US" sz="1150" dirty="0"/>
           </a:p>
           <a:p>
-            <a:pPr algn="l" indent="0" marL="0">
+            <a:pPr marL="0" indent="0" algn="l">
               <a:lnSpc>
                 <a:spcPct val="120000"/>
               </a:lnSpc>
@@ -17751,7 +17500,7 @@
             <a:endParaRPr lang="en-US" sz="1150" dirty="0"/>
           </a:p>
           <a:p>
-            <a:pPr algn="l" indent="0" marL="0">
+            <a:pPr marL="0" indent="0" algn="l">
               <a:lnSpc>
                 <a:spcPct val="120000"/>
               </a:lnSpc>
@@ -17760,7 +17509,7 @@
             <a:endParaRPr lang="en-US" sz="1150" dirty="0"/>
           </a:p>
           <a:p>
-            <a:pPr algn="l" indent="0" marL="0">
+            <a:pPr marL="0" indent="0" algn="l">
               <a:lnSpc>
                 <a:spcPct val="120000"/>
               </a:lnSpc>
@@ -17780,7 +17529,7 @@
             <a:endParaRPr lang="en-US" sz="1150" dirty="0"/>
           </a:p>
           <a:p>
-            <a:pPr algn="l" indent="0" marL="0">
+            <a:pPr marL="0" indent="0" algn="l">
               <a:lnSpc>
                 <a:spcPct val="120000"/>
               </a:lnSpc>
@@ -17822,7 +17571,7 @@
           <a:bodyPr wrap="square" lIns="0" tIns="0" rIns="0" bIns="0" rtlCol="0" anchor="ctr"/>
           <a:lstStyle/>
           <a:p>
-            <a:pPr indent="0" marL="0">
+            <a:pPr marL="0" indent="0">
               <a:buNone/>
             </a:pPr>
             <a:r>
@@ -17888,11 +17637,11 @@
           <a:bodyPr wrap="square" lIns="0" tIns="0" rIns="0" bIns="0" rtlCol="0" anchor="ctr"/>
           <a:lstStyle/>
           <a:p>
-            <a:pPr indent="0" marL="0">
-              <a:buNone/>
-            </a:pPr>
-            <a:r>
-              <a:rPr lang="en-US" sz="950" b="1" spc="150" kern="0" dirty="0">
+            <a:pPr marL="0" indent="0">
+              <a:buNone/>
+            </a:pPr>
+            <a:r>
+              <a:rPr lang="en-US" sz="950" b="1" kern="0" spc="150" dirty="0">
                 <a:solidFill>
                   <a:srgbClr val="02C39A"/>
                 </a:solidFill>
@@ -17927,7 +17676,7 @@
           <a:bodyPr wrap="square" lIns="0" tIns="0" rIns="0" bIns="0" rtlCol="0" anchor="t"/>
           <a:lstStyle/>
           <a:p>
-            <a:pPr algn="l" indent="0" marL="0">
+            <a:pPr marL="0" indent="0" algn="l">
               <a:lnSpc>
                 <a:spcPct val="120000"/>
               </a:lnSpc>
@@ -17947,7 +17696,7 @@
             <a:endParaRPr lang="en-US" sz="1150" dirty="0"/>
           </a:p>
           <a:p>
-            <a:pPr algn="l" indent="0" marL="0">
+            <a:pPr marL="0" indent="0" algn="l">
               <a:lnSpc>
                 <a:spcPct val="120000"/>
               </a:lnSpc>
@@ -17967,7 +17716,7 @@
             <a:endParaRPr lang="en-US" sz="1150" dirty="0"/>
           </a:p>
           <a:p>
-            <a:pPr algn="l" indent="0" marL="0">
+            <a:pPr marL="0" indent="0" algn="l">
               <a:lnSpc>
                 <a:spcPct val="120000"/>
               </a:lnSpc>
@@ -17976,7 +17725,7 @@
             <a:endParaRPr lang="en-US" sz="1150" dirty="0"/>
           </a:p>
           <a:p>
-            <a:pPr algn="l" indent="0" marL="0">
+            <a:pPr marL="0" indent="0" algn="l">
               <a:lnSpc>
                 <a:spcPct val="120000"/>
               </a:lnSpc>
@@ -17996,7 +17745,7 @@
             <a:endParaRPr lang="en-US" sz="1150" dirty="0"/>
           </a:p>
           <a:p>
-            <a:pPr algn="l" indent="0" marL="0">
+            <a:pPr marL="0" indent="0" algn="l">
               <a:lnSpc>
                 <a:spcPct val="120000"/>
               </a:lnSpc>
@@ -18038,7 +17787,7 @@
           <a:bodyPr wrap="square" lIns="0" tIns="0" rIns="0" bIns="0" rtlCol="0" anchor="ctr"/>
           <a:lstStyle/>
           <a:p>
-            <a:pPr indent="0" marL="0">
+            <a:pPr marL="0" indent="0">
               <a:buNone/>
             </a:pPr>
             <a:r>
@@ -18077,7 +17826,7 @@
           <a:bodyPr wrap="square" lIns="0" tIns="0" rIns="0" bIns="0" rtlCol="0" anchor="ctr"/>
           <a:lstStyle/>
           <a:p>
-            <a:pPr algn="l" indent="0" marL="0">
+            <a:pPr marL="0" indent="0" algn="l">
               <a:buNone/>
             </a:pPr>
             <a:r>
@@ -18141,7 +17890,7 @@
           <a:bodyPr wrap="square" lIns="0" tIns="0" rIns="0" bIns="0" rtlCol="0" anchor="ctr"/>
           <a:lstStyle/>
           <a:p>
-            <a:pPr algn="ctr" indent="0" marL="0">
+            <a:pPr marL="0" indent="0" algn="ctr">
               <a:buNone/>
             </a:pPr>
             <a:r>
@@ -18180,7 +17929,7 @@
           <a:bodyPr wrap="square" lIns="0" tIns="0" rIns="0" bIns="0" rtlCol="0" anchor="t"/>
           <a:lstStyle/>
           <a:p>
-            <a:pPr algn="l" indent="0" marL="0">
+            <a:pPr marL="0" indent="0" algn="l">
               <a:lnSpc>
                 <a:spcPct val="112000"/>
               </a:lnSpc>
@@ -18222,7 +17971,7 @@
           <a:bodyPr wrap="square" lIns="0" tIns="0" rIns="0" bIns="0" rtlCol="0" anchor="t"/>
           <a:lstStyle/>
           <a:p>
-            <a:pPr algn="l" indent="0" marL="0">
+            <a:pPr marL="0" indent="0" algn="l">
               <a:lnSpc>
                 <a:spcPct val="112000"/>
               </a:lnSpc>
@@ -18289,7 +18038,7 @@
           <a:bodyPr wrap="square" lIns="0" tIns="0" rIns="0" bIns="0" rtlCol="0" anchor="ctr"/>
           <a:lstStyle/>
           <a:p>
-            <a:pPr algn="ctr" indent="0" marL="0">
+            <a:pPr marL="0" indent="0" algn="ctr">
               <a:buNone/>
             </a:pPr>
             <a:r>
@@ -18328,7 +18077,7 @@
           <a:bodyPr wrap="square" lIns="0" tIns="0" rIns="0" bIns="0" rtlCol="0" anchor="t"/>
           <a:lstStyle/>
           <a:p>
-            <a:pPr algn="l" indent="0" marL="0">
+            <a:pPr marL="0" indent="0" algn="l">
               <a:lnSpc>
                 <a:spcPct val="112000"/>
               </a:lnSpc>
@@ -18370,7 +18119,7 @@
           <a:bodyPr wrap="square" lIns="0" tIns="0" rIns="0" bIns="0" rtlCol="0" anchor="t"/>
           <a:lstStyle/>
           <a:p>
-            <a:pPr algn="l" indent="0" marL="0">
+            <a:pPr marL="0" indent="0" algn="l">
               <a:lnSpc>
                 <a:spcPct val="112000"/>
               </a:lnSpc>
@@ -18437,7 +18186,7 @@
           <a:bodyPr wrap="square" lIns="0" tIns="0" rIns="0" bIns="0" rtlCol="0" anchor="ctr"/>
           <a:lstStyle/>
           <a:p>
-            <a:pPr algn="ctr" indent="0" marL="0">
+            <a:pPr marL="0" indent="0" algn="ctr">
               <a:buNone/>
             </a:pPr>
             <a:r>
@@ -18476,7 +18225,7 @@
           <a:bodyPr wrap="square" lIns="0" tIns="0" rIns="0" bIns="0" rtlCol="0" anchor="t"/>
           <a:lstStyle/>
           <a:p>
-            <a:pPr algn="l" indent="0" marL="0">
+            <a:pPr marL="0" indent="0" algn="l">
               <a:lnSpc>
                 <a:spcPct val="112000"/>
               </a:lnSpc>
@@ -18518,7 +18267,7 @@
           <a:bodyPr wrap="square" lIns="0" tIns="0" rIns="0" bIns="0" rtlCol="0" anchor="t"/>
           <a:lstStyle/>
           <a:p>
-            <a:pPr algn="l" indent="0" marL="0">
+            <a:pPr marL="0" indent="0" algn="l">
               <a:lnSpc>
                 <a:spcPct val="112000"/>
               </a:lnSpc>
@@ -18555,6 +18304,7 @@
         <a:solidFill>
           <a:srgbClr val="F4F7FA"/>
         </a:solidFill>
+        <a:effectLst/>
       </p:bgPr>
     </p:bg>
     <p:spTree>
@@ -18592,11 +18342,11 @@
           <a:bodyPr wrap="square" lIns="0" tIns="0" rIns="0" bIns="0" rtlCol="0" anchor="ctr"/>
           <a:lstStyle/>
           <a:p>
-            <a:pPr indent="0" marL="0">
-              <a:buNone/>
-            </a:pPr>
-            <a:r>
-              <a:rPr lang="en-US" sz="950" b="1" spc="200" kern="0" dirty="0">
+            <a:pPr marL="0" indent="0">
+              <a:buNone/>
+            </a:pPr>
+            <a:r>
+              <a:rPr lang="en-US" sz="950" b="1" kern="0" spc="200" dirty="0">
                 <a:solidFill>
                   <a:srgbClr val="2E86AB"/>
                 </a:solidFill>
@@ -18631,7 +18381,7 @@
           <a:bodyPr wrap="square" lIns="0" tIns="0" rIns="0" bIns="0" rtlCol="0" anchor="ctr"/>
           <a:lstStyle/>
           <a:p>
-            <a:pPr algn="l" indent="0" marL="0">
+            <a:pPr marL="0" indent="0" algn="l">
               <a:buNone/>
             </a:pPr>
             <a:r>
@@ -18670,7 +18420,7 @@
           <a:bodyPr wrap="square" lIns="0" tIns="0" rIns="0" bIns="0" rtlCol="0" anchor="ctr"/>
           <a:lstStyle/>
           <a:p>
-            <a:pPr algn="l" indent="0" marL="0">
+            <a:pPr marL="0" indent="0" algn="l">
               <a:buNone/>
             </a:pPr>
             <a:r>
@@ -18690,7 +18440,7 @@
       </p:sp>
       <p:graphicFrame>
         <p:nvGraphicFramePr>
-          <p:cNvPr id="5" name="Chart 0" descr=""/>
+          <p:cNvPr id="5" name="Chart 0"/>
           <p:cNvGraphicFramePr/>
           <p:nvPr/>
         </p:nvGraphicFramePr>
@@ -18698,9 +18448,9 @@
           <a:off x="548640" y="1600200"/>
           <a:ext cx="6858000" cy="4480560"/>
         </p:xfrm>
-        <a:graphic xmlns:a="http://schemas.openxmlformats.org/drawingml/2006/main">
+        <a:graphic>
           <a:graphicData uri="http://schemas.openxmlformats.org/drawingml/2006/chart">
-            <c:chart xmlns:c="http://schemas.openxmlformats.org/drawingml/2006/chart" r:id="rId1"/>
+            <c:chart xmlns:c="http://schemas.openxmlformats.org/drawingml/2006/chart" xmlns:r="http://schemas.openxmlformats.org/officeDocument/2006/relationships" r:id="rId3"/>
           </a:graphicData>
         </a:graphic>
       </p:graphicFrame>
@@ -18730,7 +18480,7 @@
             <a:prstDash val="solid"/>
           </a:ln>
           <a:effectLst>
-            <a:outerShdw sx="100000" sy="100000" kx="0" ky="0" algn="bl" rotWithShape="0" blurRad="101600" dist="19050" dir="5400000">
+            <a:outerShdw blurRad="101600" dist="19050" dir="5400000" algn="bl" rotWithShape="0">
               <a:srgbClr val="8CA3BC">
                 <a:alpha val="22000"/>
               </a:srgbClr>
@@ -18759,7 +18509,7 @@
           <a:bodyPr wrap="square" lIns="0" tIns="0" rIns="0" bIns="0" rtlCol="0" anchor="ctr"/>
           <a:lstStyle/>
           <a:p>
-            <a:pPr algn="l" indent="0" marL="0">
+            <a:pPr marL="0" indent="0" algn="l">
               <a:buNone/>
             </a:pPr>
             <a:r>
@@ -18798,7 +18548,7 @@
           <a:bodyPr wrap="square" lIns="0" tIns="0" rIns="0" bIns="0" rtlCol="0" anchor="t"/>
           <a:lstStyle/>
           <a:p>
-            <a:pPr algn="l" indent="0" marL="0">
+            <a:pPr marL="0" indent="0" algn="l">
               <a:lnSpc>
                 <a:spcPct val="125000"/>
               </a:lnSpc>
@@ -18818,7 +18568,7 @@
             <a:endParaRPr lang="en-US" sz="1150" dirty="0"/>
           </a:p>
           <a:p>
-            <a:pPr algn="l" indent="0" marL="0">
+            <a:pPr marL="0" indent="0" algn="l">
               <a:lnSpc>
                 <a:spcPct val="125000"/>
               </a:lnSpc>
@@ -18827,7 +18577,7 @@
             <a:endParaRPr lang="en-US" sz="1150" dirty="0"/>
           </a:p>
           <a:p>
-            <a:pPr algn="l" indent="0" marL="0">
+            <a:pPr marL="0" indent="0" algn="l">
               <a:lnSpc>
                 <a:spcPct val="125000"/>
               </a:lnSpc>
@@ -18847,7 +18597,7 @@
             <a:endParaRPr lang="en-US" sz="1150" dirty="0"/>
           </a:p>
           <a:p>
-            <a:pPr algn="l" indent="0" marL="0">
+            <a:pPr marL="0" indent="0" algn="l">
               <a:lnSpc>
                 <a:spcPct val="125000"/>
               </a:lnSpc>
@@ -18856,7 +18606,7 @@
             <a:endParaRPr lang="en-US" sz="1150" dirty="0"/>
           </a:p>
           <a:p>
-            <a:pPr algn="l" indent="0" marL="0">
+            <a:pPr marL="0" indent="0" algn="l">
               <a:lnSpc>
                 <a:spcPct val="125000"/>
               </a:lnSpc>
@@ -18898,7 +18648,7 @@
           <a:bodyPr wrap="square" lIns="0" tIns="0" rIns="0" bIns="0" rtlCol="0" anchor="ctr"/>
           <a:lstStyle/>
           <a:p>
-            <a:pPr algn="l" indent="0" marL="0">
+            <a:pPr marL="0" indent="0" algn="l">
               <a:buNone/>
             </a:pPr>
             <a:r>
@@ -18937,7 +18687,7 @@
           <a:bodyPr wrap="square" lIns="0" tIns="0" rIns="0" bIns="0" rtlCol="0" anchor="ctr"/>
           <a:lstStyle/>
           <a:p>
-            <a:pPr algn="l" indent="0" marL="0">
+            <a:pPr marL="0" indent="0" algn="l">
               <a:buNone/>
             </a:pPr>
             <a:r>
@@ -18976,7 +18726,7 @@
           <a:bodyPr wrap="square" lIns="0" tIns="0" rIns="0" bIns="0" rtlCol="0" anchor="ctr"/>
           <a:lstStyle/>
           <a:p>
-            <a:pPr algn="l" indent="0" marL="0">
+            <a:pPr marL="0" indent="0" algn="l">
               <a:buNone/>
             </a:pPr>
             <a:r>
@@ -19015,7 +18765,7 @@
           <a:bodyPr wrap="square" lIns="0" tIns="0" rIns="0" bIns="0" rtlCol="0" anchor="ctr"/>
           <a:lstStyle/>
           <a:p>
-            <a:pPr algn="l" indent="0" marL="0">
+            <a:pPr marL="0" indent="0" algn="l">
               <a:buNone/>
             </a:pPr>
             <a:r>
@@ -19049,6 +18799,7 @@
         <a:solidFill>
           <a:srgbClr val="F4F7FA"/>
         </a:solidFill>
+        <a:effectLst/>
       </p:bgPr>
     </p:bg>
     <p:spTree>
@@ -19086,11 +18837,11 @@
           <a:bodyPr wrap="square" lIns="0" tIns="0" rIns="0" bIns="0" rtlCol="0" anchor="ctr"/>
           <a:lstStyle/>
           <a:p>
-            <a:pPr indent="0" marL="0">
-              <a:buNone/>
-            </a:pPr>
-            <a:r>
-              <a:rPr lang="en-US" sz="950" b="1" spc="200" kern="0" dirty="0">
+            <a:pPr marL="0" indent="0">
+              <a:buNone/>
+            </a:pPr>
+            <a:r>
+              <a:rPr lang="en-US" sz="950" b="1" kern="0" spc="200" dirty="0">
                 <a:solidFill>
                   <a:srgbClr val="D9544D"/>
                 </a:solidFill>
@@ -19125,7 +18876,7 @@
           <a:bodyPr wrap="square" lIns="0" tIns="0" rIns="0" bIns="0" rtlCol="0" anchor="ctr"/>
           <a:lstStyle/>
           <a:p>
-            <a:pPr algn="l" indent="0" marL="0">
+            <a:pPr marL="0" indent="0" algn="l">
               <a:buNone/>
             </a:pPr>
             <a:r>
@@ -19164,7 +18915,7 @@
           <a:bodyPr wrap="square" lIns="0" tIns="0" rIns="0" bIns="0" rtlCol="0" anchor="ctr"/>
           <a:lstStyle/>
           <a:p>
-            <a:pPr algn="l" indent="0" marL="0">
+            <a:pPr marL="0" indent="0" algn="l">
               <a:buNone/>
             </a:pPr>
             <a:r>
@@ -19208,7 +18959,7 @@
             <a:prstDash val="solid"/>
           </a:ln>
           <a:effectLst>
-            <a:outerShdw sx="100000" sy="100000" kx="0" ky="0" algn="bl" rotWithShape="0" blurRad="101600" dist="19050" dir="5400000">
+            <a:outerShdw blurRad="101600" dist="19050" dir="5400000" algn="bl" rotWithShape="0">
               <a:srgbClr val="8CA3BC">
                 <a:alpha val="22000"/>
               </a:srgbClr>
@@ -19262,7 +19013,7 @@
           <a:bodyPr wrap="square" lIns="0" tIns="0" rIns="0" bIns="0" rtlCol="0" anchor="ctr"/>
           <a:lstStyle/>
           <a:p>
-            <a:pPr algn="l" indent="0" marL="0">
+            <a:pPr marL="0" indent="0" algn="l">
               <a:buNone/>
             </a:pPr>
             <a:r>
@@ -19301,7 +19052,7 @@
           <a:bodyPr wrap="square" lIns="0" tIns="0" rIns="0" bIns="0" rtlCol="0" anchor="t"/>
           <a:lstStyle/>
           <a:p>
-            <a:pPr algn="l" indent="0" marL="0">
+            <a:pPr marL="0" indent="0" algn="l">
               <a:lnSpc>
                 <a:spcPct val="118000"/>
               </a:lnSpc>
@@ -19348,7 +19099,7 @@
             <a:prstDash val="solid"/>
           </a:ln>
           <a:effectLst>
-            <a:outerShdw sx="100000" sy="100000" kx="0" ky="0" algn="bl" rotWithShape="0" blurRad="101600" dist="19050" dir="5400000">
+            <a:outerShdw blurRad="101600" dist="19050" dir="5400000" algn="bl" rotWithShape="0">
               <a:srgbClr val="8CA3BC">
                 <a:alpha val="22000"/>
               </a:srgbClr>
@@ -19402,7 +19153,7 @@
           <a:bodyPr wrap="square" lIns="0" tIns="0" rIns="0" bIns="0" rtlCol="0" anchor="ctr"/>
           <a:lstStyle/>
           <a:p>
-            <a:pPr algn="l" indent="0" marL="0">
+            <a:pPr marL="0" indent="0" algn="l">
               <a:buNone/>
             </a:pPr>
             <a:r>
@@ -19441,7 +19192,7 @@
           <a:bodyPr wrap="square" lIns="0" tIns="0" rIns="0" bIns="0" rtlCol="0" anchor="t"/>
           <a:lstStyle/>
           <a:p>
-            <a:pPr algn="l" indent="0" marL="0">
+            <a:pPr marL="0" indent="0" algn="l">
               <a:lnSpc>
                 <a:spcPct val="118000"/>
               </a:lnSpc>
@@ -19488,7 +19239,7 @@
             <a:prstDash val="solid"/>
           </a:ln>
           <a:effectLst>
-            <a:outerShdw sx="100000" sy="100000" kx="0" ky="0" algn="bl" rotWithShape="0" blurRad="101600" dist="19050" dir="5400000">
+            <a:outerShdw blurRad="101600" dist="19050" dir="5400000" algn="bl" rotWithShape="0">
               <a:srgbClr val="8CA3BC">
                 <a:alpha val="22000"/>
               </a:srgbClr>
@@ -19542,7 +19293,7 @@
           <a:bodyPr wrap="square" lIns="0" tIns="0" rIns="0" bIns="0" rtlCol="0" anchor="ctr"/>
           <a:lstStyle/>
           <a:p>
-            <a:pPr algn="l" indent="0" marL="0">
+            <a:pPr marL="0" indent="0" algn="l">
               <a:buNone/>
             </a:pPr>
             <a:r>
@@ -19581,7 +19332,7 @@
           <a:bodyPr wrap="square" lIns="0" tIns="0" rIns="0" bIns="0" rtlCol="0" anchor="t"/>
           <a:lstStyle/>
           <a:p>
-            <a:pPr algn="l" indent="0" marL="0">
+            <a:pPr marL="0" indent="0" algn="l">
               <a:lnSpc>
                 <a:spcPct val="118000"/>
               </a:lnSpc>
@@ -19628,7 +19379,7 @@
             <a:prstDash val="solid"/>
           </a:ln>
           <a:effectLst>
-            <a:outerShdw sx="100000" sy="100000" kx="0" ky="0" algn="bl" rotWithShape="0" blurRad="101600" dist="19050" dir="5400000">
+            <a:outerShdw blurRad="101600" dist="19050" dir="5400000" algn="bl" rotWithShape="0">
               <a:srgbClr val="8CA3BC">
                 <a:alpha val="22000"/>
               </a:srgbClr>
@@ -19682,7 +19433,7 @@
           <a:bodyPr wrap="square" lIns="0" tIns="0" rIns="0" bIns="0" rtlCol="0" anchor="ctr"/>
           <a:lstStyle/>
           <a:p>
-            <a:pPr algn="l" indent="0" marL="0">
+            <a:pPr marL="0" indent="0" algn="l">
               <a:buNone/>
             </a:pPr>
             <a:r>
@@ -19721,7 +19472,7 @@
           <a:bodyPr wrap="square" lIns="0" tIns="0" rIns="0" bIns="0" rtlCol="0" anchor="t"/>
           <a:lstStyle/>
           <a:p>
-            <a:pPr algn="l" indent="0" marL="0">
+            <a:pPr marL="0" indent="0" algn="l">
               <a:lnSpc>
                 <a:spcPct val="118000"/>
               </a:lnSpc>
@@ -19768,7 +19519,7 @@
             <a:prstDash val="solid"/>
           </a:ln>
           <a:effectLst>
-            <a:outerShdw sx="100000" sy="100000" kx="0" ky="0" algn="bl" rotWithShape="0" blurRad="101600" dist="19050" dir="5400000">
+            <a:outerShdw blurRad="101600" dist="19050" dir="5400000" algn="bl" rotWithShape="0">
               <a:srgbClr val="8CA3BC">
                 <a:alpha val="22000"/>
               </a:srgbClr>
@@ -19822,7 +19573,7 @@
           <a:bodyPr wrap="square" lIns="0" tIns="0" rIns="0" bIns="0" rtlCol="0" anchor="ctr"/>
           <a:lstStyle/>
           <a:p>
-            <a:pPr algn="l" indent="0" marL="0">
+            <a:pPr marL="0" indent="0" algn="l">
               <a:buNone/>
             </a:pPr>
             <a:r>
@@ -19861,7 +19612,7 @@
           <a:bodyPr wrap="square" lIns="0" tIns="0" rIns="0" bIns="0" rtlCol="0" anchor="t"/>
           <a:lstStyle/>
           <a:p>
-            <a:pPr algn="l" indent="0" marL="0">
+            <a:pPr marL="0" indent="0" algn="l">
               <a:lnSpc>
                 <a:spcPct val="118000"/>
               </a:lnSpc>
@@ -19908,7 +19659,7 @@
             <a:prstDash val="solid"/>
           </a:ln>
           <a:effectLst>
-            <a:outerShdw sx="100000" sy="100000" kx="0" ky="0" algn="bl" rotWithShape="0" blurRad="101600" dist="19050" dir="5400000">
+            <a:outerShdw blurRad="101600" dist="19050" dir="5400000" algn="bl" rotWithShape="0">
               <a:srgbClr val="8CA3BC">
                 <a:alpha val="22000"/>
               </a:srgbClr>
@@ -19962,7 +19713,7 @@
           <a:bodyPr wrap="square" lIns="0" tIns="0" rIns="0" bIns="0" rtlCol="0" anchor="ctr"/>
           <a:lstStyle/>
           <a:p>
-            <a:pPr algn="l" indent="0" marL="0">
+            <a:pPr marL="0" indent="0" algn="l">
               <a:buNone/>
             </a:pPr>
             <a:r>
@@ -20001,7 +19752,7 @@
           <a:bodyPr wrap="square" lIns="0" tIns="0" rIns="0" bIns="0" rtlCol="0" anchor="t"/>
           <a:lstStyle/>
           <a:p>
-            <a:pPr algn="l" indent="0" marL="0">
+            <a:pPr marL="0" indent="0" algn="l">
               <a:lnSpc>
                 <a:spcPct val="118000"/>
               </a:lnSpc>
@@ -20038,6 +19789,7 @@
         <a:solidFill>
           <a:srgbClr val="0E1A2B"/>
         </a:solidFill>
+        <a:effectLst/>
       </p:bgPr>
     </p:bg>
     <p:spTree>
@@ -20075,11 +19827,11 @@
           <a:bodyPr wrap="square" lIns="0" tIns="0" rIns="0" bIns="0" rtlCol="0" anchor="ctr"/>
           <a:lstStyle/>
           <a:p>
-            <a:pPr indent="0" marL="0">
-              <a:buNone/>
-            </a:pPr>
-            <a:r>
-              <a:rPr lang="en-US" sz="950" b="1" spc="200" kern="0" dirty="0">
+            <a:pPr marL="0" indent="0">
+              <a:buNone/>
+            </a:pPr>
+            <a:r>
+              <a:rPr lang="en-US" sz="950" b="1" kern="0" spc="200" dirty="0">
                 <a:solidFill>
                   <a:srgbClr val="02C39A"/>
                 </a:solidFill>
@@ -20114,7 +19866,7 @@
           <a:bodyPr wrap="square" lIns="0" tIns="0" rIns="0" bIns="0" rtlCol="0" anchor="ctr"/>
           <a:lstStyle/>
           <a:p>
-            <a:pPr algn="l" indent="0" marL="0">
+            <a:pPr marL="0" indent="0" algn="l">
               <a:buNone/>
             </a:pPr>
             <a:r>
@@ -20153,7 +19905,7 @@
           <a:bodyPr wrap="square" lIns="0" tIns="0" rIns="0" bIns="0" rtlCol="0" anchor="ctr"/>
           <a:lstStyle/>
           <a:p>
-            <a:pPr algn="l" indent="0" marL="0">
+            <a:pPr marL="0" indent="0" algn="l">
               <a:buNone/>
             </a:pPr>
             <a:r>
@@ -20244,7 +19996,7 @@
           <a:bodyPr wrap="square" lIns="0" tIns="0" rIns="0" bIns="0" rtlCol="0" anchor="t"/>
           <a:lstStyle/>
           <a:p>
-            <a:pPr algn="l" indent="0" marL="0">
+            <a:pPr marL="0" indent="0" algn="l">
               <a:lnSpc>
                 <a:spcPct val="112000"/>
               </a:lnSpc>
@@ -20286,7 +20038,7 @@
           <a:bodyPr wrap="square" lIns="0" tIns="0" rIns="0" bIns="0" rtlCol="0" anchor="t"/>
           <a:lstStyle/>
           <a:p>
-            <a:pPr algn="l" indent="0" marL="0">
+            <a:pPr marL="0" indent="0" algn="l">
               <a:lnSpc>
                 <a:spcPct val="112000"/>
               </a:lnSpc>
@@ -20380,7 +20132,7 @@
           <a:bodyPr wrap="square" lIns="0" tIns="0" rIns="0" bIns="0" rtlCol="0" anchor="t"/>
           <a:lstStyle/>
           <a:p>
-            <a:pPr algn="l" indent="0" marL="0">
+            <a:pPr marL="0" indent="0" algn="l">
               <a:lnSpc>
                 <a:spcPct val="112000"/>
               </a:lnSpc>
@@ -20422,7 +20174,7 @@
           <a:bodyPr wrap="square" lIns="0" tIns="0" rIns="0" bIns="0" rtlCol="0" anchor="t"/>
           <a:lstStyle/>
           <a:p>
-            <a:pPr algn="l" indent="0" marL="0">
+            <a:pPr marL="0" indent="0" algn="l">
               <a:lnSpc>
                 <a:spcPct val="112000"/>
               </a:lnSpc>
@@ -20516,7 +20268,7 @@
           <a:bodyPr wrap="square" lIns="0" tIns="0" rIns="0" bIns="0" rtlCol="0" anchor="t"/>
           <a:lstStyle/>
           <a:p>
-            <a:pPr algn="l" indent="0" marL="0">
+            <a:pPr marL="0" indent="0" algn="l">
               <a:lnSpc>
                 <a:spcPct val="112000"/>
               </a:lnSpc>
@@ -20558,7 +20310,7 @@
           <a:bodyPr wrap="square" lIns="0" tIns="0" rIns="0" bIns="0" rtlCol="0" anchor="t"/>
           <a:lstStyle/>
           <a:p>
-            <a:pPr algn="l" indent="0" marL="0">
+            <a:pPr marL="0" indent="0" algn="l">
               <a:lnSpc>
                 <a:spcPct val="112000"/>
               </a:lnSpc>
@@ -20652,7 +20404,7 @@
           <a:bodyPr wrap="square" lIns="0" tIns="0" rIns="0" bIns="0" rtlCol="0" anchor="t"/>
           <a:lstStyle/>
           <a:p>
-            <a:pPr algn="l" indent="0" marL="0">
+            <a:pPr marL="0" indent="0" algn="l">
               <a:lnSpc>
                 <a:spcPct val="112000"/>
               </a:lnSpc>
@@ -20694,7 +20446,7 @@
           <a:bodyPr wrap="square" lIns="0" tIns="0" rIns="0" bIns="0" rtlCol="0" anchor="t"/>
           <a:lstStyle/>
           <a:p>
-            <a:pPr algn="l" indent="0" marL="0">
+            <a:pPr marL="0" indent="0" algn="l">
               <a:lnSpc>
                 <a:spcPct val="112000"/>
               </a:lnSpc>
@@ -20788,7 +20540,7 @@
           <a:bodyPr wrap="square" lIns="0" tIns="0" rIns="0" bIns="0" rtlCol="0" anchor="t"/>
           <a:lstStyle/>
           <a:p>
-            <a:pPr algn="l" indent="0" marL="0">
+            <a:pPr marL="0" indent="0" algn="l">
               <a:lnSpc>
                 <a:spcPct val="112000"/>
               </a:lnSpc>
@@ -20830,7 +20582,7 @@
           <a:bodyPr wrap="square" lIns="0" tIns="0" rIns="0" bIns="0" rtlCol="0" anchor="t"/>
           <a:lstStyle/>
           <a:p>
-            <a:pPr algn="l" indent="0" marL="0">
+            <a:pPr marL="0" indent="0" algn="l">
               <a:lnSpc>
                 <a:spcPct val="112000"/>
               </a:lnSpc>
@@ -20924,7 +20676,7 @@
           <a:bodyPr wrap="square" lIns="0" tIns="0" rIns="0" bIns="0" rtlCol="0" anchor="t"/>
           <a:lstStyle/>
           <a:p>
-            <a:pPr algn="l" indent="0" marL="0">
+            <a:pPr marL="0" indent="0" algn="l">
               <a:lnSpc>
                 <a:spcPct val="112000"/>
               </a:lnSpc>
@@ -20966,7 +20718,7 @@
           <a:bodyPr wrap="square" lIns="0" tIns="0" rIns="0" bIns="0" rtlCol="0" anchor="t"/>
           <a:lstStyle/>
           <a:p>
-            <a:pPr algn="l" indent="0" marL="0">
+            <a:pPr marL="0" indent="0" algn="l">
               <a:lnSpc>
                 <a:spcPct val="112000"/>
               </a:lnSpc>
@@ -21008,7 +20760,7 @@
           <a:bodyPr wrap="square" lIns="0" tIns="0" rIns="0" bIns="0" rtlCol="0" anchor="ctr"/>
           <a:lstStyle/>
           <a:p>
-            <a:pPr algn="l" indent="0" marL="0">
+            <a:pPr marL="0" indent="0" algn="l">
               <a:buNone/>
             </a:pPr>
             <a:r>
@@ -21327,4 +21079,299 @@
     </a:ext>
   </a:extLst>
 </a:theme>
+</file>
+
+<file path=ppt/theme/theme2.xml><?xml version="1.0" encoding="utf-8"?>
+<a:theme xmlns:a="http://schemas.openxmlformats.org/drawingml/2006/main" name="Office Theme">
+  <a:themeElements>
+    <a:clrScheme name="Office">
+      <a:dk1>
+        <a:sysClr val="windowText" lastClr="000000"/>
+      </a:dk1>
+      <a:lt1>
+        <a:sysClr val="window" lastClr="FFFFFF"/>
+      </a:lt1>
+      <a:dk2>
+        <a:srgbClr val="44546A"/>
+      </a:dk2>
+      <a:lt2>
+        <a:srgbClr val="E7E6E6"/>
+      </a:lt2>
+      <a:accent1>
+        <a:srgbClr val="4472C4"/>
+      </a:accent1>
+      <a:accent2>
+        <a:srgbClr val="ED7D31"/>
+      </a:accent2>
+      <a:accent3>
+        <a:srgbClr val="A5A5A5"/>
+      </a:accent3>
+      <a:accent4>
+        <a:srgbClr val="FFC000"/>
+      </a:accent4>
+      <a:accent5>
+        <a:srgbClr val="5B9BD5"/>
+      </a:accent5>
+      <a:accent6>
+        <a:srgbClr val="70AD47"/>
+      </a:accent6>
+      <a:hlink>
+        <a:srgbClr val="0563C1"/>
+      </a:hlink>
+      <a:folHlink>
+        <a:srgbClr val="954F72"/>
+      </a:folHlink>
+    </a:clrScheme>
+    <a:fontScheme name="Office">
+      <a:majorFont>
+        <a:latin typeface="Calibri Light" panose="020F0302020204030204"/>
+        <a:ea typeface=""/>
+        <a:cs typeface=""/>
+        <a:font script="Jpan" typeface="游ゴシック Light"/>
+        <a:font script="Hang" typeface="맑은 고딕"/>
+        <a:font script="Hans" typeface="等线 Light"/>
+        <a:font script="Hant" typeface="新細明體"/>
+        <a:font script="Arab" typeface="Times New Roman"/>
+        <a:font script="Hebr" typeface="Times New Roman"/>
+        <a:font script="Thai" typeface="Angsana New"/>
+        <a:font script="Ethi" typeface="Nyala"/>
+        <a:font script="Beng" typeface="Vrinda"/>
+        <a:font script="Gujr" typeface="Shruti"/>
+        <a:font script="Khmr" typeface="MoolBoran"/>
+        <a:font script="Knda" typeface="Tunga"/>
+        <a:font script="Guru" typeface="Raavi"/>
+        <a:font script="Cans" typeface="Euphemia"/>
+        <a:font script="Cher" typeface="Plantagenet Cherokee"/>
+        <a:font script="Yiii" typeface="Microsoft Yi Baiti"/>
+        <a:font script="Tibt" typeface="Microsoft Himalaya"/>
+        <a:font script="Thaa" typeface="MV Boli"/>
+        <a:font script="Deva" typeface="Mangal"/>
+        <a:font script="Telu" typeface="Gautami"/>
+        <a:font script="Taml" typeface="Latha"/>
+        <a:font script="Syrc" typeface="Estrangelo Edessa"/>
+        <a:font script="Orya" typeface="Kalinga"/>
+        <a:font script="Mlym" typeface="Kartika"/>
+        <a:font script="Laoo" typeface="DokChampa"/>
+        <a:font script="Sinh" typeface="Iskoola Pota"/>
+        <a:font script="Mong" typeface="Mongolian Baiti"/>
+        <a:font script="Viet" typeface="Times New Roman"/>
+        <a:font script="Uigh" typeface="Microsoft Uighur"/>
+        <a:font script="Geor" typeface="Sylfaen"/>
+        <a:font script="Armn" typeface="Arial"/>
+        <a:font script="Bugi" typeface="Leelawadee UI"/>
+        <a:font script="Bopo" typeface="Microsoft JhengHei"/>
+        <a:font script="Java" typeface="Javanese Text"/>
+        <a:font script="Lisu" typeface="Segoe UI"/>
+        <a:font script="Mymr" typeface="Myanmar Text"/>
+        <a:font script="Nkoo" typeface="Ebrima"/>
+        <a:font script="Olck" typeface="Nirmala UI"/>
+        <a:font script="Osma" typeface="Ebrima"/>
+        <a:font script="Phag" typeface="Phagspa"/>
+        <a:font script="Syrn" typeface="Estrangelo Edessa"/>
+        <a:font script="Syrj" typeface="Estrangelo Edessa"/>
+        <a:font script="Syre" typeface="Estrangelo Edessa"/>
+        <a:font script="Sora" typeface="Nirmala UI"/>
+        <a:font script="Tale" typeface="Microsoft Tai Le"/>
+        <a:font script="Talu" typeface="Microsoft New Tai Lue"/>
+        <a:font script="Tfng" typeface="Ebrima"/>
+      </a:majorFont>
+      <a:minorFont>
+        <a:latin typeface="Calibri" panose="020F0502020204030204"/>
+        <a:ea typeface=""/>
+        <a:cs typeface=""/>
+        <a:font script="Jpan" typeface="游ゴシック"/>
+        <a:font script="Hang" typeface="맑은 고딕"/>
+        <a:font script="Hans" typeface="等线"/>
+        <a:font script="Hant" typeface="新細明體"/>
+        <a:font script="Arab" typeface="Arial"/>
+        <a:font script="Hebr" typeface="Arial"/>
+        <a:font script="Thai" typeface="Cordia New"/>
+        <a:font script="Ethi" typeface="Nyala"/>
+        <a:font script="Beng" typeface="Vrinda"/>
+        <a:font script="Gujr" typeface="Shruti"/>
+        <a:font script="Khmr" typeface="DaunPenh"/>
+        <a:font script="Knda" typeface="Tunga"/>
+        <a:font script="Guru" typeface="Raavi"/>
+        <a:font script="Cans" typeface="Euphemia"/>
+        <a:font script="Cher" typeface="Plantagenet Cherokee"/>
+        <a:font script="Yiii" typeface="Microsoft Yi Baiti"/>
+        <a:font script="Tibt" typeface="Microsoft Himalaya"/>
+        <a:font script="Thaa" typeface="MV Boli"/>
+        <a:font script="Deva" typeface="Mangal"/>
+        <a:font script="Telu" typeface="Gautami"/>
+        <a:font script="Taml" typeface="Latha"/>
+        <a:font script="Syrc" typeface="Estrangelo Edessa"/>
+        <a:font script="Orya" typeface="Kalinga"/>
+        <a:font script="Mlym" typeface="Kartika"/>
+        <a:font script="Laoo" typeface="DokChampa"/>
+        <a:font script="Sinh" typeface="Iskoola Pota"/>
+        <a:font script="Mong" typeface="Mongolian Baiti"/>
+        <a:font script="Viet" typeface="Arial"/>
+        <a:font script="Uigh" typeface="Microsoft Uighur"/>
+        <a:font script="Geor" typeface="Sylfaen"/>
+        <a:font script="Armn" typeface="Arial"/>
+        <a:font script="Bugi" typeface="Leelawadee UI"/>
+        <a:font script="Bopo" typeface="Microsoft JhengHei"/>
+        <a:font script="Java" typeface="Javanese Text"/>
+        <a:font script="Lisu" typeface="Segoe UI"/>
+        <a:font script="Mymr" typeface="Myanmar Text"/>
+        <a:font script="Nkoo" typeface="Ebrima"/>
+        <a:font script="Olck" typeface="Nirmala UI"/>
+        <a:font script="Osma" typeface="Ebrima"/>
+        <a:font script="Phag" typeface="Phagspa"/>
+        <a:font script="Syrn" typeface="Estrangelo Edessa"/>
+        <a:font script="Syrj" typeface="Estrangelo Edessa"/>
+        <a:font script="Syre" typeface="Estrangelo Edessa"/>
+        <a:font script="Sora" typeface="Nirmala UI"/>
+        <a:font script="Tale" typeface="Microsoft Tai Le"/>
+        <a:font script="Talu" typeface="Microsoft New Tai Lue"/>
+        <a:font script="Tfng" typeface="Ebrima"/>
+      </a:minorFont>
+    </a:fontScheme>
+    <a:fmtScheme name="Office">
+      <a:fillStyleLst>
+        <a:solidFill>
+          <a:schemeClr val="phClr"/>
+        </a:solidFill>
+        <a:gradFill rotWithShape="1">
+          <a:gsLst>
+            <a:gs pos="0">
+              <a:schemeClr val="phClr">
+                <a:lumMod val="110000"/>
+                <a:satMod val="105000"/>
+                <a:tint val="67000"/>
+              </a:schemeClr>
+            </a:gs>
+            <a:gs pos="50000">
+              <a:schemeClr val="phClr">
+                <a:lumMod val="105000"/>
+                <a:satMod val="103000"/>
+                <a:tint val="73000"/>
+              </a:schemeClr>
+            </a:gs>
+            <a:gs pos="100000">
+              <a:schemeClr val="phClr">
+                <a:lumMod val="105000"/>
+                <a:satMod val="109000"/>
+                <a:tint val="81000"/>
+              </a:schemeClr>
+            </a:gs>
+          </a:gsLst>
+          <a:lin ang="5400000" scaled="0"/>
+        </a:gradFill>
+        <a:gradFill rotWithShape="1">
+          <a:gsLst>
+            <a:gs pos="0">
+              <a:schemeClr val="phClr">
+                <a:satMod val="103000"/>
+                <a:lumMod val="102000"/>
+                <a:tint val="94000"/>
+              </a:schemeClr>
+            </a:gs>
+            <a:gs pos="50000">
+              <a:schemeClr val="phClr">
+                <a:satMod val="110000"/>
+                <a:lumMod val="100000"/>
+                <a:shade val="100000"/>
+              </a:schemeClr>
+            </a:gs>
+            <a:gs pos="100000">
+              <a:schemeClr val="phClr">
+                <a:lumMod val="99000"/>
+                <a:satMod val="120000"/>
+                <a:shade val="78000"/>
+              </a:schemeClr>
+            </a:gs>
+          </a:gsLst>
+          <a:lin ang="5400000" scaled="0"/>
+        </a:gradFill>
+      </a:fillStyleLst>
+      <a:lnStyleLst>
+        <a:ln w="6350" cap="flat" cmpd="sng" algn="ctr">
+          <a:solidFill>
+            <a:schemeClr val="phClr"/>
+          </a:solidFill>
+          <a:prstDash val="solid"/>
+          <a:miter lim="800000"/>
+        </a:ln>
+        <a:ln w="12700" cap="flat" cmpd="sng" algn="ctr">
+          <a:solidFill>
+            <a:schemeClr val="phClr"/>
+          </a:solidFill>
+          <a:prstDash val="solid"/>
+          <a:miter lim="800000"/>
+        </a:ln>
+        <a:ln w="19050" cap="flat" cmpd="sng" algn="ctr">
+          <a:solidFill>
+            <a:schemeClr val="phClr"/>
+          </a:solidFill>
+          <a:prstDash val="solid"/>
+          <a:miter lim="800000"/>
+        </a:ln>
+      </a:lnStyleLst>
+      <a:effectStyleLst>
+        <a:effectStyle>
+          <a:effectLst/>
+        </a:effectStyle>
+        <a:effectStyle>
+          <a:effectLst/>
+        </a:effectStyle>
+        <a:effectStyle>
+          <a:effectLst>
+            <a:outerShdw blurRad="57150" dist="19050" dir="5400000" algn="ctr" rotWithShape="0">
+              <a:srgbClr val="000000">
+                <a:alpha val="63000"/>
+              </a:srgbClr>
+            </a:outerShdw>
+          </a:effectLst>
+        </a:effectStyle>
+      </a:effectStyleLst>
+      <a:bgFillStyleLst>
+        <a:solidFill>
+          <a:schemeClr val="phClr"/>
+        </a:solidFill>
+        <a:solidFill>
+          <a:schemeClr val="phClr">
+            <a:tint val="95000"/>
+            <a:satMod val="170000"/>
+          </a:schemeClr>
+        </a:solidFill>
+        <a:gradFill rotWithShape="1">
+          <a:gsLst>
+            <a:gs pos="0">
+              <a:schemeClr val="phClr">
+                <a:tint val="93000"/>
+                <a:satMod val="150000"/>
+                <a:shade val="98000"/>
+                <a:lumMod val="102000"/>
+              </a:schemeClr>
+            </a:gs>
+            <a:gs pos="50000">
+              <a:schemeClr val="phClr">
+                <a:tint val="98000"/>
+                <a:satMod val="130000"/>
+                <a:shade val="90000"/>
+                <a:lumMod val="103000"/>
+              </a:schemeClr>
+            </a:gs>
+            <a:gs pos="100000">
+              <a:schemeClr val="phClr">
+                <a:shade val="63000"/>
+                <a:satMod val="120000"/>
+              </a:schemeClr>
+            </a:gs>
+          </a:gsLst>
+          <a:lin ang="5400000" scaled="0"/>
+        </a:gradFill>
+      </a:bgFillStyleLst>
+    </a:fmtScheme>
+  </a:themeElements>
+  <a:objectDefaults/>
+  <a:extraClrSchemeLst/>
+  <a:extLst>
+    <a:ext uri="{05A4C25C-085E-4340-85A3-A5531E510DB2}">
+      <thm15:themeFamily xmlns:thm15="http://schemas.microsoft.com/office/thememl/2012/main" name="Office Theme" id="{62F939B6-93AF-4DB8-9C6B-D6C7DFDC589F}" vid="{4A3C46E8-61CC-4603-A589-7422A47A8E4A}"/>
+    </a:ext>
+  </a:extLst>
+</a:theme>
 </file>